--- a/6th Semester/Level-3, Semester-II/CCE 323  Optical Fiber Communication/Muradul Boshir/Passive Components 2-4-26.pptx
+++ b/6th Semester/Level-3, Semester-II/CCE 323  Optical Fiber Communication/Muradul Boshir/Passive Components 2-4-26.pptx
@@ -1,19 +1,22 @@
 
 <file path=ppt/presentation.xml><?xml version="1.0" encoding="utf-8"?>
-<p:presentation xmlns:a="http://schemas.openxmlformats.org/drawingml/2006/main" xmlns:r="http://schemas.openxmlformats.org/officeDocument/2006/relationships" xmlns:p="http://schemas.openxmlformats.org/presentationml/2006/main" saveSubsetFonts="1">
+<p:presentation xmlns:a="http://schemas.openxmlformats.org/drawingml/2006/main" xmlns:r="http://schemas.openxmlformats.org/officeDocument/2006/relationships" xmlns:p="http://schemas.openxmlformats.org/presentationml/2006/main" xmlns:m="http://schemas.openxmlformats.org/officeDocument/2006/math" xmlns:w="http://schemas.openxmlformats.org/wordprocessingml/2006/main" saveSubsetFonts="1">
   <p:sldMasterIdLst>
     <p:sldMasterId id="2147483648" r:id="rId1"/>
   </p:sldMasterIdLst>
+  <p:notesMasterIdLst>
+    <p:notesMasterId r:id="rId13"/>
+  </p:notesMasterIdLst>
   <p:sldIdLst>
-    <p:sldId id="256" r:id="rId2"/>
-    <p:sldId id="257" r:id="rId3"/>
-    <p:sldId id="258" r:id="rId4"/>
-    <p:sldId id="259" r:id="rId5"/>
-    <p:sldId id="260" r:id="rId6"/>
-    <p:sldId id="261" r:id="rId7"/>
-    <p:sldId id="262" r:id="rId8"/>
-    <p:sldId id="263" r:id="rId9"/>
-    <p:sldId id="264" r:id="rId10"/>
+    <p:sldId id="256" r:id="rId4"/>
+    <p:sldId id="257" r:id="rId5"/>
+    <p:sldId id="258" r:id="rId6"/>
+    <p:sldId id="259" r:id="rId7"/>
+    <p:sldId id="260" r:id="rId8"/>
+    <p:sldId id="261" r:id="rId9"/>
+    <p:sldId id="262" r:id="rId10"/>
+    <p:sldId id="263" r:id="rId11"/>
+    <p:sldId id="264" r:id="rId12"/>
   </p:sldIdLst>
   <p:sldSz cx="12192000" cy="6858000"/>
   <p:notesSz cx="6858000" cy="9144000"/>
@@ -21,8 +24,8 @@
     <a:defPPr>
       <a:defRPr lang="en-US"/>
     </a:defPPr>
-    <a:lvl1pPr marL="0" algn="l" defTabSz="914400" rtl="0" eaLnBrk="1" latinLnBrk="0" hangingPunct="1">
-      <a:defRPr sz="1800" kern="1200">
+    <a:lvl1pPr marL="0" algn="l" defTabSz="914400" rtl="0">
+      <a:defRPr sz="1800">
         <a:solidFill>
           <a:schemeClr val="tx1"/>
         </a:solidFill>
@@ -31,8 +34,8 @@
         <a:cs typeface="+mn-cs"/>
       </a:defRPr>
     </a:lvl1pPr>
-    <a:lvl2pPr marL="457200" algn="l" defTabSz="914400" rtl="0" eaLnBrk="1" latinLnBrk="0" hangingPunct="1">
-      <a:defRPr sz="1800" kern="1200">
+    <a:lvl2pPr marL="457200" algn="l" defTabSz="914400" rtl="0">
+      <a:defRPr sz="1800">
         <a:solidFill>
           <a:schemeClr val="tx1"/>
         </a:solidFill>
@@ -41,8 +44,8 @@
         <a:cs typeface="+mn-cs"/>
       </a:defRPr>
     </a:lvl2pPr>
-    <a:lvl3pPr marL="914400" algn="l" defTabSz="914400" rtl="0" eaLnBrk="1" latinLnBrk="0" hangingPunct="1">
-      <a:defRPr sz="1800" kern="1200">
+    <a:lvl3pPr marL="914400" algn="l" defTabSz="914400" rtl="0">
+      <a:defRPr sz="1800">
         <a:solidFill>
           <a:schemeClr val="tx1"/>
         </a:solidFill>
@@ -51,8 +54,8 @@
         <a:cs typeface="+mn-cs"/>
       </a:defRPr>
     </a:lvl3pPr>
-    <a:lvl4pPr marL="1371600" algn="l" defTabSz="914400" rtl="0" eaLnBrk="1" latinLnBrk="0" hangingPunct="1">
-      <a:defRPr sz="1800" kern="1200">
+    <a:lvl4pPr marL="1371600" algn="l" defTabSz="914400" rtl="0">
+      <a:defRPr sz="1800">
         <a:solidFill>
           <a:schemeClr val="tx1"/>
         </a:solidFill>
@@ -61,8 +64,8 @@
         <a:cs typeface="+mn-cs"/>
       </a:defRPr>
     </a:lvl4pPr>
-    <a:lvl5pPr marL="1828800" algn="l" defTabSz="914400" rtl="0" eaLnBrk="1" latinLnBrk="0" hangingPunct="1">
-      <a:defRPr sz="1800" kern="1200">
+    <a:lvl5pPr marL="1828800" algn="l" defTabSz="914400" rtl="0">
+      <a:defRPr sz="1800">
         <a:solidFill>
           <a:schemeClr val="tx1"/>
         </a:solidFill>
@@ -71,8 +74,8 @@
         <a:cs typeface="+mn-cs"/>
       </a:defRPr>
     </a:lvl5pPr>
-    <a:lvl6pPr marL="2286000" algn="l" defTabSz="914400" rtl="0" eaLnBrk="1" latinLnBrk="0" hangingPunct="1">
-      <a:defRPr sz="1800" kern="1200">
+    <a:lvl6pPr marL="2286000" algn="l" defTabSz="914400" rtl="0">
+      <a:defRPr sz="1800">
         <a:solidFill>
           <a:schemeClr val="tx1"/>
         </a:solidFill>
@@ -81,8 +84,8 @@
         <a:cs typeface="+mn-cs"/>
       </a:defRPr>
     </a:lvl6pPr>
-    <a:lvl7pPr marL="2743200" algn="l" defTabSz="914400" rtl="0" eaLnBrk="1" latinLnBrk="0" hangingPunct="1">
-      <a:defRPr sz="1800" kern="1200">
+    <a:lvl7pPr marL="2743200" algn="l" defTabSz="914400" rtl="0">
+      <a:defRPr sz="1800">
         <a:solidFill>
           <a:schemeClr val="tx1"/>
         </a:solidFill>
@@ -91,8 +94,8 @@
         <a:cs typeface="+mn-cs"/>
       </a:defRPr>
     </a:lvl7pPr>
-    <a:lvl8pPr marL="3200400" algn="l" defTabSz="914400" rtl="0" eaLnBrk="1" latinLnBrk="0" hangingPunct="1">
-      <a:defRPr sz="1800" kern="1200">
+    <a:lvl8pPr marL="3200400" algn="l" defTabSz="914400" rtl="0">
+      <a:defRPr sz="1800">
         <a:solidFill>
           <a:schemeClr val="tx1"/>
         </a:solidFill>
@@ -101,8 +104,8 @@
         <a:cs typeface="+mn-cs"/>
       </a:defRPr>
     </a:lvl8pPr>
-    <a:lvl9pPr marL="3657600" algn="l" defTabSz="914400" rtl="0" eaLnBrk="1" latinLnBrk="0" hangingPunct="1">
-      <a:defRPr sz="1800" kern="1200">
+    <a:lvl9pPr marL="3657600" algn="l" defTabSz="914400" rtl="0">
+      <a:defRPr sz="1800">
         <a:solidFill>
           <a:schemeClr val="tx1"/>
         </a:solidFill>
@@ -115,8 +118,1093 @@
 </p:presentation>
 </file>
 
+<file path=ppt/notesMasters/notesMaster1.xml><?xml version="1.0" encoding="utf-8"?>
+<p:notesMaster xmlns:a="http://schemas.openxmlformats.org/drawingml/2006/main" xmlns:r="http://schemas.openxmlformats.org/officeDocument/2006/relationships" xmlns:p="http://schemas.openxmlformats.org/presentationml/2006/main">
+  <p:cSld name="">
+    <p:bg>
+      <p:bgRef idx="1001">
+        <a:schemeClr val="bg1"/>
+      </p:bgRef>
+    </p:bg>
+    <p:spTree>
+      <p:nvGrpSpPr>
+        <p:cNvPr id="1" name=""/>
+        <p:cNvGrpSpPr/>
+        <p:nvPr/>
+      </p:nvGrpSpPr>
+      <p:grpSpPr bwMode="auto">
+        <a:xfrm>
+          <a:off x="0" y="0"/>
+          <a:ext cx="0" cy="0"/>
+          <a:chOff x="0" y="0"/>
+          <a:chExt cx="0" cy="0"/>
+        </a:xfrm>
+      </p:grpSpPr>
+      <p:sp>
+        <p:nvSpPr>
+          <p:cNvPr id="2" name="Header Placeholder 1"/>
+          <p:cNvSpPr>
+            <a:spLocks noGrp="1"/>
+          </p:cNvSpPr>
+          <p:nvPr>
+            <p:ph type="hdr" sz="quarter"/>
+          </p:nvPr>
+        </p:nvSpPr>
+        <p:spPr bwMode="auto">
+          <a:xfrm>
+            <a:off x="0" y="0"/>
+            <a:ext cx="2971800" cy="458788"/>
+          </a:xfrm>
+          <a:prstGeom prst="rect">
+            <a:avLst/>
+          </a:prstGeom>
+        </p:spPr>
+        <p:txBody>
+          <a:bodyPr vert="horz" lIns="91440" tIns="45720" rIns="91440" bIns="45720" rtlCol="0" anchor="ctr"/>
+          <a:lstStyle>
+            <a:lvl1pPr algn="l">
+              <a:defRPr sz="1200"/>
+            </a:lvl1pPr>
+          </a:lstStyle>
+          <a:p>
+            <a:pPr>
+              <a:defRPr/>
+            </a:pPr>
+            <a:endParaRPr/>
+          </a:p>
+        </p:txBody>
+      </p:sp>
+      <p:sp>
+        <p:nvSpPr>
+          <p:cNvPr id="3" name="Date Placeholder 2"/>
+          <p:cNvSpPr>
+            <a:spLocks noGrp="1"/>
+          </p:cNvSpPr>
+          <p:nvPr>
+            <p:ph type="dt" idx="2"/>
+          </p:nvPr>
+        </p:nvSpPr>
+        <p:spPr bwMode="auto">
+          <a:xfrm>
+            <a:off x="3884613" y="0"/>
+            <a:ext cx="2971800" cy="458788"/>
+          </a:xfrm>
+          <a:prstGeom prst="rect">
+            <a:avLst/>
+          </a:prstGeom>
+        </p:spPr>
+        <p:txBody>
+          <a:bodyPr vert="horz" lIns="91440" tIns="45720" rIns="91440" bIns="45720" rtlCol="0" anchor="ctr"/>
+          <a:lstStyle>
+            <a:lvl1pPr algn="r">
+              <a:defRPr sz="1200"/>
+            </a:lvl1pPr>
+          </a:lstStyle>
+          <a:p>
+            <a:pPr>
+              <a:defRPr/>
+            </a:pPr>
+            <a:endParaRPr/>
+          </a:p>
+        </p:txBody>
+      </p:sp>
+      <p:sp>
+        <p:nvSpPr>
+          <p:cNvPr id="3" name="Date Placeholder 2"/>
+          <p:cNvSpPr>
+            <a:spLocks noGrp="1"/>
+          </p:cNvSpPr>
+          <p:nvPr>
+            <p:ph type="dt" idx="3"/>
+          </p:nvPr>
+        </p:nvSpPr>
+        <p:spPr bwMode="auto">
+          <a:xfrm>
+            <a:off x="3884613" y="0"/>
+            <a:ext cx="2971800" cy="458788"/>
+          </a:xfrm>
+          <a:prstGeom prst="rect">
+            <a:avLst/>
+          </a:prstGeom>
+        </p:spPr>
+        <p:txBody>
+          <a:bodyPr vert="horz" lIns="91440" tIns="45720" rIns="91440" bIns="45720" rtlCol="0" anchor="ctr"/>
+          <a:lstStyle>
+            <a:lvl1pPr algn="r">
+              <a:defRPr sz="1200"/>
+            </a:lvl1pPr>
+          </a:lstStyle>
+          <a:p>
+            <a:pPr>
+              <a:defRPr/>
+            </a:pPr>
+            <a:endParaRPr/>
+          </a:p>
+        </p:txBody>
+      </p:sp>
+      <p:sp>
+        <p:nvSpPr>
+          <p:cNvPr id="5" name="Notes Placeholder 4"/>
+          <p:cNvSpPr>
+            <a:spLocks noGrp="1"/>
+          </p:cNvSpPr>
+          <p:nvPr>
+            <p:ph type="body" sz="quarter" idx="1"/>
+          </p:nvPr>
+        </p:nvSpPr>
+        <p:spPr bwMode="auto">
+          <a:xfrm>
+            <a:off x="685800" y="4400550"/>
+            <a:ext cx="5486400" cy="3600450"/>
+          </a:xfrm>
+          <a:prstGeom prst="rect">
+            <a:avLst/>
+          </a:prstGeom>
+        </p:spPr>
+        <p:txBody>
+          <a:bodyPr vert="horz" lIns="91440" tIns="45720" rIns="91440" bIns="45720" rtlCol="0" anchor="ctr"/>
+          <a:lstStyle/>
+          <a:p>
+            <a:pPr>
+              <a:defRPr/>
+            </a:pPr>
+            <a:endParaRPr/>
+          </a:p>
+        </p:txBody>
+      </p:sp>
+      <p:sp>
+        <p:nvSpPr>
+          <p:cNvPr id="6" name="Footer Placeholder 5"/>
+          <p:cNvSpPr>
+            <a:spLocks noGrp="1"/>
+          </p:cNvSpPr>
+          <p:nvPr>
+            <p:ph type="ftr" sz="quarter" idx="4"/>
+          </p:nvPr>
+        </p:nvSpPr>
+        <p:spPr bwMode="auto">
+          <a:xfrm>
+            <a:off x="0" y="8685213"/>
+            <a:ext cx="2971800" cy="458787"/>
+          </a:xfrm>
+          <a:prstGeom prst="rect">
+            <a:avLst/>
+          </a:prstGeom>
+        </p:spPr>
+        <p:txBody>
+          <a:bodyPr vert="horz" lIns="91440" tIns="45720" rIns="91440" bIns="45720" rtlCol="0" anchor="b"/>
+          <a:lstStyle>
+            <a:lvl1pPr algn="l">
+              <a:defRPr sz="1200"/>
+            </a:lvl1pPr>
+          </a:lstStyle>
+          <a:p>
+            <a:pPr>
+              <a:defRPr/>
+            </a:pPr>
+            <a:endParaRPr/>
+          </a:p>
+        </p:txBody>
+      </p:sp>
+      <p:sp>
+        <p:nvSpPr>
+          <p:cNvPr id="7" name="Slide Number Placeholder 6"/>
+          <p:cNvSpPr>
+            <a:spLocks noGrp="1"/>
+          </p:cNvSpPr>
+          <p:nvPr>
+            <p:ph type="sldNum" sz="quarter" idx="10"/>
+          </p:nvPr>
+        </p:nvSpPr>
+        <p:spPr bwMode="auto">
+          <a:xfrm>
+            <a:off x="3884613" y="8685213"/>
+            <a:ext cx="2971800" cy="458787"/>
+          </a:xfrm>
+          <a:prstGeom prst="rect">
+            <a:avLst/>
+          </a:prstGeom>
+        </p:spPr>
+        <p:txBody>
+          <a:bodyPr vert="horz" lIns="91440" tIns="45720" rIns="91440" bIns="45720" rtlCol="0" anchor="b"/>
+          <a:lstStyle>
+            <a:lvl1pPr algn="r">
+              <a:defRPr sz="1200"/>
+            </a:lvl1pPr>
+          </a:lstStyle>
+          <a:p>
+            <a:pPr>
+              <a:defRPr/>
+            </a:pPr>
+            <a:endParaRPr/>
+          </a:p>
+        </p:txBody>
+      </p:sp>
+    </p:spTree>
+  </p:cSld>
+  <p:clrMap bg1="lt1" tx1="dk1" bg2="lt2" tx2="dk2" accent1="accent1" accent2="accent2" accent3="accent3" accent4="accent4" accent5="accent5" accent6="accent6" hlink="hlink" folHlink="folHlink"/>
+  <p:notesStyle>
+    <a:lvl1pPr marL="0" algn="l" defTabSz="914400">
+      <a:defRPr sz="1200">
+        <a:solidFill>
+          <a:schemeClr val="tx1"/>
+        </a:solidFill>
+        <a:latin typeface="+mn-lt"/>
+        <a:ea typeface="+mn-ea"/>
+        <a:cs typeface="+mn-cs"/>
+      </a:defRPr>
+    </a:lvl1pPr>
+    <a:lvl2pPr marL="457200" algn="l" defTabSz="914400">
+      <a:defRPr sz="1200">
+        <a:solidFill>
+          <a:schemeClr val="tx1"/>
+        </a:solidFill>
+        <a:latin typeface="+mn-lt"/>
+        <a:ea typeface="+mn-ea"/>
+        <a:cs typeface="+mn-cs"/>
+      </a:defRPr>
+    </a:lvl2pPr>
+    <a:lvl3pPr marL="914400" algn="l" defTabSz="914400">
+      <a:defRPr sz="1200">
+        <a:solidFill>
+          <a:schemeClr val="tx1"/>
+        </a:solidFill>
+        <a:latin typeface="+mn-lt"/>
+        <a:ea typeface="+mn-ea"/>
+        <a:cs typeface="+mn-cs"/>
+      </a:defRPr>
+    </a:lvl3pPr>
+    <a:lvl4pPr marL="1371600" algn="l" defTabSz="914400">
+      <a:defRPr sz="1200">
+        <a:solidFill>
+          <a:schemeClr val="tx1"/>
+        </a:solidFill>
+        <a:latin typeface="+mn-lt"/>
+        <a:ea typeface="+mn-ea"/>
+        <a:cs typeface="+mn-cs"/>
+      </a:defRPr>
+    </a:lvl4pPr>
+    <a:lvl5pPr marL="1828800" algn="l" defTabSz="914400">
+      <a:defRPr sz="1200">
+        <a:solidFill>
+          <a:schemeClr val="tx1"/>
+        </a:solidFill>
+        <a:latin typeface="+mn-lt"/>
+        <a:ea typeface="+mn-ea"/>
+        <a:cs typeface="+mn-cs"/>
+      </a:defRPr>
+    </a:lvl5pPr>
+    <a:lvl6pPr marL="2286000" algn="l" defTabSz="914400">
+      <a:defRPr sz="1200">
+        <a:solidFill>
+          <a:schemeClr val="tx1"/>
+        </a:solidFill>
+        <a:latin typeface="+mn-lt"/>
+        <a:ea typeface="+mn-ea"/>
+        <a:cs typeface="+mn-cs"/>
+      </a:defRPr>
+    </a:lvl6pPr>
+    <a:lvl7pPr marL="2743200" algn="l" defTabSz="914400">
+      <a:defRPr sz="1200">
+        <a:solidFill>
+          <a:schemeClr val="tx1"/>
+        </a:solidFill>
+        <a:latin typeface="+mn-lt"/>
+        <a:ea typeface="+mn-ea"/>
+        <a:cs typeface="+mn-cs"/>
+      </a:defRPr>
+    </a:lvl7pPr>
+    <a:lvl8pPr marL="3200400" algn="l" defTabSz="914400">
+      <a:defRPr sz="1200">
+        <a:solidFill>
+          <a:schemeClr val="tx1"/>
+        </a:solidFill>
+        <a:latin typeface="+mn-lt"/>
+        <a:ea typeface="+mn-ea"/>
+        <a:cs typeface="+mn-cs"/>
+      </a:defRPr>
+    </a:lvl8pPr>
+    <a:lvl9pPr marL="3657600" algn="l" defTabSz="914400">
+      <a:defRPr sz="1200">
+        <a:solidFill>
+          <a:schemeClr val="tx1"/>
+        </a:solidFill>
+        <a:latin typeface="+mn-lt"/>
+        <a:ea typeface="+mn-ea"/>
+        <a:cs typeface="+mn-cs"/>
+      </a:defRPr>
+    </a:lvl9pPr>
+  </p:notesStyle>
+</p:notesMaster>
+</file>
+
+<file path=ppt/notesSlides/notesSlide1.xml><?xml version="1.0" encoding="utf-8"?>
+<p:notes xmlns:a="http://schemas.openxmlformats.org/drawingml/2006/main" xmlns:r="http://schemas.openxmlformats.org/officeDocument/2006/relationships" xmlns:p="http://schemas.openxmlformats.org/presentationml/2006/main" xmlns:m="http://schemas.openxmlformats.org/officeDocument/2006/math" xmlns:w="http://schemas.openxmlformats.org/wordprocessingml/2006/main">
+  <p:cSld name="">
+    <p:spTree>
+      <p:nvGrpSpPr>
+        <p:cNvPr id="1" name=""/>
+        <p:cNvGrpSpPr/>
+        <p:nvPr/>
+      </p:nvGrpSpPr>
+      <p:grpSpPr bwMode="auto">
+        <a:xfrm>
+          <a:off x="0" y="0"/>
+          <a:ext cx="0" cy="0"/>
+          <a:chOff x="0" y="0"/>
+          <a:chExt cx="0" cy="0"/>
+        </a:xfrm>
+      </p:grpSpPr>
+      <p:sp>
+        <p:nvSpPr>
+          <p:cNvPr id="2" name="Slide Image Placeholder 1"/>
+          <p:cNvSpPr>
+            <a:spLocks noChangeAspect="1" noGrp="1" noRot="1"/>
+          </p:cNvSpPr>
+          <p:nvPr>
+            <p:ph type="sldImg"/>
+          </p:nvPr>
+        </p:nvSpPr>
+        <p:spPr bwMode="auto"/>
+      </p:sp>
+      <p:sp>
+        <p:nvSpPr>
+          <p:cNvPr id="3" name="Notes Placeholder 2"/>
+          <p:cNvSpPr>
+            <a:spLocks noGrp="1"/>
+          </p:cNvSpPr>
+          <p:nvPr>
+            <p:ph type="body" idx="1"/>
+          </p:nvPr>
+        </p:nvSpPr>
+        <p:spPr bwMode="auto"/>
+        <p:txBody>
+          <a:bodyPr/>
+          <a:lstStyle/>
+          <a:p>
+            <a:pPr>
+              <a:defRPr/>
+            </a:pPr>
+            <a:endParaRPr/>
+          </a:p>
+        </p:txBody>
+      </p:sp>
+      <p:sp>
+        <p:nvSpPr>
+          <p:cNvPr id="4" name="Slide Number Placeholder 3"/>
+          <p:cNvSpPr>
+            <a:spLocks noGrp="1"/>
+          </p:cNvSpPr>
+          <p:nvPr>
+            <p:ph type="sldNum" sz="quarter" idx="10"/>
+          </p:nvPr>
+        </p:nvSpPr>
+        <p:spPr bwMode="auto"/>
+        <p:txBody>
+          <a:bodyPr/>
+          <a:lstStyle/>
+          <a:p>
+            <a:pPr>
+              <a:defRPr/>
+            </a:pPr>
+            <a:fld id="{1F484F25-B305-C643-CE5C-E3ABB15E9327}" type="slidenum">
+              <a:rPr/>
+              <a:t/>
+            </a:fld>
+            <a:endParaRPr/>
+          </a:p>
+        </p:txBody>
+      </p:sp>
+    </p:spTree>
+  </p:cSld>
+  <p:clrMapOvr>
+    <a:masterClrMapping/>
+  </p:clrMapOvr>
+</p:notes>
+</file>
+
+<file path=ppt/notesSlides/notesSlide2.xml><?xml version="1.0" encoding="utf-8"?>
+<p:notes xmlns:a="http://schemas.openxmlformats.org/drawingml/2006/main" xmlns:r="http://schemas.openxmlformats.org/officeDocument/2006/relationships" xmlns:p="http://schemas.openxmlformats.org/presentationml/2006/main" xmlns:m="http://schemas.openxmlformats.org/officeDocument/2006/math" xmlns:w="http://schemas.openxmlformats.org/wordprocessingml/2006/main">
+  <p:cSld name="">
+    <p:spTree>
+      <p:nvGrpSpPr>
+        <p:cNvPr id="1" name=""/>
+        <p:cNvGrpSpPr/>
+        <p:nvPr/>
+      </p:nvGrpSpPr>
+      <p:grpSpPr bwMode="auto">
+        <a:xfrm>
+          <a:off x="0" y="0"/>
+          <a:ext cx="0" cy="0"/>
+          <a:chOff x="0" y="0"/>
+          <a:chExt cx="0" cy="0"/>
+        </a:xfrm>
+      </p:grpSpPr>
+      <p:sp>
+        <p:nvSpPr>
+          <p:cNvPr id="2" name="Slide Image Placeholder 1"/>
+          <p:cNvSpPr>
+            <a:spLocks noChangeAspect="1" noGrp="1" noRot="1"/>
+          </p:cNvSpPr>
+          <p:nvPr>
+            <p:ph type="sldImg"/>
+          </p:nvPr>
+        </p:nvSpPr>
+        <p:spPr bwMode="auto"/>
+      </p:sp>
+      <p:sp>
+        <p:nvSpPr>
+          <p:cNvPr id="3" name="Notes Placeholder 2"/>
+          <p:cNvSpPr>
+            <a:spLocks noGrp="1"/>
+          </p:cNvSpPr>
+          <p:nvPr>
+            <p:ph type="body" idx="1"/>
+          </p:nvPr>
+        </p:nvSpPr>
+        <p:spPr bwMode="auto"/>
+        <p:txBody>
+          <a:bodyPr/>
+          <a:lstStyle/>
+          <a:p>
+            <a:pPr>
+              <a:defRPr/>
+            </a:pPr>
+            <a:endParaRPr/>
+          </a:p>
+        </p:txBody>
+      </p:sp>
+      <p:sp>
+        <p:nvSpPr>
+          <p:cNvPr id="4" name="Slide Number Placeholder 3"/>
+          <p:cNvSpPr>
+            <a:spLocks noGrp="1"/>
+          </p:cNvSpPr>
+          <p:nvPr>
+            <p:ph type="sldNum" sz="quarter" idx="10"/>
+          </p:nvPr>
+        </p:nvSpPr>
+        <p:spPr bwMode="auto"/>
+        <p:txBody>
+          <a:bodyPr/>
+          <a:lstStyle/>
+          <a:p>
+            <a:pPr>
+              <a:defRPr/>
+            </a:pPr>
+            <a:fld id="{5F7FA174-8015-96C1-9751-0E03D9523F84}" type="slidenum">
+              <a:rPr/>
+              <a:t/>
+            </a:fld>
+            <a:endParaRPr/>
+          </a:p>
+        </p:txBody>
+      </p:sp>
+    </p:spTree>
+  </p:cSld>
+  <p:clrMapOvr>
+    <a:masterClrMapping/>
+  </p:clrMapOvr>
+</p:notes>
+</file>
+
+<file path=ppt/notesSlides/notesSlide3.xml><?xml version="1.0" encoding="utf-8"?>
+<p:notes xmlns:a="http://schemas.openxmlformats.org/drawingml/2006/main" xmlns:r="http://schemas.openxmlformats.org/officeDocument/2006/relationships" xmlns:p="http://schemas.openxmlformats.org/presentationml/2006/main" xmlns:m="http://schemas.openxmlformats.org/officeDocument/2006/math" xmlns:w="http://schemas.openxmlformats.org/wordprocessingml/2006/main">
+  <p:cSld name="">
+    <p:spTree>
+      <p:nvGrpSpPr>
+        <p:cNvPr id="1" name=""/>
+        <p:cNvGrpSpPr/>
+        <p:nvPr/>
+      </p:nvGrpSpPr>
+      <p:grpSpPr bwMode="auto">
+        <a:xfrm>
+          <a:off x="0" y="0"/>
+          <a:ext cx="0" cy="0"/>
+          <a:chOff x="0" y="0"/>
+          <a:chExt cx="0" cy="0"/>
+        </a:xfrm>
+      </p:grpSpPr>
+      <p:sp>
+        <p:nvSpPr>
+          <p:cNvPr id="2" name="Slide Image Placeholder 1"/>
+          <p:cNvSpPr>
+            <a:spLocks noChangeAspect="1" noGrp="1" noRot="1"/>
+          </p:cNvSpPr>
+          <p:nvPr>
+            <p:ph type="sldImg"/>
+          </p:nvPr>
+        </p:nvSpPr>
+        <p:spPr bwMode="auto"/>
+      </p:sp>
+      <p:sp>
+        <p:nvSpPr>
+          <p:cNvPr id="3" name="Notes Placeholder 2"/>
+          <p:cNvSpPr>
+            <a:spLocks noGrp="1"/>
+          </p:cNvSpPr>
+          <p:nvPr>
+            <p:ph type="body" idx="1"/>
+          </p:nvPr>
+        </p:nvSpPr>
+        <p:spPr bwMode="auto"/>
+        <p:txBody>
+          <a:bodyPr/>
+          <a:lstStyle/>
+          <a:p>
+            <a:pPr>
+              <a:defRPr/>
+            </a:pPr>
+            <a:endParaRPr/>
+          </a:p>
+        </p:txBody>
+      </p:sp>
+      <p:sp>
+        <p:nvSpPr>
+          <p:cNvPr id="4" name="Slide Number Placeholder 3"/>
+          <p:cNvSpPr>
+            <a:spLocks noGrp="1"/>
+          </p:cNvSpPr>
+          <p:nvPr>
+            <p:ph type="sldNum" sz="quarter" idx="10"/>
+          </p:nvPr>
+        </p:nvSpPr>
+        <p:spPr bwMode="auto"/>
+        <p:txBody>
+          <a:bodyPr/>
+          <a:lstStyle/>
+          <a:p>
+            <a:pPr>
+              <a:defRPr/>
+            </a:pPr>
+            <a:fld id="{3C2A842D-15AB-644B-F40C-2BB91A9C1F74}" type="slidenum">
+              <a:rPr/>
+              <a:t/>
+            </a:fld>
+            <a:endParaRPr/>
+          </a:p>
+        </p:txBody>
+      </p:sp>
+    </p:spTree>
+  </p:cSld>
+  <p:clrMapOvr>
+    <a:masterClrMapping/>
+  </p:clrMapOvr>
+</p:notes>
+</file>
+
+<file path=ppt/notesSlides/notesSlide4.xml><?xml version="1.0" encoding="utf-8"?>
+<p:notes xmlns:a="http://schemas.openxmlformats.org/drawingml/2006/main" xmlns:r="http://schemas.openxmlformats.org/officeDocument/2006/relationships" xmlns:p="http://schemas.openxmlformats.org/presentationml/2006/main" xmlns:m="http://schemas.openxmlformats.org/officeDocument/2006/math" xmlns:w="http://schemas.openxmlformats.org/wordprocessingml/2006/main">
+  <p:cSld name="">
+    <p:spTree>
+      <p:nvGrpSpPr>
+        <p:cNvPr id="1" name=""/>
+        <p:cNvGrpSpPr/>
+        <p:nvPr/>
+      </p:nvGrpSpPr>
+      <p:grpSpPr bwMode="auto">
+        <a:xfrm>
+          <a:off x="0" y="0"/>
+          <a:ext cx="0" cy="0"/>
+          <a:chOff x="0" y="0"/>
+          <a:chExt cx="0" cy="0"/>
+        </a:xfrm>
+      </p:grpSpPr>
+      <p:sp>
+        <p:nvSpPr>
+          <p:cNvPr id="2" name="Slide Image Placeholder 1"/>
+          <p:cNvSpPr>
+            <a:spLocks noChangeAspect="1" noGrp="1" noRot="1"/>
+          </p:cNvSpPr>
+          <p:nvPr>
+            <p:ph type="sldImg"/>
+          </p:nvPr>
+        </p:nvSpPr>
+        <p:spPr bwMode="auto"/>
+      </p:sp>
+      <p:sp>
+        <p:nvSpPr>
+          <p:cNvPr id="3" name="Notes Placeholder 2"/>
+          <p:cNvSpPr>
+            <a:spLocks noGrp="1"/>
+          </p:cNvSpPr>
+          <p:nvPr>
+            <p:ph type="body" idx="1"/>
+          </p:nvPr>
+        </p:nvSpPr>
+        <p:spPr bwMode="auto"/>
+        <p:txBody>
+          <a:bodyPr/>
+          <a:lstStyle/>
+          <a:p>
+            <a:pPr>
+              <a:defRPr/>
+            </a:pPr>
+            <a:endParaRPr/>
+          </a:p>
+        </p:txBody>
+      </p:sp>
+      <p:sp>
+        <p:nvSpPr>
+          <p:cNvPr id="4" name="Slide Number Placeholder 3"/>
+          <p:cNvSpPr>
+            <a:spLocks noGrp="1"/>
+          </p:cNvSpPr>
+          <p:nvPr>
+            <p:ph type="sldNum" sz="quarter" idx="10"/>
+          </p:nvPr>
+        </p:nvSpPr>
+        <p:spPr bwMode="auto"/>
+        <p:txBody>
+          <a:bodyPr/>
+          <a:lstStyle/>
+          <a:p>
+            <a:pPr>
+              <a:defRPr/>
+            </a:pPr>
+            <a:fld id="{867C7D14-7FBF-D79A-39EB-BEFC7A387A50}" type="slidenum">
+              <a:rPr/>
+              <a:t/>
+            </a:fld>
+            <a:endParaRPr/>
+          </a:p>
+        </p:txBody>
+      </p:sp>
+    </p:spTree>
+  </p:cSld>
+  <p:clrMapOvr>
+    <a:masterClrMapping/>
+  </p:clrMapOvr>
+</p:notes>
+</file>
+
+<file path=ppt/notesSlides/notesSlide5.xml><?xml version="1.0" encoding="utf-8"?>
+<p:notes xmlns:a="http://schemas.openxmlformats.org/drawingml/2006/main" xmlns:r="http://schemas.openxmlformats.org/officeDocument/2006/relationships" xmlns:p="http://schemas.openxmlformats.org/presentationml/2006/main" xmlns:m="http://schemas.openxmlformats.org/officeDocument/2006/math" xmlns:w="http://schemas.openxmlformats.org/wordprocessingml/2006/main">
+  <p:cSld name="">
+    <p:spTree>
+      <p:nvGrpSpPr>
+        <p:cNvPr id="1" name=""/>
+        <p:cNvGrpSpPr/>
+        <p:nvPr/>
+      </p:nvGrpSpPr>
+      <p:grpSpPr bwMode="auto">
+        <a:xfrm>
+          <a:off x="0" y="0"/>
+          <a:ext cx="0" cy="0"/>
+          <a:chOff x="0" y="0"/>
+          <a:chExt cx="0" cy="0"/>
+        </a:xfrm>
+      </p:grpSpPr>
+      <p:sp>
+        <p:nvSpPr>
+          <p:cNvPr id="2" name="Slide Image Placeholder 1"/>
+          <p:cNvSpPr>
+            <a:spLocks noChangeAspect="1" noGrp="1" noRot="1"/>
+          </p:cNvSpPr>
+          <p:nvPr>
+            <p:ph type="sldImg"/>
+          </p:nvPr>
+        </p:nvSpPr>
+        <p:spPr bwMode="auto"/>
+      </p:sp>
+      <p:sp>
+        <p:nvSpPr>
+          <p:cNvPr id="3" name="Notes Placeholder 2"/>
+          <p:cNvSpPr>
+            <a:spLocks noGrp="1"/>
+          </p:cNvSpPr>
+          <p:nvPr>
+            <p:ph type="body" idx="1"/>
+          </p:nvPr>
+        </p:nvSpPr>
+        <p:spPr bwMode="auto"/>
+        <p:txBody>
+          <a:bodyPr/>
+          <a:lstStyle/>
+          <a:p>
+            <a:pPr>
+              <a:defRPr/>
+            </a:pPr>
+            <a:endParaRPr/>
+          </a:p>
+        </p:txBody>
+      </p:sp>
+      <p:sp>
+        <p:nvSpPr>
+          <p:cNvPr id="4" name="Slide Number Placeholder 3"/>
+          <p:cNvSpPr>
+            <a:spLocks noGrp="1"/>
+          </p:cNvSpPr>
+          <p:nvPr>
+            <p:ph type="sldNum" sz="quarter" idx="10"/>
+          </p:nvPr>
+        </p:nvSpPr>
+        <p:spPr bwMode="auto"/>
+        <p:txBody>
+          <a:bodyPr/>
+          <a:lstStyle/>
+          <a:p>
+            <a:pPr>
+              <a:defRPr/>
+            </a:pPr>
+            <a:fld id="{F972F1FF-AA96-419A-1C89-57872EA40BEE}" type="slidenum">
+              <a:rPr/>
+              <a:t/>
+            </a:fld>
+            <a:endParaRPr/>
+          </a:p>
+        </p:txBody>
+      </p:sp>
+    </p:spTree>
+  </p:cSld>
+  <p:clrMapOvr>
+    <a:masterClrMapping/>
+  </p:clrMapOvr>
+</p:notes>
+</file>
+
+<file path=ppt/notesSlides/notesSlide6.xml><?xml version="1.0" encoding="utf-8"?>
+<p:notes xmlns:a="http://schemas.openxmlformats.org/drawingml/2006/main" xmlns:r="http://schemas.openxmlformats.org/officeDocument/2006/relationships" xmlns:p="http://schemas.openxmlformats.org/presentationml/2006/main" xmlns:m="http://schemas.openxmlformats.org/officeDocument/2006/math" xmlns:w="http://schemas.openxmlformats.org/wordprocessingml/2006/main">
+  <p:cSld name="">
+    <p:spTree>
+      <p:nvGrpSpPr>
+        <p:cNvPr id="1" name=""/>
+        <p:cNvGrpSpPr/>
+        <p:nvPr/>
+      </p:nvGrpSpPr>
+      <p:grpSpPr bwMode="auto">
+        <a:xfrm>
+          <a:off x="0" y="0"/>
+          <a:ext cx="0" cy="0"/>
+          <a:chOff x="0" y="0"/>
+          <a:chExt cx="0" cy="0"/>
+        </a:xfrm>
+      </p:grpSpPr>
+      <p:sp>
+        <p:nvSpPr>
+          <p:cNvPr id="2" name="Slide Image Placeholder 1"/>
+          <p:cNvSpPr>
+            <a:spLocks noChangeAspect="1" noGrp="1" noRot="1"/>
+          </p:cNvSpPr>
+          <p:nvPr>
+            <p:ph type="sldImg"/>
+          </p:nvPr>
+        </p:nvSpPr>
+        <p:spPr bwMode="auto"/>
+      </p:sp>
+      <p:sp>
+        <p:nvSpPr>
+          <p:cNvPr id="3" name="Notes Placeholder 2"/>
+          <p:cNvSpPr>
+            <a:spLocks noGrp="1"/>
+          </p:cNvSpPr>
+          <p:nvPr>
+            <p:ph type="body" idx="1"/>
+          </p:nvPr>
+        </p:nvSpPr>
+        <p:spPr bwMode="auto"/>
+        <p:txBody>
+          <a:bodyPr/>
+          <a:lstStyle/>
+          <a:p>
+            <a:pPr>
+              <a:defRPr/>
+            </a:pPr>
+            <a:endParaRPr/>
+          </a:p>
+        </p:txBody>
+      </p:sp>
+      <p:sp>
+        <p:nvSpPr>
+          <p:cNvPr id="4" name="Slide Number Placeholder 3"/>
+          <p:cNvSpPr>
+            <a:spLocks noGrp="1"/>
+          </p:cNvSpPr>
+          <p:nvPr>
+            <p:ph type="sldNum" sz="quarter" idx="10"/>
+          </p:nvPr>
+        </p:nvSpPr>
+        <p:spPr bwMode="auto"/>
+        <p:txBody>
+          <a:bodyPr/>
+          <a:lstStyle/>
+          <a:p>
+            <a:pPr>
+              <a:defRPr/>
+            </a:pPr>
+            <a:fld id="{733AACB0-0995-95D1-6FAE-B8FE75A3E63D}" type="slidenum">
+              <a:rPr/>
+              <a:t/>
+            </a:fld>
+            <a:endParaRPr/>
+          </a:p>
+        </p:txBody>
+      </p:sp>
+    </p:spTree>
+  </p:cSld>
+  <p:clrMapOvr>
+    <a:masterClrMapping/>
+  </p:clrMapOvr>
+</p:notes>
+</file>
+
+<file path=ppt/notesSlides/notesSlide7.xml><?xml version="1.0" encoding="utf-8"?>
+<p:notes xmlns:a="http://schemas.openxmlformats.org/drawingml/2006/main" xmlns:r="http://schemas.openxmlformats.org/officeDocument/2006/relationships" xmlns:p="http://schemas.openxmlformats.org/presentationml/2006/main" xmlns:m="http://schemas.openxmlformats.org/officeDocument/2006/math" xmlns:w="http://schemas.openxmlformats.org/wordprocessingml/2006/main">
+  <p:cSld name="">
+    <p:spTree>
+      <p:nvGrpSpPr>
+        <p:cNvPr id="1" name=""/>
+        <p:cNvGrpSpPr/>
+        <p:nvPr/>
+      </p:nvGrpSpPr>
+      <p:grpSpPr bwMode="auto">
+        <a:xfrm>
+          <a:off x="0" y="0"/>
+          <a:ext cx="0" cy="0"/>
+          <a:chOff x="0" y="0"/>
+          <a:chExt cx="0" cy="0"/>
+        </a:xfrm>
+      </p:grpSpPr>
+      <p:sp>
+        <p:nvSpPr>
+          <p:cNvPr id="2" name="Slide Image Placeholder 1"/>
+          <p:cNvSpPr>
+            <a:spLocks noChangeAspect="1" noGrp="1" noRot="1"/>
+          </p:cNvSpPr>
+          <p:nvPr>
+            <p:ph type="sldImg"/>
+          </p:nvPr>
+        </p:nvSpPr>
+        <p:spPr bwMode="auto"/>
+      </p:sp>
+      <p:sp>
+        <p:nvSpPr>
+          <p:cNvPr id="3" name="Notes Placeholder 2"/>
+          <p:cNvSpPr>
+            <a:spLocks noGrp="1"/>
+          </p:cNvSpPr>
+          <p:nvPr>
+            <p:ph type="body" idx="1"/>
+          </p:nvPr>
+        </p:nvSpPr>
+        <p:spPr bwMode="auto"/>
+        <p:txBody>
+          <a:bodyPr/>
+          <a:lstStyle/>
+          <a:p>
+            <a:pPr>
+              <a:defRPr/>
+            </a:pPr>
+            <a:endParaRPr/>
+          </a:p>
+        </p:txBody>
+      </p:sp>
+      <p:sp>
+        <p:nvSpPr>
+          <p:cNvPr id="4" name="Slide Number Placeholder 3"/>
+          <p:cNvSpPr>
+            <a:spLocks noGrp="1"/>
+          </p:cNvSpPr>
+          <p:nvPr>
+            <p:ph type="sldNum" sz="quarter" idx="10"/>
+          </p:nvPr>
+        </p:nvSpPr>
+        <p:spPr bwMode="auto"/>
+        <p:txBody>
+          <a:bodyPr/>
+          <a:lstStyle/>
+          <a:p>
+            <a:pPr>
+              <a:defRPr/>
+            </a:pPr>
+            <a:fld id="{4BE05047-9492-8F82-536E-BBD54663238D}" type="slidenum">
+              <a:rPr/>
+              <a:t/>
+            </a:fld>
+            <a:endParaRPr/>
+          </a:p>
+        </p:txBody>
+      </p:sp>
+    </p:spTree>
+  </p:cSld>
+  <p:clrMapOvr>
+    <a:masterClrMapping/>
+  </p:clrMapOvr>
+</p:notes>
+</file>
+
+<file path=ppt/notesSlides/notesSlide8.xml><?xml version="1.0" encoding="utf-8"?>
+<p:notes xmlns:a="http://schemas.openxmlformats.org/drawingml/2006/main" xmlns:r="http://schemas.openxmlformats.org/officeDocument/2006/relationships" xmlns:p="http://schemas.openxmlformats.org/presentationml/2006/main" xmlns:m="http://schemas.openxmlformats.org/officeDocument/2006/math" xmlns:w="http://schemas.openxmlformats.org/wordprocessingml/2006/main">
+  <p:cSld name="">
+    <p:spTree>
+      <p:nvGrpSpPr>
+        <p:cNvPr id="1" name=""/>
+        <p:cNvGrpSpPr/>
+        <p:nvPr/>
+      </p:nvGrpSpPr>
+      <p:grpSpPr bwMode="auto">
+        <a:xfrm>
+          <a:off x="0" y="0"/>
+          <a:ext cx="0" cy="0"/>
+          <a:chOff x="0" y="0"/>
+          <a:chExt cx="0" cy="0"/>
+        </a:xfrm>
+      </p:grpSpPr>
+      <p:sp>
+        <p:nvSpPr>
+          <p:cNvPr id="2" name="Slide Image Placeholder 1"/>
+          <p:cNvSpPr>
+            <a:spLocks noChangeAspect="1" noGrp="1" noRot="1"/>
+          </p:cNvSpPr>
+          <p:nvPr>
+            <p:ph type="sldImg"/>
+          </p:nvPr>
+        </p:nvSpPr>
+        <p:spPr bwMode="auto"/>
+      </p:sp>
+      <p:sp>
+        <p:nvSpPr>
+          <p:cNvPr id="3" name="Notes Placeholder 2"/>
+          <p:cNvSpPr>
+            <a:spLocks noGrp="1"/>
+          </p:cNvSpPr>
+          <p:nvPr>
+            <p:ph type="body" idx="1"/>
+          </p:nvPr>
+        </p:nvSpPr>
+        <p:spPr bwMode="auto"/>
+        <p:txBody>
+          <a:bodyPr/>
+          <a:lstStyle/>
+          <a:p>
+            <a:pPr>
+              <a:defRPr/>
+            </a:pPr>
+            <a:endParaRPr/>
+          </a:p>
+        </p:txBody>
+      </p:sp>
+      <p:sp>
+        <p:nvSpPr>
+          <p:cNvPr id="4" name="Slide Number Placeholder 3"/>
+          <p:cNvSpPr>
+            <a:spLocks noGrp="1"/>
+          </p:cNvSpPr>
+          <p:nvPr>
+            <p:ph type="sldNum" sz="quarter" idx="10"/>
+          </p:nvPr>
+        </p:nvSpPr>
+        <p:spPr bwMode="auto"/>
+        <p:txBody>
+          <a:bodyPr/>
+          <a:lstStyle/>
+          <a:p>
+            <a:pPr>
+              <a:defRPr/>
+            </a:pPr>
+            <a:fld id="{26268464-3BCC-231B-2048-02C672FF8402}" type="slidenum">
+              <a:rPr/>
+              <a:t/>
+            </a:fld>
+            <a:endParaRPr/>
+          </a:p>
+        </p:txBody>
+      </p:sp>
+    </p:spTree>
+  </p:cSld>
+  <p:clrMapOvr>
+    <a:masterClrMapping/>
+  </p:clrMapOvr>
+</p:notes>
+</file>
+
+<file path=ppt/notesSlides/notesSlide9.xml><?xml version="1.0" encoding="utf-8"?>
+<p:notes xmlns:a="http://schemas.openxmlformats.org/drawingml/2006/main" xmlns:r="http://schemas.openxmlformats.org/officeDocument/2006/relationships" xmlns:p="http://schemas.openxmlformats.org/presentationml/2006/main" xmlns:m="http://schemas.openxmlformats.org/officeDocument/2006/math" xmlns:w="http://schemas.openxmlformats.org/wordprocessingml/2006/main">
+  <p:cSld name="">
+    <p:spTree>
+      <p:nvGrpSpPr>
+        <p:cNvPr id="1" name=""/>
+        <p:cNvGrpSpPr/>
+        <p:nvPr/>
+      </p:nvGrpSpPr>
+      <p:grpSpPr bwMode="auto">
+        <a:xfrm>
+          <a:off x="0" y="0"/>
+          <a:ext cx="0" cy="0"/>
+          <a:chOff x="0" y="0"/>
+          <a:chExt cx="0" cy="0"/>
+        </a:xfrm>
+      </p:grpSpPr>
+      <p:sp>
+        <p:nvSpPr>
+          <p:cNvPr id="2" name="Slide Image Placeholder 1"/>
+          <p:cNvSpPr>
+            <a:spLocks noChangeAspect="1" noGrp="1" noRot="1"/>
+          </p:cNvSpPr>
+          <p:nvPr>
+            <p:ph type="sldImg"/>
+          </p:nvPr>
+        </p:nvSpPr>
+        <p:spPr bwMode="auto"/>
+      </p:sp>
+      <p:sp>
+        <p:nvSpPr>
+          <p:cNvPr id="3" name="Notes Placeholder 2"/>
+          <p:cNvSpPr>
+            <a:spLocks noGrp="1"/>
+          </p:cNvSpPr>
+          <p:nvPr>
+            <p:ph type="body" idx="1"/>
+          </p:nvPr>
+        </p:nvSpPr>
+        <p:spPr bwMode="auto"/>
+        <p:txBody>
+          <a:bodyPr/>
+          <a:lstStyle/>
+          <a:p>
+            <a:pPr>
+              <a:defRPr/>
+            </a:pPr>
+            <a:endParaRPr/>
+          </a:p>
+        </p:txBody>
+      </p:sp>
+      <p:sp>
+        <p:nvSpPr>
+          <p:cNvPr id="4" name="Slide Number Placeholder 3"/>
+          <p:cNvSpPr>
+            <a:spLocks noGrp="1"/>
+          </p:cNvSpPr>
+          <p:nvPr>
+            <p:ph type="sldNum" sz="quarter" idx="10"/>
+          </p:nvPr>
+        </p:nvSpPr>
+        <p:spPr bwMode="auto"/>
+        <p:txBody>
+          <a:bodyPr/>
+          <a:lstStyle/>
+          <a:p>
+            <a:pPr>
+              <a:defRPr/>
+            </a:pPr>
+            <a:fld id="{2BF1B497-342E-4FF8-84D0-395AC9E867CE}" type="slidenum">
+              <a:rPr/>
+              <a:t/>
+            </a:fld>
+            <a:endParaRPr/>
+          </a:p>
+        </p:txBody>
+      </p:sp>
+    </p:spTree>
+  </p:cSld>
+  <p:clrMapOvr>
+    <a:masterClrMapping/>
+  </p:clrMapOvr>
+</p:notes>
+</file>
+
 <file path=ppt/slideLayouts/slideLayout1.xml><?xml version="1.0" encoding="utf-8"?>
-<p:sldLayout xmlns:a="http://schemas.openxmlformats.org/drawingml/2006/main" xmlns:r="http://schemas.openxmlformats.org/officeDocument/2006/relationships" xmlns:p="http://schemas.openxmlformats.org/presentationml/2006/main" type="title" preserve="1">
+<p:sldLayout xmlns:a="http://schemas.openxmlformats.org/drawingml/2006/main" xmlns:r="http://schemas.openxmlformats.org/officeDocument/2006/relationships" xmlns:p="http://schemas.openxmlformats.org/presentationml/2006/main" xmlns:m="http://schemas.openxmlformats.org/officeDocument/2006/math" xmlns:w="http://schemas.openxmlformats.org/wordprocessingml/2006/main" matchingName="" preserve="1" showMasterPhAnim="0" showMasterSp="1" type="title" userDrawn="1">
   <p:cSld name="Title Slide">
     <p:spTree>
       <p:nvGrpSpPr>
@@ -124,7 +1212,7 @@
         <p:cNvGrpSpPr/>
         <p:nvPr/>
       </p:nvGrpSpPr>
-      <p:grpSpPr>
+      <p:grpSpPr bwMode="auto">
         <a:xfrm>
           <a:off x="0" y="0"/>
           <a:ext cx="0" cy="0"/>
@@ -134,7 +1222,7 @@
       </p:grpSpPr>
       <p:sp>
         <p:nvSpPr>
-          <p:cNvPr id="2" name="Title 1"/>
+          <p:cNvPr id="477733012" name="Title 1"/>
           <p:cNvSpPr>
             <a:spLocks noGrp="1"/>
           </p:cNvSpPr>
@@ -142,7 +1230,7 @@
             <p:ph type="ctrTitle"/>
           </p:nvPr>
         </p:nvSpPr>
-        <p:spPr>
+        <p:spPr bwMode="auto">
           <a:xfrm>
             <a:off x="1524000" y="1122363"/>
             <a:ext cx="9144000" cy="2387600"/>
@@ -156,8 +1244,11 @@
             </a:lvl1pPr>
           </a:lstStyle>
           <a:p>
-            <a:r>
-              <a:rPr lang="en-US" smtClean="0"/>
+            <a:pPr>
+              <a:defRPr/>
+            </a:pPr>
+            <a:r>
+              <a:rPr lang="en-US"/>
               <a:t>Click to edit Master title style</a:t>
             </a:r>
             <a:endParaRPr lang="en-US"/>
@@ -166,7 +1257,7 @@
       </p:sp>
       <p:sp>
         <p:nvSpPr>
-          <p:cNvPr id="3" name="Subtitle 2"/>
+          <p:cNvPr id="2041299857" name="Subtitle 2"/>
           <p:cNvSpPr>
             <a:spLocks noGrp="1"/>
           </p:cNvSpPr>
@@ -174,7 +1265,7 @@
             <p:ph type="subTitle" idx="1"/>
           </p:nvPr>
         </p:nvSpPr>
-        <p:spPr>
+        <p:spPr bwMode="auto">
           <a:xfrm>
             <a:off x="1524000" y="3602038"/>
             <a:ext cx="9144000" cy="1655762"/>
@@ -221,8 +1312,11 @@
             </a:lvl9pPr>
           </a:lstStyle>
           <a:p>
-            <a:r>
-              <a:rPr lang="en-US" smtClean="0"/>
+            <a:pPr>
+              <a:defRPr/>
+            </a:pPr>
+            <a:r>
+              <a:rPr lang="en-US"/>
               <a:t>Click to edit Master subtitle style</a:t>
             </a:r>
             <a:endParaRPr lang="en-US"/>
@@ -231,7 +1325,7 @@
       </p:sp>
       <p:sp>
         <p:nvSpPr>
-          <p:cNvPr id="4" name="Date Placeholder 3"/>
+          <p:cNvPr id="763166372" name="Date Placeholder 3"/>
           <p:cNvSpPr>
             <a:spLocks noGrp="1"/>
           </p:cNvSpPr>
@@ -239,13 +1333,16 @@
             <p:ph type="dt" sz="half" idx="10"/>
           </p:nvPr>
         </p:nvSpPr>
-        <p:spPr/>
-        <p:txBody>
-          <a:bodyPr/>
-          <a:lstStyle/>
-          <a:p>
+        <p:spPr bwMode="auto"/>
+        <p:txBody>
+          <a:bodyPr/>
+          <a:lstStyle/>
+          <a:p>
+            <a:pPr>
+              <a:defRPr/>
+            </a:pPr>
             <a:fld id="{F48EC29D-8AD1-4A1A-B084-27A3BA4F2378}" type="datetimeFigureOut">
-              <a:rPr lang="en-US" smtClean="0"/>
+              <a:rPr lang="en-US"/>
               <a:t>4/2/2026</a:t>
             </a:fld>
             <a:endParaRPr lang="en-US"/>
@@ -254,7 +1351,7 @@
       </p:sp>
       <p:sp>
         <p:nvSpPr>
-          <p:cNvPr id="5" name="Footer Placeholder 4"/>
+          <p:cNvPr id="1500660508" name="Footer Placeholder 4"/>
           <p:cNvSpPr>
             <a:spLocks noGrp="1"/>
           </p:cNvSpPr>
@@ -262,18 +1359,21 @@
             <p:ph type="ftr" sz="quarter" idx="11"/>
           </p:nvPr>
         </p:nvSpPr>
-        <p:spPr/>
-        <p:txBody>
-          <a:bodyPr/>
-          <a:lstStyle/>
-          <a:p>
-            <a:endParaRPr lang="en-US"/>
-          </a:p>
-        </p:txBody>
-      </p:sp>
-      <p:sp>
-        <p:nvSpPr>
-          <p:cNvPr id="6" name="Slide Number Placeholder 5"/>
+        <p:spPr bwMode="auto"/>
+        <p:txBody>
+          <a:bodyPr/>
+          <a:lstStyle/>
+          <a:p>
+            <a:pPr>
+              <a:defRPr/>
+            </a:pPr>
+            <a:endParaRPr lang="en-US"/>
+          </a:p>
+        </p:txBody>
+      </p:sp>
+      <p:sp>
+        <p:nvSpPr>
+          <p:cNvPr id="1946410457" name="Slide Number Placeholder 5"/>
           <p:cNvSpPr>
             <a:spLocks noGrp="1"/>
           </p:cNvSpPr>
@@ -281,13 +1381,16 @@
             <p:ph type="sldNum" sz="quarter" idx="12"/>
           </p:nvPr>
         </p:nvSpPr>
-        <p:spPr/>
-        <p:txBody>
-          <a:bodyPr/>
-          <a:lstStyle/>
-          <a:p>
+        <p:spPr bwMode="auto"/>
+        <p:txBody>
+          <a:bodyPr/>
+          <a:lstStyle/>
+          <a:p>
+            <a:pPr>
+              <a:defRPr/>
+            </a:pPr>
             <a:fld id="{8CBA7428-BDF6-41A1-A129-14396D2572BF}" type="slidenum">
-              <a:rPr lang="en-US" smtClean="0"/>
+              <a:rPr lang="en-US"/>
               <a:t>‹#›</a:t>
             </a:fld>
             <a:endParaRPr lang="en-US"/>
@@ -295,11 +1398,6 @@
         </p:txBody>
       </p:sp>
     </p:spTree>
-    <p:extLst>
-      <p:ext uri="{BB962C8B-B14F-4D97-AF65-F5344CB8AC3E}">
-        <p14:creationId xmlns:p14="http://schemas.microsoft.com/office/powerpoint/2010/main" val="202646980"/>
-      </p:ext>
-    </p:extLst>
   </p:cSld>
   <p:clrMapOvr>
     <a:masterClrMapping/>
@@ -308,7 +1406,7 @@
 </file>
 
 <file path=ppt/slideLayouts/slideLayout10.xml><?xml version="1.0" encoding="utf-8"?>
-<p:sldLayout xmlns:a="http://schemas.openxmlformats.org/drawingml/2006/main" xmlns:r="http://schemas.openxmlformats.org/officeDocument/2006/relationships" xmlns:p="http://schemas.openxmlformats.org/presentationml/2006/main" type="vertTx" preserve="1">
+<p:sldLayout xmlns:a="http://schemas.openxmlformats.org/drawingml/2006/main" xmlns:r="http://schemas.openxmlformats.org/officeDocument/2006/relationships" xmlns:p="http://schemas.openxmlformats.org/presentationml/2006/main" xmlns:m="http://schemas.openxmlformats.org/officeDocument/2006/math" xmlns:w="http://schemas.openxmlformats.org/wordprocessingml/2006/main" matchingName="" preserve="1" showMasterPhAnim="0" showMasterSp="1" type="vertTx" userDrawn="1">
   <p:cSld name="Title and Vertical Text">
     <p:spTree>
       <p:nvGrpSpPr>
@@ -316,7 +1414,7 @@
         <p:cNvGrpSpPr/>
         <p:nvPr/>
       </p:nvGrpSpPr>
-      <p:grpSpPr>
+      <p:grpSpPr bwMode="auto">
         <a:xfrm>
           <a:off x="0" y="0"/>
           <a:ext cx="0" cy="0"/>
@@ -326,7 +1424,7 @@
       </p:grpSpPr>
       <p:sp>
         <p:nvSpPr>
-          <p:cNvPr id="2" name="Title 1"/>
+          <p:cNvPr id="2146330943" name="Title 1"/>
           <p:cNvSpPr>
             <a:spLocks noGrp="1"/>
           </p:cNvSpPr>
@@ -334,13 +1432,16 @@
             <p:ph type="title"/>
           </p:nvPr>
         </p:nvSpPr>
-        <p:spPr/>
-        <p:txBody>
-          <a:bodyPr/>
-          <a:lstStyle/>
-          <a:p>
-            <a:r>
-              <a:rPr lang="en-US" smtClean="0"/>
+        <p:spPr bwMode="auto"/>
+        <p:txBody>
+          <a:bodyPr/>
+          <a:lstStyle/>
+          <a:p>
+            <a:pPr>
+              <a:defRPr/>
+            </a:pPr>
+            <a:r>
+              <a:rPr lang="en-US"/>
               <a:t>Click to edit Master title style</a:t>
             </a:r>
             <a:endParaRPr lang="en-US"/>
@@ -349,7 +1450,7 @@
       </p:sp>
       <p:sp>
         <p:nvSpPr>
-          <p:cNvPr id="3" name="Vertical Text Placeholder 2"/>
+          <p:cNvPr id="202866727" name="Vertical Text Placeholder 2"/>
           <p:cNvSpPr>
             <a:spLocks noGrp="1"/>
           </p:cNvSpPr>
@@ -357,42 +1458,56 @@
             <p:ph type="body" orient="vert" idx="1"/>
           </p:nvPr>
         </p:nvSpPr>
-        <p:spPr/>
+        <p:spPr bwMode="auto"/>
         <p:txBody>
           <a:bodyPr vert="eaVert"/>
           <a:lstStyle/>
           <a:p>
-            <a:pPr lvl="0"/>
-            <a:r>
-              <a:rPr lang="en-US" smtClean="0"/>
+            <a:pPr lvl="0">
+              <a:defRPr/>
+            </a:pPr>
+            <a:r>
+              <a:rPr lang="en-US"/>
               <a:t>Edit Master text styles</a:t>
             </a:r>
-          </a:p>
-          <a:p>
-            <a:pPr lvl="1"/>
-            <a:r>
-              <a:rPr lang="en-US" smtClean="0"/>
+            <a:endParaRPr/>
+          </a:p>
+          <a:p>
+            <a:pPr lvl="1">
+              <a:defRPr/>
+            </a:pPr>
+            <a:r>
+              <a:rPr lang="en-US"/>
               <a:t>Second level</a:t>
             </a:r>
-          </a:p>
-          <a:p>
-            <a:pPr lvl="2"/>
-            <a:r>
-              <a:rPr lang="en-US" smtClean="0"/>
+            <a:endParaRPr/>
+          </a:p>
+          <a:p>
+            <a:pPr lvl="2">
+              <a:defRPr/>
+            </a:pPr>
+            <a:r>
+              <a:rPr lang="en-US"/>
               <a:t>Third level</a:t>
             </a:r>
-          </a:p>
-          <a:p>
-            <a:pPr lvl="3"/>
-            <a:r>
-              <a:rPr lang="en-US" smtClean="0"/>
+            <a:endParaRPr/>
+          </a:p>
+          <a:p>
+            <a:pPr lvl="3">
+              <a:defRPr/>
+            </a:pPr>
+            <a:r>
+              <a:rPr lang="en-US"/>
               <a:t>Fourth level</a:t>
             </a:r>
-          </a:p>
-          <a:p>
-            <a:pPr lvl="4"/>
-            <a:r>
-              <a:rPr lang="en-US" smtClean="0"/>
+            <a:endParaRPr/>
+          </a:p>
+          <a:p>
+            <a:pPr lvl="4">
+              <a:defRPr/>
+            </a:pPr>
+            <a:r>
+              <a:rPr lang="en-US"/>
               <a:t>Fifth level</a:t>
             </a:r>
             <a:endParaRPr lang="en-US"/>
@@ -401,7 +1516,7 @@
       </p:sp>
       <p:sp>
         <p:nvSpPr>
-          <p:cNvPr id="4" name="Date Placeholder 3"/>
+          <p:cNvPr id="299388829" name="Date Placeholder 3"/>
           <p:cNvSpPr>
             <a:spLocks noGrp="1"/>
           </p:cNvSpPr>
@@ -409,13 +1524,16 @@
             <p:ph type="dt" sz="half" idx="10"/>
           </p:nvPr>
         </p:nvSpPr>
-        <p:spPr/>
-        <p:txBody>
-          <a:bodyPr/>
-          <a:lstStyle/>
-          <a:p>
+        <p:spPr bwMode="auto"/>
+        <p:txBody>
+          <a:bodyPr/>
+          <a:lstStyle/>
+          <a:p>
+            <a:pPr>
+              <a:defRPr/>
+            </a:pPr>
             <a:fld id="{F48EC29D-8AD1-4A1A-B084-27A3BA4F2378}" type="datetimeFigureOut">
-              <a:rPr lang="en-US" smtClean="0"/>
+              <a:rPr lang="en-US"/>
               <a:t>4/2/2026</a:t>
             </a:fld>
             <a:endParaRPr lang="en-US"/>
@@ -424,7 +1542,7 @@
       </p:sp>
       <p:sp>
         <p:nvSpPr>
-          <p:cNvPr id="5" name="Footer Placeholder 4"/>
+          <p:cNvPr id="1080257430" name="Footer Placeholder 4"/>
           <p:cNvSpPr>
             <a:spLocks noGrp="1"/>
           </p:cNvSpPr>
@@ -432,18 +1550,21 @@
             <p:ph type="ftr" sz="quarter" idx="11"/>
           </p:nvPr>
         </p:nvSpPr>
-        <p:spPr/>
-        <p:txBody>
-          <a:bodyPr/>
-          <a:lstStyle/>
-          <a:p>
-            <a:endParaRPr lang="en-US"/>
-          </a:p>
-        </p:txBody>
-      </p:sp>
-      <p:sp>
-        <p:nvSpPr>
-          <p:cNvPr id="6" name="Slide Number Placeholder 5"/>
+        <p:spPr bwMode="auto"/>
+        <p:txBody>
+          <a:bodyPr/>
+          <a:lstStyle/>
+          <a:p>
+            <a:pPr>
+              <a:defRPr/>
+            </a:pPr>
+            <a:endParaRPr lang="en-US"/>
+          </a:p>
+        </p:txBody>
+      </p:sp>
+      <p:sp>
+        <p:nvSpPr>
+          <p:cNvPr id="95028306" name="Slide Number Placeholder 5"/>
           <p:cNvSpPr>
             <a:spLocks noGrp="1"/>
           </p:cNvSpPr>
@@ -451,13 +1572,16 @@
             <p:ph type="sldNum" sz="quarter" idx="12"/>
           </p:nvPr>
         </p:nvSpPr>
-        <p:spPr/>
-        <p:txBody>
-          <a:bodyPr/>
-          <a:lstStyle/>
-          <a:p>
+        <p:spPr bwMode="auto"/>
+        <p:txBody>
+          <a:bodyPr/>
+          <a:lstStyle/>
+          <a:p>
+            <a:pPr>
+              <a:defRPr/>
+            </a:pPr>
             <a:fld id="{8CBA7428-BDF6-41A1-A129-14396D2572BF}" type="slidenum">
-              <a:rPr lang="en-US" smtClean="0"/>
+              <a:rPr lang="en-US"/>
               <a:t>‹#›</a:t>
             </a:fld>
             <a:endParaRPr lang="en-US"/>
@@ -465,11 +1589,6 @@
         </p:txBody>
       </p:sp>
     </p:spTree>
-    <p:extLst>
-      <p:ext uri="{BB962C8B-B14F-4D97-AF65-F5344CB8AC3E}">
-        <p14:creationId xmlns:p14="http://schemas.microsoft.com/office/powerpoint/2010/main" val="1099585045"/>
-      </p:ext>
-    </p:extLst>
   </p:cSld>
   <p:clrMapOvr>
     <a:masterClrMapping/>
@@ -478,7 +1597,7 @@
 </file>
 
 <file path=ppt/slideLayouts/slideLayout11.xml><?xml version="1.0" encoding="utf-8"?>
-<p:sldLayout xmlns:a="http://schemas.openxmlformats.org/drawingml/2006/main" xmlns:r="http://schemas.openxmlformats.org/officeDocument/2006/relationships" xmlns:p="http://schemas.openxmlformats.org/presentationml/2006/main" type="vertTitleAndTx" preserve="1">
+<p:sldLayout xmlns:a="http://schemas.openxmlformats.org/drawingml/2006/main" xmlns:r="http://schemas.openxmlformats.org/officeDocument/2006/relationships" xmlns:p="http://schemas.openxmlformats.org/presentationml/2006/main" xmlns:m="http://schemas.openxmlformats.org/officeDocument/2006/math" xmlns:w="http://schemas.openxmlformats.org/wordprocessingml/2006/main" matchingName="" preserve="1" showMasterPhAnim="0" showMasterSp="1" type="vertTitleAndTx" userDrawn="1">
   <p:cSld name="Vertical Title and Text">
     <p:spTree>
       <p:nvGrpSpPr>
@@ -486,7 +1605,7 @@
         <p:cNvGrpSpPr/>
         <p:nvPr/>
       </p:nvGrpSpPr>
-      <p:grpSpPr>
+      <p:grpSpPr bwMode="auto">
         <a:xfrm>
           <a:off x="0" y="0"/>
           <a:ext cx="0" cy="0"/>
@@ -496,7 +1615,7 @@
       </p:grpSpPr>
       <p:sp>
         <p:nvSpPr>
-          <p:cNvPr id="2" name="Vertical Title 1"/>
+          <p:cNvPr id="1043431888" name="Vertical Title 1"/>
           <p:cNvSpPr>
             <a:spLocks noGrp="1"/>
           </p:cNvSpPr>
@@ -504,7 +1623,7 @@
             <p:ph type="title" orient="vert"/>
           </p:nvPr>
         </p:nvSpPr>
-        <p:spPr>
+        <p:spPr bwMode="auto">
           <a:xfrm>
             <a:off x="8724900" y="365125"/>
             <a:ext cx="2628900" cy="5811838"/>
@@ -514,8 +1633,11 @@
           <a:bodyPr vert="eaVert"/>
           <a:lstStyle/>
           <a:p>
-            <a:r>
-              <a:rPr lang="en-US" smtClean="0"/>
+            <a:pPr>
+              <a:defRPr/>
+            </a:pPr>
+            <a:r>
+              <a:rPr lang="en-US"/>
               <a:t>Click to edit Master title style</a:t>
             </a:r>
             <a:endParaRPr lang="en-US"/>
@@ -524,7 +1646,7 @@
       </p:sp>
       <p:sp>
         <p:nvSpPr>
-          <p:cNvPr id="3" name="Vertical Text Placeholder 2"/>
+          <p:cNvPr id="441068723" name="Vertical Text Placeholder 2"/>
           <p:cNvSpPr>
             <a:spLocks noGrp="1"/>
           </p:cNvSpPr>
@@ -532,7 +1654,7 @@
             <p:ph type="body" orient="vert" idx="1"/>
           </p:nvPr>
         </p:nvSpPr>
-        <p:spPr>
+        <p:spPr bwMode="auto">
           <a:xfrm>
             <a:off x="838200" y="365125"/>
             <a:ext cx="7734300" cy="5811838"/>
@@ -542,37 +1664,51 @@
           <a:bodyPr vert="eaVert"/>
           <a:lstStyle/>
           <a:p>
-            <a:pPr lvl="0"/>
-            <a:r>
-              <a:rPr lang="en-US" smtClean="0"/>
+            <a:pPr lvl="0">
+              <a:defRPr/>
+            </a:pPr>
+            <a:r>
+              <a:rPr lang="en-US"/>
               <a:t>Edit Master text styles</a:t>
             </a:r>
-          </a:p>
-          <a:p>
-            <a:pPr lvl="1"/>
-            <a:r>
-              <a:rPr lang="en-US" smtClean="0"/>
+            <a:endParaRPr/>
+          </a:p>
+          <a:p>
+            <a:pPr lvl="1">
+              <a:defRPr/>
+            </a:pPr>
+            <a:r>
+              <a:rPr lang="en-US"/>
               <a:t>Second level</a:t>
             </a:r>
-          </a:p>
-          <a:p>
-            <a:pPr lvl="2"/>
-            <a:r>
-              <a:rPr lang="en-US" smtClean="0"/>
+            <a:endParaRPr/>
+          </a:p>
+          <a:p>
+            <a:pPr lvl="2">
+              <a:defRPr/>
+            </a:pPr>
+            <a:r>
+              <a:rPr lang="en-US"/>
               <a:t>Third level</a:t>
             </a:r>
-          </a:p>
-          <a:p>
-            <a:pPr lvl="3"/>
-            <a:r>
-              <a:rPr lang="en-US" smtClean="0"/>
+            <a:endParaRPr/>
+          </a:p>
+          <a:p>
+            <a:pPr lvl="3">
+              <a:defRPr/>
+            </a:pPr>
+            <a:r>
+              <a:rPr lang="en-US"/>
               <a:t>Fourth level</a:t>
             </a:r>
-          </a:p>
-          <a:p>
-            <a:pPr lvl="4"/>
-            <a:r>
-              <a:rPr lang="en-US" smtClean="0"/>
+            <a:endParaRPr/>
+          </a:p>
+          <a:p>
+            <a:pPr lvl="4">
+              <a:defRPr/>
+            </a:pPr>
+            <a:r>
+              <a:rPr lang="en-US"/>
               <a:t>Fifth level</a:t>
             </a:r>
             <a:endParaRPr lang="en-US"/>
@@ -581,7 +1717,7 @@
       </p:sp>
       <p:sp>
         <p:nvSpPr>
-          <p:cNvPr id="4" name="Date Placeholder 3"/>
+          <p:cNvPr id="620163545" name="Date Placeholder 3"/>
           <p:cNvSpPr>
             <a:spLocks noGrp="1"/>
           </p:cNvSpPr>
@@ -589,13 +1725,16 @@
             <p:ph type="dt" sz="half" idx="10"/>
           </p:nvPr>
         </p:nvSpPr>
-        <p:spPr/>
-        <p:txBody>
-          <a:bodyPr/>
-          <a:lstStyle/>
-          <a:p>
+        <p:spPr bwMode="auto"/>
+        <p:txBody>
+          <a:bodyPr/>
+          <a:lstStyle/>
+          <a:p>
+            <a:pPr>
+              <a:defRPr/>
+            </a:pPr>
             <a:fld id="{F48EC29D-8AD1-4A1A-B084-27A3BA4F2378}" type="datetimeFigureOut">
-              <a:rPr lang="en-US" smtClean="0"/>
+              <a:rPr lang="en-US"/>
               <a:t>4/2/2026</a:t>
             </a:fld>
             <a:endParaRPr lang="en-US"/>
@@ -604,7 +1743,7 @@
       </p:sp>
       <p:sp>
         <p:nvSpPr>
-          <p:cNvPr id="5" name="Footer Placeholder 4"/>
+          <p:cNvPr id="976279647" name="Footer Placeholder 4"/>
           <p:cNvSpPr>
             <a:spLocks noGrp="1"/>
           </p:cNvSpPr>
@@ -612,18 +1751,21 @@
             <p:ph type="ftr" sz="quarter" idx="11"/>
           </p:nvPr>
         </p:nvSpPr>
-        <p:spPr/>
-        <p:txBody>
-          <a:bodyPr/>
-          <a:lstStyle/>
-          <a:p>
-            <a:endParaRPr lang="en-US"/>
-          </a:p>
-        </p:txBody>
-      </p:sp>
-      <p:sp>
-        <p:nvSpPr>
-          <p:cNvPr id="6" name="Slide Number Placeholder 5"/>
+        <p:spPr bwMode="auto"/>
+        <p:txBody>
+          <a:bodyPr/>
+          <a:lstStyle/>
+          <a:p>
+            <a:pPr>
+              <a:defRPr/>
+            </a:pPr>
+            <a:endParaRPr lang="en-US"/>
+          </a:p>
+        </p:txBody>
+      </p:sp>
+      <p:sp>
+        <p:nvSpPr>
+          <p:cNvPr id="819596716" name="Slide Number Placeholder 5"/>
           <p:cNvSpPr>
             <a:spLocks noGrp="1"/>
           </p:cNvSpPr>
@@ -631,13 +1773,16 @@
             <p:ph type="sldNum" sz="quarter" idx="12"/>
           </p:nvPr>
         </p:nvSpPr>
-        <p:spPr/>
-        <p:txBody>
-          <a:bodyPr/>
-          <a:lstStyle/>
-          <a:p>
+        <p:spPr bwMode="auto"/>
+        <p:txBody>
+          <a:bodyPr/>
+          <a:lstStyle/>
+          <a:p>
+            <a:pPr>
+              <a:defRPr/>
+            </a:pPr>
             <a:fld id="{8CBA7428-BDF6-41A1-A129-14396D2572BF}" type="slidenum">
-              <a:rPr lang="en-US" smtClean="0"/>
+              <a:rPr lang="en-US"/>
               <a:t>‹#›</a:t>
             </a:fld>
             <a:endParaRPr lang="en-US"/>
@@ -645,11 +1790,6 @@
         </p:txBody>
       </p:sp>
     </p:spTree>
-    <p:extLst>
-      <p:ext uri="{BB962C8B-B14F-4D97-AF65-F5344CB8AC3E}">
-        <p14:creationId xmlns:p14="http://schemas.microsoft.com/office/powerpoint/2010/main" val="3938593828"/>
-      </p:ext>
-    </p:extLst>
   </p:cSld>
   <p:clrMapOvr>
     <a:masterClrMapping/>
@@ -658,7 +1798,7 @@
 </file>
 
 <file path=ppt/slideLayouts/slideLayout2.xml><?xml version="1.0" encoding="utf-8"?>
-<p:sldLayout xmlns:a="http://schemas.openxmlformats.org/drawingml/2006/main" xmlns:r="http://schemas.openxmlformats.org/officeDocument/2006/relationships" xmlns:p="http://schemas.openxmlformats.org/presentationml/2006/main" type="obj" preserve="1">
+<p:sldLayout xmlns:a="http://schemas.openxmlformats.org/drawingml/2006/main" xmlns:r="http://schemas.openxmlformats.org/officeDocument/2006/relationships" xmlns:p="http://schemas.openxmlformats.org/presentationml/2006/main" xmlns:m="http://schemas.openxmlformats.org/officeDocument/2006/math" xmlns:w="http://schemas.openxmlformats.org/wordprocessingml/2006/main" matchingName="" preserve="1" showMasterPhAnim="0" showMasterSp="1" type="obj" userDrawn="1">
   <p:cSld name="Title and Content">
     <p:spTree>
       <p:nvGrpSpPr>
@@ -666,7 +1806,7 @@
         <p:cNvGrpSpPr/>
         <p:nvPr/>
       </p:nvGrpSpPr>
-      <p:grpSpPr>
+      <p:grpSpPr bwMode="auto">
         <a:xfrm>
           <a:off x="0" y="0"/>
           <a:ext cx="0" cy="0"/>
@@ -676,7 +1816,7 @@
       </p:grpSpPr>
       <p:sp>
         <p:nvSpPr>
-          <p:cNvPr id="2" name="Title 1"/>
+          <p:cNvPr id="1504482064" name="Title 1"/>
           <p:cNvSpPr>
             <a:spLocks noGrp="1"/>
           </p:cNvSpPr>
@@ -684,13 +1824,16 @@
             <p:ph type="title"/>
           </p:nvPr>
         </p:nvSpPr>
-        <p:spPr/>
-        <p:txBody>
-          <a:bodyPr/>
-          <a:lstStyle/>
-          <a:p>
-            <a:r>
-              <a:rPr lang="en-US" smtClean="0"/>
+        <p:spPr bwMode="auto"/>
+        <p:txBody>
+          <a:bodyPr/>
+          <a:lstStyle/>
+          <a:p>
+            <a:pPr>
+              <a:defRPr/>
+            </a:pPr>
+            <a:r>
+              <a:rPr lang="en-US"/>
               <a:t>Click to edit Master title style</a:t>
             </a:r>
             <a:endParaRPr lang="en-US"/>
@@ -699,7 +1842,7 @@
       </p:sp>
       <p:sp>
         <p:nvSpPr>
-          <p:cNvPr id="3" name="Content Placeholder 2"/>
+          <p:cNvPr id="1318082820" name="Content Placeholder 2"/>
           <p:cNvSpPr>
             <a:spLocks noGrp="1"/>
           </p:cNvSpPr>
@@ -707,42 +1850,56 @@
             <p:ph idx="1"/>
           </p:nvPr>
         </p:nvSpPr>
-        <p:spPr/>
-        <p:txBody>
-          <a:bodyPr/>
-          <a:lstStyle/>
-          <a:p>
-            <a:pPr lvl="0"/>
-            <a:r>
-              <a:rPr lang="en-US" smtClean="0"/>
+        <p:spPr bwMode="auto"/>
+        <p:txBody>
+          <a:bodyPr/>
+          <a:lstStyle/>
+          <a:p>
+            <a:pPr lvl="0">
+              <a:defRPr/>
+            </a:pPr>
+            <a:r>
+              <a:rPr lang="en-US"/>
               <a:t>Edit Master text styles</a:t>
             </a:r>
-          </a:p>
-          <a:p>
-            <a:pPr lvl="1"/>
-            <a:r>
-              <a:rPr lang="en-US" smtClean="0"/>
+            <a:endParaRPr/>
+          </a:p>
+          <a:p>
+            <a:pPr lvl="1">
+              <a:defRPr/>
+            </a:pPr>
+            <a:r>
+              <a:rPr lang="en-US"/>
               <a:t>Second level</a:t>
             </a:r>
-          </a:p>
-          <a:p>
-            <a:pPr lvl="2"/>
-            <a:r>
-              <a:rPr lang="en-US" smtClean="0"/>
+            <a:endParaRPr/>
+          </a:p>
+          <a:p>
+            <a:pPr lvl="2">
+              <a:defRPr/>
+            </a:pPr>
+            <a:r>
+              <a:rPr lang="en-US"/>
               <a:t>Third level</a:t>
             </a:r>
-          </a:p>
-          <a:p>
-            <a:pPr lvl="3"/>
-            <a:r>
-              <a:rPr lang="en-US" smtClean="0"/>
+            <a:endParaRPr/>
+          </a:p>
+          <a:p>
+            <a:pPr lvl="3">
+              <a:defRPr/>
+            </a:pPr>
+            <a:r>
+              <a:rPr lang="en-US"/>
               <a:t>Fourth level</a:t>
             </a:r>
-          </a:p>
-          <a:p>
-            <a:pPr lvl="4"/>
-            <a:r>
-              <a:rPr lang="en-US" smtClean="0"/>
+            <a:endParaRPr/>
+          </a:p>
+          <a:p>
+            <a:pPr lvl="4">
+              <a:defRPr/>
+            </a:pPr>
+            <a:r>
+              <a:rPr lang="en-US"/>
               <a:t>Fifth level</a:t>
             </a:r>
             <a:endParaRPr lang="en-US"/>
@@ -751,7 +1908,7 @@
       </p:sp>
       <p:sp>
         <p:nvSpPr>
-          <p:cNvPr id="4" name="Date Placeholder 3"/>
+          <p:cNvPr id="1868248101" name="Date Placeholder 3"/>
           <p:cNvSpPr>
             <a:spLocks noGrp="1"/>
           </p:cNvSpPr>
@@ -759,13 +1916,16 @@
             <p:ph type="dt" sz="half" idx="10"/>
           </p:nvPr>
         </p:nvSpPr>
-        <p:spPr/>
-        <p:txBody>
-          <a:bodyPr/>
-          <a:lstStyle/>
-          <a:p>
+        <p:spPr bwMode="auto"/>
+        <p:txBody>
+          <a:bodyPr/>
+          <a:lstStyle/>
+          <a:p>
+            <a:pPr>
+              <a:defRPr/>
+            </a:pPr>
             <a:fld id="{F48EC29D-8AD1-4A1A-B084-27A3BA4F2378}" type="datetimeFigureOut">
-              <a:rPr lang="en-US" smtClean="0"/>
+              <a:rPr lang="en-US"/>
               <a:t>4/2/2026</a:t>
             </a:fld>
             <a:endParaRPr lang="en-US"/>
@@ -774,7 +1934,7 @@
       </p:sp>
       <p:sp>
         <p:nvSpPr>
-          <p:cNvPr id="5" name="Footer Placeholder 4"/>
+          <p:cNvPr id="908954900" name="Footer Placeholder 4"/>
           <p:cNvSpPr>
             <a:spLocks noGrp="1"/>
           </p:cNvSpPr>
@@ -782,18 +1942,21 @@
             <p:ph type="ftr" sz="quarter" idx="11"/>
           </p:nvPr>
         </p:nvSpPr>
-        <p:spPr/>
-        <p:txBody>
-          <a:bodyPr/>
-          <a:lstStyle/>
-          <a:p>
-            <a:endParaRPr lang="en-US"/>
-          </a:p>
-        </p:txBody>
-      </p:sp>
-      <p:sp>
-        <p:nvSpPr>
-          <p:cNvPr id="6" name="Slide Number Placeholder 5"/>
+        <p:spPr bwMode="auto"/>
+        <p:txBody>
+          <a:bodyPr/>
+          <a:lstStyle/>
+          <a:p>
+            <a:pPr>
+              <a:defRPr/>
+            </a:pPr>
+            <a:endParaRPr lang="en-US"/>
+          </a:p>
+        </p:txBody>
+      </p:sp>
+      <p:sp>
+        <p:nvSpPr>
+          <p:cNvPr id="659658512" name="Slide Number Placeholder 5"/>
           <p:cNvSpPr>
             <a:spLocks noGrp="1"/>
           </p:cNvSpPr>
@@ -801,13 +1964,16 @@
             <p:ph type="sldNum" sz="quarter" idx="12"/>
           </p:nvPr>
         </p:nvSpPr>
-        <p:spPr/>
-        <p:txBody>
-          <a:bodyPr/>
-          <a:lstStyle/>
-          <a:p>
+        <p:spPr bwMode="auto"/>
+        <p:txBody>
+          <a:bodyPr/>
+          <a:lstStyle/>
+          <a:p>
+            <a:pPr>
+              <a:defRPr/>
+            </a:pPr>
             <a:fld id="{8CBA7428-BDF6-41A1-A129-14396D2572BF}" type="slidenum">
-              <a:rPr lang="en-US" smtClean="0"/>
+              <a:rPr lang="en-US"/>
               <a:t>‹#›</a:t>
             </a:fld>
             <a:endParaRPr lang="en-US"/>
@@ -815,11 +1981,6 @@
         </p:txBody>
       </p:sp>
     </p:spTree>
-    <p:extLst>
-      <p:ext uri="{BB962C8B-B14F-4D97-AF65-F5344CB8AC3E}">
-        <p14:creationId xmlns:p14="http://schemas.microsoft.com/office/powerpoint/2010/main" val="4278428940"/>
-      </p:ext>
-    </p:extLst>
   </p:cSld>
   <p:clrMapOvr>
     <a:masterClrMapping/>
@@ -828,7 +1989,7 @@
 </file>
 
 <file path=ppt/slideLayouts/slideLayout3.xml><?xml version="1.0" encoding="utf-8"?>
-<p:sldLayout xmlns:a="http://schemas.openxmlformats.org/drawingml/2006/main" xmlns:r="http://schemas.openxmlformats.org/officeDocument/2006/relationships" xmlns:p="http://schemas.openxmlformats.org/presentationml/2006/main" type="secHead" preserve="1">
+<p:sldLayout xmlns:a="http://schemas.openxmlformats.org/drawingml/2006/main" xmlns:r="http://schemas.openxmlformats.org/officeDocument/2006/relationships" xmlns:p="http://schemas.openxmlformats.org/presentationml/2006/main" xmlns:m="http://schemas.openxmlformats.org/officeDocument/2006/math" xmlns:w="http://schemas.openxmlformats.org/wordprocessingml/2006/main" matchingName="" preserve="1" showMasterPhAnim="0" showMasterSp="1" type="secHead" userDrawn="1">
   <p:cSld name="Section Header">
     <p:spTree>
       <p:nvGrpSpPr>
@@ -836,7 +1997,7 @@
         <p:cNvGrpSpPr/>
         <p:nvPr/>
       </p:nvGrpSpPr>
-      <p:grpSpPr>
+      <p:grpSpPr bwMode="auto">
         <a:xfrm>
           <a:off x="0" y="0"/>
           <a:ext cx="0" cy="0"/>
@@ -846,7 +2007,7 @@
       </p:grpSpPr>
       <p:sp>
         <p:nvSpPr>
-          <p:cNvPr id="2" name="Title 1"/>
+          <p:cNvPr id="1317300615" name="Title 1"/>
           <p:cNvSpPr>
             <a:spLocks noGrp="1"/>
           </p:cNvSpPr>
@@ -854,7 +2015,7 @@
             <p:ph type="title"/>
           </p:nvPr>
         </p:nvSpPr>
-        <p:spPr>
+        <p:spPr bwMode="auto">
           <a:xfrm>
             <a:off x="831850" y="1709738"/>
             <a:ext cx="10515600" cy="2852737"/>
@@ -868,8 +2029,11 @@
             </a:lvl1pPr>
           </a:lstStyle>
           <a:p>
-            <a:r>
-              <a:rPr lang="en-US" smtClean="0"/>
+            <a:pPr>
+              <a:defRPr/>
+            </a:pPr>
+            <a:r>
+              <a:rPr lang="en-US"/>
               <a:t>Click to edit Master title style</a:t>
             </a:r>
             <a:endParaRPr lang="en-US"/>
@@ -878,7 +2042,7 @@
       </p:sp>
       <p:sp>
         <p:nvSpPr>
-          <p:cNvPr id="3" name="Text Placeholder 2"/>
+          <p:cNvPr id="593227966" name="Text Placeholder 2"/>
           <p:cNvSpPr>
             <a:spLocks noGrp="1"/>
           </p:cNvSpPr>
@@ -886,7 +2050,7 @@
             <p:ph type="body" idx="1"/>
           </p:nvPr>
         </p:nvSpPr>
-        <p:spPr>
+        <p:spPr bwMode="auto">
           <a:xfrm>
             <a:off x="831850" y="4589463"/>
             <a:ext cx="10515600" cy="1500187"/>
@@ -987,17 +2151,20 @@
             </a:lvl9pPr>
           </a:lstStyle>
           <a:p>
-            <a:pPr lvl="0"/>
-            <a:r>
-              <a:rPr lang="en-US" smtClean="0"/>
+            <a:pPr lvl="0">
+              <a:defRPr/>
+            </a:pPr>
+            <a:r>
+              <a:rPr lang="en-US"/>
               <a:t>Edit Master text styles</a:t>
             </a:r>
-          </a:p>
-        </p:txBody>
-      </p:sp>
-      <p:sp>
-        <p:nvSpPr>
-          <p:cNvPr id="4" name="Date Placeholder 3"/>
+            <a:endParaRPr/>
+          </a:p>
+        </p:txBody>
+      </p:sp>
+      <p:sp>
+        <p:nvSpPr>
+          <p:cNvPr id="530368986" name="Date Placeholder 3"/>
           <p:cNvSpPr>
             <a:spLocks noGrp="1"/>
           </p:cNvSpPr>
@@ -1005,13 +2172,16 @@
             <p:ph type="dt" sz="half" idx="10"/>
           </p:nvPr>
         </p:nvSpPr>
-        <p:spPr/>
-        <p:txBody>
-          <a:bodyPr/>
-          <a:lstStyle/>
-          <a:p>
+        <p:spPr bwMode="auto"/>
+        <p:txBody>
+          <a:bodyPr/>
+          <a:lstStyle/>
+          <a:p>
+            <a:pPr>
+              <a:defRPr/>
+            </a:pPr>
             <a:fld id="{F48EC29D-8AD1-4A1A-B084-27A3BA4F2378}" type="datetimeFigureOut">
-              <a:rPr lang="en-US" smtClean="0"/>
+              <a:rPr lang="en-US"/>
               <a:t>4/2/2026</a:t>
             </a:fld>
             <a:endParaRPr lang="en-US"/>
@@ -1020,7 +2190,7 @@
       </p:sp>
       <p:sp>
         <p:nvSpPr>
-          <p:cNvPr id="5" name="Footer Placeholder 4"/>
+          <p:cNvPr id="295832833" name="Footer Placeholder 4"/>
           <p:cNvSpPr>
             <a:spLocks noGrp="1"/>
           </p:cNvSpPr>
@@ -1028,18 +2198,21 @@
             <p:ph type="ftr" sz="quarter" idx="11"/>
           </p:nvPr>
         </p:nvSpPr>
-        <p:spPr/>
-        <p:txBody>
-          <a:bodyPr/>
-          <a:lstStyle/>
-          <a:p>
-            <a:endParaRPr lang="en-US"/>
-          </a:p>
-        </p:txBody>
-      </p:sp>
-      <p:sp>
-        <p:nvSpPr>
-          <p:cNvPr id="6" name="Slide Number Placeholder 5"/>
+        <p:spPr bwMode="auto"/>
+        <p:txBody>
+          <a:bodyPr/>
+          <a:lstStyle/>
+          <a:p>
+            <a:pPr>
+              <a:defRPr/>
+            </a:pPr>
+            <a:endParaRPr lang="en-US"/>
+          </a:p>
+        </p:txBody>
+      </p:sp>
+      <p:sp>
+        <p:nvSpPr>
+          <p:cNvPr id="2011270197" name="Slide Number Placeholder 5"/>
           <p:cNvSpPr>
             <a:spLocks noGrp="1"/>
           </p:cNvSpPr>
@@ -1047,13 +2220,16 @@
             <p:ph type="sldNum" sz="quarter" idx="12"/>
           </p:nvPr>
         </p:nvSpPr>
-        <p:spPr/>
-        <p:txBody>
-          <a:bodyPr/>
-          <a:lstStyle/>
-          <a:p>
+        <p:spPr bwMode="auto"/>
+        <p:txBody>
+          <a:bodyPr/>
+          <a:lstStyle/>
+          <a:p>
+            <a:pPr>
+              <a:defRPr/>
+            </a:pPr>
             <a:fld id="{8CBA7428-BDF6-41A1-A129-14396D2572BF}" type="slidenum">
-              <a:rPr lang="en-US" smtClean="0"/>
+              <a:rPr lang="en-US"/>
               <a:t>‹#›</a:t>
             </a:fld>
             <a:endParaRPr lang="en-US"/>
@@ -1061,11 +2237,6 @@
         </p:txBody>
       </p:sp>
     </p:spTree>
-    <p:extLst>
-      <p:ext uri="{BB962C8B-B14F-4D97-AF65-F5344CB8AC3E}">
-        <p14:creationId xmlns:p14="http://schemas.microsoft.com/office/powerpoint/2010/main" val="3610094518"/>
-      </p:ext>
-    </p:extLst>
   </p:cSld>
   <p:clrMapOvr>
     <a:masterClrMapping/>
@@ -1074,7 +2245,7 @@
 </file>
 
 <file path=ppt/slideLayouts/slideLayout4.xml><?xml version="1.0" encoding="utf-8"?>
-<p:sldLayout xmlns:a="http://schemas.openxmlformats.org/drawingml/2006/main" xmlns:r="http://schemas.openxmlformats.org/officeDocument/2006/relationships" xmlns:p="http://schemas.openxmlformats.org/presentationml/2006/main" type="twoObj" preserve="1">
+<p:sldLayout xmlns:a="http://schemas.openxmlformats.org/drawingml/2006/main" xmlns:r="http://schemas.openxmlformats.org/officeDocument/2006/relationships" xmlns:p="http://schemas.openxmlformats.org/presentationml/2006/main" xmlns:m="http://schemas.openxmlformats.org/officeDocument/2006/math" xmlns:w="http://schemas.openxmlformats.org/wordprocessingml/2006/main" matchingName="" preserve="1" showMasterPhAnim="0" showMasterSp="1" type="twoObj" userDrawn="1">
   <p:cSld name="Two Content">
     <p:spTree>
       <p:nvGrpSpPr>
@@ -1082,7 +2253,7 @@
         <p:cNvGrpSpPr/>
         <p:nvPr/>
       </p:nvGrpSpPr>
-      <p:grpSpPr>
+      <p:grpSpPr bwMode="auto">
         <a:xfrm>
           <a:off x="0" y="0"/>
           <a:ext cx="0" cy="0"/>
@@ -1092,7 +2263,7 @@
       </p:grpSpPr>
       <p:sp>
         <p:nvSpPr>
-          <p:cNvPr id="2" name="Title 1"/>
+          <p:cNvPr id="1107684380" name="Title 1"/>
           <p:cNvSpPr>
             <a:spLocks noGrp="1"/>
           </p:cNvSpPr>
@@ -1100,13 +2271,16 @@
             <p:ph type="title"/>
           </p:nvPr>
         </p:nvSpPr>
-        <p:spPr/>
-        <p:txBody>
-          <a:bodyPr/>
-          <a:lstStyle/>
-          <a:p>
-            <a:r>
-              <a:rPr lang="en-US" smtClean="0"/>
+        <p:spPr bwMode="auto"/>
+        <p:txBody>
+          <a:bodyPr/>
+          <a:lstStyle/>
+          <a:p>
+            <a:pPr>
+              <a:defRPr/>
+            </a:pPr>
+            <a:r>
+              <a:rPr lang="en-US"/>
               <a:t>Click to edit Master title style</a:t>
             </a:r>
             <a:endParaRPr lang="en-US"/>
@@ -1115,7 +2289,7 @@
       </p:sp>
       <p:sp>
         <p:nvSpPr>
-          <p:cNvPr id="3" name="Content Placeholder 2"/>
+          <p:cNvPr id="162367999" name="Content Placeholder 2"/>
           <p:cNvSpPr>
             <a:spLocks noGrp="1"/>
           </p:cNvSpPr>
@@ -1123,7 +2297,7 @@
             <p:ph sz="half" idx="1"/>
           </p:nvPr>
         </p:nvSpPr>
-        <p:spPr>
+        <p:spPr bwMode="auto">
           <a:xfrm>
             <a:off x="838200" y="1825625"/>
             <a:ext cx="5181600" cy="4351338"/>
@@ -1133,37 +2307,51 @@
           <a:bodyPr/>
           <a:lstStyle/>
           <a:p>
-            <a:pPr lvl="0"/>
-            <a:r>
-              <a:rPr lang="en-US" smtClean="0"/>
+            <a:pPr lvl="0">
+              <a:defRPr/>
+            </a:pPr>
+            <a:r>
+              <a:rPr lang="en-US"/>
               <a:t>Edit Master text styles</a:t>
             </a:r>
-          </a:p>
-          <a:p>
-            <a:pPr lvl="1"/>
-            <a:r>
-              <a:rPr lang="en-US" smtClean="0"/>
+            <a:endParaRPr/>
+          </a:p>
+          <a:p>
+            <a:pPr lvl="1">
+              <a:defRPr/>
+            </a:pPr>
+            <a:r>
+              <a:rPr lang="en-US"/>
               <a:t>Second level</a:t>
             </a:r>
-          </a:p>
-          <a:p>
-            <a:pPr lvl="2"/>
-            <a:r>
-              <a:rPr lang="en-US" smtClean="0"/>
+            <a:endParaRPr/>
+          </a:p>
+          <a:p>
+            <a:pPr lvl="2">
+              <a:defRPr/>
+            </a:pPr>
+            <a:r>
+              <a:rPr lang="en-US"/>
               <a:t>Third level</a:t>
             </a:r>
-          </a:p>
-          <a:p>
-            <a:pPr lvl="3"/>
-            <a:r>
-              <a:rPr lang="en-US" smtClean="0"/>
+            <a:endParaRPr/>
+          </a:p>
+          <a:p>
+            <a:pPr lvl="3">
+              <a:defRPr/>
+            </a:pPr>
+            <a:r>
+              <a:rPr lang="en-US"/>
               <a:t>Fourth level</a:t>
             </a:r>
-          </a:p>
-          <a:p>
-            <a:pPr lvl="4"/>
-            <a:r>
-              <a:rPr lang="en-US" smtClean="0"/>
+            <a:endParaRPr/>
+          </a:p>
+          <a:p>
+            <a:pPr lvl="4">
+              <a:defRPr/>
+            </a:pPr>
+            <a:r>
+              <a:rPr lang="en-US"/>
               <a:t>Fifth level</a:t>
             </a:r>
             <a:endParaRPr lang="en-US"/>
@@ -1172,7 +2360,7 @@
       </p:sp>
       <p:sp>
         <p:nvSpPr>
-          <p:cNvPr id="4" name="Content Placeholder 3"/>
+          <p:cNvPr id="1267255683" name="Content Placeholder 3"/>
           <p:cNvSpPr>
             <a:spLocks noGrp="1"/>
           </p:cNvSpPr>
@@ -1180,7 +2368,7 @@
             <p:ph sz="half" idx="2"/>
           </p:nvPr>
         </p:nvSpPr>
-        <p:spPr>
+        <p:spPr bwMode="auto">
           <a:xfrm>
             <a:off x="6172200" y="1825625"/>
             <a:ext cx="5181600" cy="4351338"/>
@@ -1190,37 +2378,51 @@
           <a:bodyPr/>
           <a:lstStyle/>
           <a:p>
-            <a:pPr lvl="0"/>
-            <a:r>
-              <a:rPr lang="en-US" smtClean="0"/>
+            <a:pPr lvl="0">
+              <a:defRPr/>
+            </a:pPr>
+            <a:r>
+              <a:rPr lang="en-US"/>
               <a:t>Edit Master text styles</a:t>
             </a:r>
-          </a:p>
-          <a:p>
-            <a:pPr lvl="1"/>
-            <a:r>
-              <a:rPr lang="en-US" smtClean="0"/>
+            <a:endParaRPr/>
+          </a:p>
+          <a:p>
+            <a:pPr lvl="1">
+              <a:defRPr/>
+            </a:pPr>
+            <a:r>
+              <a:rPr lang="en-US"/>
               <a:t>Second level</a:t>
             </a:r>
-          </a:p>
-          <a:p>
-            <a:pPr lvl="2"/>
-            <a:r>
-              <a:rPr lang="en-US" smtClean="0"/>
+            <a:endParaRPr/>
+          </a:p>
+          <a:p>
+            <a:pPr lvl="2">
+              <a:defRPr/>
+            </a:pPr>
+            <a:r>
+              <a:rPr lang="en-US"/>
               <a:t>Third level</a:t>
             </a:r>
-          </a:p>
-          <a:p>
-            <a:pPr lvl="3"/>
-            <a:r>
-              <a:rPr lang="en-US" smtClean="0"/>
+            <a:endParaRPr/>
+          </a:p>
+          <a:p>
+            <a:pPr lvl="3">
+              <a:defRPr/>
+            </a:pPr>
+            <a:r>
+              <a:rPr lang="en-US"/>
               <a:t>Fourth level</a:t>
             </a:r>
-          </a:p>
-          <a:p>
-            <a:pPr lvl="4"/>
-            <a:r>
-              <a:rPr lang="en-US" smtClean="0"/>
+            <a:endParaRPr/>
+          </a:p>
+          <a:p>
+            <a:pPr lvl="4">
+              <a:defRPr/>
+            </a:pPr>
+            <a:r>
+              <a:rPr lang="en-US"/>
               <a:t>Fifth level</a:t>
             </a:r>
             <a:endParaRPr lang="en-US"/>
@@ -1229,7 +2431,7 @@
       </p:sp>
       <p:sp>
         <p:nvSpPr>
-          <p:cNvPr id="5" name="Date Placeholder 4"/>
+          <p:cNvPr id="206867892" name="Date Placeholder 4"/>
           <p:cNvSpPr>
             <a:spLocks noGrp="1"/>
           </p:cNvSpPr>
@@ -1237,13 +2439,16 @@
             <p:ph type="dt" sz="half" idx="10"/>
           </p:nvPr>
         </p:nvSpPr>
-        <p:spPr/>
-        <p:txBody>
-          <a:bodyPr/>
-          <a:lstStyle/>
-          <a:p>
+        <p:spPr bwMode="auto"/>
+        <p:txBody>
+          <a:bodyPr/>
+          <a:lstStyle/>
+          <a:p>
+            <a:pPr>
+              <a:defRPr/>
+            </a:pPr>
             <a:fld id="{F48EC29D-8AD1-4A1A-B084-27A3BA4F2378}" type="datetimeFigureOut">
-              <a:rPr lang="en-US" smtClean="0"/>
+              <a:rPr lang="en-US"/>
               <a:t>4/2/2026</a:t>
             </a:fld>
             <a:endParaRPr lang="en-US"/>
@@ -1252,7 +2457,7 @@
       </p:sp>
       <p:sp>
         <p:nvSpPr>
-          <p:cNvPr id="6" name="Footer Placeholder 5"/>
+          <p:cNvPr id="16524092" name="Footer Placeholder 5"/>
           <p:cNvSpPr>
             <a:spLocks noGrp="1"/>
           </p:cNvSpPr>
@@ -1260,18 +2465,21 @@
             <p:ph type="ftr" sz="quarter" idx="11"/>
           </p:nvPr>
         </p:nvSpPr>
-        <p:spPr/>
-        <p:txBody>
-          <a:bodyPr/>
-          <a:lstStyle/>
-          <a:p>
-            <a:endParaRPr lang="en-US"/>
-          </a:p>
-        </p:txBody>
-      </p:sp>
-      <p:sp>
-        <p:nvSpPr>
-          <p:cNvPr id="7" name="Slide Number Placeholder 6"/>
+        <p:spPr bwMode="auto"/>
+        <p:txBody>
+          <a:bodyPr/>
+          <a:lstStyle/>
+          <a:p>
+            <a:pPr>
+              <a:defRPr/>
+            </a:pPr>
+            <a:endParaRPr lang="en-US"/>
+          </a:p>
+        </p:txBody>
+      </p:sp>
+      <p:sp>
+        <p:nvSpPr>
+          <p:cNvPr id="567196408" name="Slide Number Placeholder 6"/>
           <p:cNvSpPr>
             <a:spLocks noGrp="1"/>
           </p:cNvSpPr>
@@ -1279,13 +2487,16 @@
             <p:ph type="sldNum" sz="quarter" idx="12"/>
           </p:nvPr>
         </p:nvSpPr>
-        <p:spPr/>
-        <p:txBody>
-          <a:bodyPr/>
-          <a:lstStyle/>
-          <a:p>
+        <p:spPr bwMode="auto"/>
+        <p:txBody>
+          <a:bodyPr/>
+          <a:lstStyle/>
+          <a:p>
+            <a:pPr>
+              <a:defRPr/>
+            </a:pPr>
             <a:fld id="{8CBA7428-BDF6-41A1-A129-14396D2572BF}" type="slidenum">
-              <a:rPr lang="en-US" smtClean="0"/>
+              <a:rPr lang="en-US"/>
               <a:t>‹#›</a:t>
             </a:fld>
             <a:endParaRPr lang="en-US"/>
@@ -1293,11 +2504,6 @@
         </p:txBody>
       </p:sp>
     </p:spTree>
-    <p:extLst>
-      <p:ext uri="{BB962C8B-B14F-4D97-AF65-F5344CB8AC3E}">
-        <p14:creationId xmlns:p14="http://schemas.microsoft.com/office/powerpoint/2010/main" val="139842195"/>
-      </p:ext>
-    </p:extLst>
   </p:cSld>
   <p:clrMapOvr>
     <a:masterClrMapping/>
@@ -1306,7 +2512,7 @@
 </file>
 
 <file path=ppt/slideLayouts/slideLayout5.xml><?xml version="1.0" encoding="utf-8"?>
-<p:sldLayout xmlns:a="http://schemas.openxmlformats.org/drawingml/2006/main" xmlns:r="http://schemas.openxmlformats.org/officeDocument/2006/relationships" xmlns:p="http://schemas.openxmlformats.org/presentationml/2006/main" type="twoTxTwoObj" preserve="1">
+<p:sldLayout xmlns:a="http://schemas.openxmlformats.org/drawingml/2006/main" xmlns:r="http://schemas.openxmlformats.org/officeDocument/2006/relationships" xmlns:p="http://schemas.openxmlformats.org/presentationml/2006/main" xmlns:m="http://schemas.openxmlformats.org/officeDocument/2006/math" xmlns:w="http://schemas.openxmlformats.org/wordprocessingml/2006/main" matchingName="" preserve="1" showMasterPhAnim="0" showMasterSp="1" type="twoTxTwoObj" userDrawn="1">
   <p:cSld name="Comparison">
     <p:spTree>
       <p:nvGrpSpPr>
@@ -1314,7 +2520,7 @@
         <p:cNvGrpSpPr/>
         <p:nvPr/>
       </p:nvGrpSpPr>
-      <p:grpSpPr>
+      <p:grpSpPr bwMode="auto">
         <a:xfrm>
           <a:off x="0" y="0"/>
           <a:ext cx="0" cy="0"/>
@@ -1324,7 +2530,7 @@
       </p:grpSpPr>
       <p:sp>
         <p:nvSpPr>
-          <p:cNvPr id="2" name="Title 1"/>
+          <p:cNvPr id="1250375071" name="Title 1"/>
           <p:cNvSpPr>
             <a:spLocks noGrp="1"/>
           </p:cNvSpPr>
@@ -1332,7 +2538,7 @@
             <p:ph type="title"/>
           </p:nvPr>
         </p:nvSpPr>
-        <p:spPr>
+        <p:spPr bwMode="auto">
           <a:xfrm>
             <a:off x="839788" y="365125"/>
             <a:ext cx="10515600" cy="1325563"/>
@@ -1342,8 +2548,11 @@
           <a:bodyPr/>
           <a:lstStyle/>
           <a:p>
-            <a:r>
-              <a:rPr lang="en-US" smtClean="0"/>
+            <a:pPr>
+              <a:defRPr/>
+            </a:pPr>
+            <a:r>
+              <a:rPr lang="en-US"/>
               <a:t>Click to edit Master title style</a:t>
             </a:r>
             <a:endParaRPr lang="en-US"/>
@@ -1352,7 +2561,7 @@
       </p:sp>
       <p:sp>
         <p:nvSpPr>
-          <p:cNvPr id="3" name="Text Placeholder 2"/>
+          <p:cNvPr id="452955231" name="Text Placeholder 2"/>
           <p:cNvSpPr>
             <a:spLocks noGrp="1"/>
           </p:cNvSpPr>
@@ -1360,7 +2569,7 @@
             <p:ph type="body" idx="1"/>
           </p:nvPr>
         </p:nvSpPr>
-        <p:spPr>
+        <p:spPr bwMode="auto">
           <a:xfrm>
             <a:off x="839788" y="1681163"/>
             <a:ext cx="5157787" cy="823912"/>
@@ -1407,17 +2616,20 @@
             </a:lvl9pPr>
           </a:lstStyle>
           <a:p>
-            <a:pPr lvl="0"/>
-            <a:r>
-              <a:rPr lang="en-US" smtClean="0"/>
+            <a:pPr lvl="0">
+              <a:defRPr/>
+            </a:pPr>
+            <a:r>
+              <a:rPr lang="en-US"/>
               <a:t>Edit Master text styles</a:t>
             </a:r>
-          </a:p>
-        </p:txBody>
-      </p:sp>
-      <p:sp>
-        <p:nvSpPr>
-          <p:cNvPr id="4" name="Content Placeholder 3"/>
+            <a:endParaRPr/>
+          </a:p>
+        </p:txBody>
+      </p:sp>
+      <p:sp>
+        <p:nvSpPr>
+          <p:cNvPr id="1487540640" name="Content Placeholder 3"/>
           <p:cNvSpPr>
             <a:spLocks noGrp="1"/>
           </p:cNvSpPr>
@@ -1425,9 +2637,9 @@
             <p:ph sz="half" idx="2"/>
           </p:nvPr>
         </p:nvSpPr>
-        <p:spPr>
+        <p:spPr bwMode="auto">
           <a:xfrm>
-            <a:off x="839788" y="2505075"/>
+            <a:off x="839788" y="2505074"/>
             <a:ext cx="5157787" cy="3684588"/>
           </a:xfrm>
         </p:spPr>
@@ -1435,37 +2647,51 @@
           <a:bodyPr/>
           <a:lstStyle/>
           <a:p>
-            <a:pPr lvl="0"/>
-            <a:r>
-              <a:rPr lang="en-US" smtClean="0"/>
+            <a:pPr lvl="0">
+              <a:defRPr/>
+            </a:pPr>
+            <a:r>
+              <a:rPr lang="en-US"/>
               <a:t>Edit Master text styles</a:t>
             </a:r>
-          </a:p>
-          <a:p>
-            <a:pPr lvl="1"/>
-            <a:r>
-              <a:rPr lang="en-US" smtClean="0"/>
+            <a:endParaRPr/>
+          </a:p>
+          <a:p>
+            <a:pPr lvl="1">
+              <a:defRPr/>
+            </a:pPr>
+            <a:r>
+              <a:rPr lang="en-US"/>
               <a:t>Second level</a:t>
             </a:r>
-          </a:p>
-          <a:p>
-            <a:pPr lvl="2"/>
-            <a:r>
-              <a:rPr lang="en-US" smtClean="0"/>
+            <a:endParaRPr/>
+          </a:p>
+          <a:p>
+            <a:pPr lvl="2">
+              <a:defRPr/>
+            </a:pPr>
+            <a:r>
+              <a:rPr lang="en-US"/>
               <a:t>Third level</a:t>
             </a:r>
-          </a:p>
-          <a:p>
-            <a:pPr lvl="3"/>
-            <a:r>
-              <a:rPr lang="en-US" smtClean="0"/>
+            <a:endParaRPr/>
+          </a:p>
+          <a:p>
+            <a:pPr lvl="3">
+              <a:defRPr/>
+            </a:pPr>
+            <a:r>
+              <a:rPr lang="en-US"/>
               <a:t>Fourth level</a:t>
             </a:r>
-          </a:p>
-          <a:p>
-            <a:pPr lvl="4"/>
-            <a:r>
-              <a:rPr lang="en-US" smtClean="0"/>
+            <a:endParaRPr/>
+          </a:p>
+          <a:p>
+            <a:pPr lvl="4">
+              <a:defRPr/>
+            </a:pPr>
+            <a:r>
+              <a:rPr lang="en-US"/>
               <a:t>Fifth level</a:t>
             </a:r>
             <a:endParaRPr lang="en-US"/>
@@ -1474,7 +2700,7 @@
       </p:sp>
       <p:sp>
         <p:nvSpPr>
-          <p:cNvPr id="5" name="Text Placeholder 4"/>
+          <p:cNvPr id="1734273808" name="Text Placeholder 4"/>
           <p:cNvSpPr>
             <a:spLocks noGrp="1"/>
           </p:cNvSpPr>
@@ -1482,7 +2708,7 @@
             <p:ph type="body" sz="quarter" idx="3"/>
           </p:nvPr>
         </p:nvSpPr>
-        <p:spPr>
+        <p:spPr bwMode="auto">
           <a:xfrm>
             <a:off x="6172200" y="1681163"/>
             <a:ext cx="5183188" cy="823912"/>
@@ -1529,17 +2755,20 @@
             </a:lvl9pPr>
           </a:lstStyle>
           <a:p>
-            <a:pPr lvl="0"/>
-            <a:r>
-              <a:rPr lang="en-US" smtClean="0"/>
+            <a:pPr lvl="0">
+              <a:defRPr/>
+            </a:pPr>
+            <a:r>
+              <a:rPr lang="en-US"/>
               <a:t>Edit Master text styles</a:t>
             </a:r>
-          </a:p>
-        </p:txBody>
-      </p:sp>
-      <p:sp>
-        <p:nvSpPr>
-          <p:cNvPr id="6" name="Content Placeholder 5"/>
+            <a:endParaRPr/>
+          </a:p>
+        </p:txBody>
+      </p:sp>
+      <p:sp>
+        <p:nvSpPr>
+          <p:cNvPr id="2133523389" name="Content Placeholder 5"/>
           <p:cNvSpPr>
             <a:spLocks noGrp="1"/>
           </p:cNvSpPr>
@@ -1547,9 +2776,9 @@
             <p:ph sz="quarter" idx="4"/>
           </p:nvPr>
         </p:nvSpPr>
-        <p:spPr>
+        <p:spPr bwMode="auto">
           <a:xfrm>
-            <a:off x="6172200" y="2505075"/>
+            <a:off x="6172200" y="2505074"/>
             <a:ext cx="5183188" cy="3684588"/>
           </a:xfrm>
         </p:spPr>
@@ -1557,37 +2786,51 @@
           <a:bodyPr/>
           <a:lstStyle/>
           <a:p>
-            <a:pPr lvl="0"/>
-            <a:r>
-              <a:rPr lang="en-US" smtClean="0"/>
+            <a:pPr lvl="0">
+              <a:defRPr/>
+            </a:pPr>
+            <a:r>
+              <a:rPr lang="en-US"/>
               <a:t>Edit Master text styles</a:t>
             </a:r>
-          </a:p>
-          <a:p>
-            <a:pPr lvl="1"/>
-            <a:r>
-              <a:rPr lang="en-US" smtClean="0"/>
+            <a:endParaRPr/>
+          </a:p>
+          <a:p>
+            <a:pPr lvl="1">
+              <a:defRPr/>
+            </a:pPr>
+            <a:r>
+              <a:rPr lang="en-US"/>
               <a:t>Second level</a:t>
             </a:r>
-          </a:p>
-          <a:p>
-            <a:pPr lvl="2"/>
-            <a:r>
-              <a:rPr lang="en-US" smtClean="0"/>
+            <a:endParaRPr/>
+          </a:p>
+          <a:p>
+            <a:pPr lvl="2">
+              <a:defRPr/>
+            </a:pPr>
+            <a:r>
+              <a:rPr lang="en-US"/>
               <a:t>Third level</a:t>
             </a:r>
-          </a:p>
-          <a:p>
-            <a:pPr lvl="3"/>
-            <a:r>
-              <a:rPr lang="en-US" smtClean="0"/>
+            <a:endParaRPr/>
+          </a:p>
+          <a:p>
+            <a:pPr lvl="3">
+              <a:defRPr/>
+            </a:pPr>
+            <a:r>
+              <a:rPr lang="en-US"/>
               <a:t>Fourth level</a:t>
             </a:r>
-          </a:p>
-          <a:p>
-            <a:pPr lvl="4"/>
-            <a:r>
-              <a:rPr lang="en-US" smtClean="0"/>
+            <a:endParaRPr/>
+          </a:p>
+          <a:p>
+            <a:pPr lvl="4">
+              <a:defRPr/>
+            </a:pPr>
+            <a:r>
+              <a:rPr lang="en-US"/>
               <a:t>Fifth level</a:t>
             </a:r>
             <a:endParaRPr lang="en-US"/>
@@ -1596,7 +2839,7 @@
       </p:sp>
       <p:sp>
         <p:nvSpPr>
-          <p:cNvPr id="7" name="Date Placeholder 6"/>
+          <p:cNvPr id="631846528" name="Date Placeholder 6"/>
           <p:cNvSpPr>
             <a:spLocks noGrp="1"/>
           </p:cNvSpPr>
@@ -1604,13 +2847,16 @@
             <p:ph type="dt" sz="half" idx="10"/>
           </p:nvPr>
         </p:nvSpPr>
-        <p:spPr/>
-        <p:txBody>
-          <a:bodyPr/>
-          <a:lstStyle/>
-          <a:p>
+        <p:spPr bwMode="auto"/>
+        <p:txBody>
+          <a:bodyPr/>
+          <a:lstStyle/>
+          <a:p>
+            <a:pPr>
+              <a:defRPr/>
+            </a:pPr>
             <a:fld id="{F48EC29D-8AD1-4A1A-B084-27A3BA4F2378}" type="datetimeFigureOut">
-              <a:rPr lang="en-US" smtClean="0"/>
+              <a:rPr lang="en-US"/>
               <a:t>4/2/2026</a:t>
             </a:fld>
             <a:endParaRPr lang="en-US"/>
@@ -1619,7 +2865,7 @@
       </p:sp>
       <p:sp>
         <p:nvSpPr>
-          <p:cNvPr id="8" name="Footer Placeholder 7"/>
+          <p:cNvPr id="1287104637" name="Footer Placeholder 7"/>
           <p:cNvSpPr>
             <a:spLocks noGrp="1"/>
           </p:cNvSpPr>
@@ -1627,18 +2873,21 @@
             <p:ph type="ftr" sz="quarter" idx="11"/>
           </p:nvPr>
         </p:nvSpPr>
-        <p:spPr/>
-        <p:txBody>
-          <a:bodyPr/>
-          <a:lstStyle/>
-          <a:p>
-            <a:endParaRPr lang="en-US"/>
-          </a:p>
-        </p:txBody>
-      </p:sp>
-      <p:sp>
-        <p:nvSpPr>
-          <p:cNvPr id="9" name="Slide Number Placeholder 8"/>
+        <p:spPr bwMode="auto"/>
+        <p:txBody>
+          <a:bodyPr/>
+          <a:lstStyle/>
+          <a:p>
+            <a:pPr>
+              <a:defRPr/>
+            </a:pPr>
+            <a:endParaRPr lang="en-US"/>
+          </a:p>
+        </p:txBody>
+      </p:sp>
+      <p:sp>
+        <p:nvSpPr>
+          <p:cNvPr id="500391305" name="Slide Number Placeholder 8"/>
           <p:cNvSpPr>
             <a:spLocks noGrp="1"/>
           </p:cNvSpPr>
@@ -1646,13 +2895,16 @@
             <p:ph type="sldNum" sz="quarter" idx="12"/>
           </p:nvPr>
         </p:nvSpPr>
-        <p:spPr/>
-        <p:txBody>
-          <a:bodyPr/>
-          <a:lstStyle/>
-          <a:p>
+        <p:spPr bwMode="auto"/>
+        <p:txBody>
+          <a:bodyPr/>
+          <a:lstStyle/>
+          <a:p>
+            <a:pPr>
+              <a:defRPr/>
+            </a:pPr>
             <a:fld id="{8CBA7428-BDF6-41A1-A129-14396D2572BF}" type="slidenum">
-              <a:rPr lang="en-US" smtClean="0"/>
+              <a:rPr lang="en-US"/>
               <a:t>‹#›</a:t>
             </a:fld>
             <a:endParaRPr lang="en-US"/>
@@ -1660,11 +2912,6 @@
         </p:txBody>
       </p:sp>
     </p:spTree>
-    <p:extLst>
-      <p:ext uri="{BB962C8B-B14F-4D97-AF65-F5344CB8AC3E}">
-        <p14:creationId xmlns:p14="http://schemas.microsoft.com/office/powerpoint/2010/main" val="3363073622"/>
-      </p:ext>
-    </p:extLst>
   </p:cSld>
   <p:clrMapOvr>
     <a:masterClrMapping/>
@@ -1673,7 +2920,7 @@
 </file>
 
 <file path=ppt/slideLayouts/slideLayout6.xml><?xml version="1.0" encoding="utf-8"?>
-<p:sldLayout xmlns:a="http://schemas.openxmlformats.org/drawingml/2006/main" xmlns:r="http://schemas.openxmlformats.org/officeDocument/2006/relationships" xmlns:p="http://schemas.openxmlformats.org/presentationml/2006/main" type="titleOnly" preserve="1">
+<p:sldLayout xmlns:a="http://schemas.openxmlformats.org/drawingml/2006/main" xmlns:r="http://schemas.openxmlformats.org/officeDocument/2006/relationships" xmlns:p="http://schemas.openxmlformats.org/presentationml/2006/main" xmlns:m="http://schemas.openxmlformats.org/officeDocument/2006/math" xmlns:w="http://schemas.openxmlformats.org/wordprocessingml/2006/main" matchingName="" preserve="1" showMasterPhAnim="0" showMasterSp="1" type="titleOnly" userDrawn="1">
   <p:cSld name="Title Only">
     <p:spTree>
       <p:nvGrpSpPr>
@@ -1681,7 +2928,7 @@
         <p:cNvGrpSpPr/>
         <p:nvPr/>
       </p:nvGrpSpPr>
-      <p:grpSpPr>
+      <p:grpSpPr bwMode="auto">
         <a:xfrm>
           <a:off x="0" y="0"/>
           <a:ext cx="0" cy="0"/>
@@ -1691,7 +2938,7 @@
       </p:grpSpPr>
       <p:sp>
         <p:nvSpPr>
-          <p:cNvPr id="2" name="Title 1"/>
+          <p:cNvPr id="481494695" name="Title 1"/>
           <p:cNvSpPr>
             <a:spLocks noGrp="1"/>
           </p:cNvSpPr>
@@ -1699,13 +2946,16 @@
             <p:ph type="title"/>
           </p:nvPr>
         </p:nvSpPr>
-        <p:spPr/>
-        <p:txBody>
-          <a:bodyPr/>
-          <a:lstStyle/>
-          <a:p>
-            <a:r>
-              <a:rPr lang="en-US" smtClean="0"/>
+        <p:spPr bwMode="auto"/>
+        <p:txBody>
+          <a:bodyPr/>
+          <a:lstStyle/>
+          <a:p>
+            <a:pPr>
+              <a:defRPr/>
+            </a:pPr>
+            <a:r>
+              <a:rPr lang="en-US"/>
               <a:t>Click to edit Master title style</a:t>
             </a:r>
             <a:endParaRPr lang="en-US"/>
@@ -1714,7 +2964,7 @@
       </p:sp>
       <p:sp>
         <p:nvSpPr>
-          <p:cNvPr id="3" name="Date Placeholder 2"/>
+          <p:cNvPr id="1936034326" name="Date Placeholder 2"/>
           <p:cNvSpPr>
             <a:spLocks noGrp="1"/>
           </p:cNvSpPr>
@@ -1722,13 +2972,16 @@
             <p:ph type="dt" sz="half" idx="10"/>
           </p:nvPr>
         </p:nvSpPr>
-        <p:spPr/>
-        <p:txBody>
-          <a:bodyPr/>
-          <a:lstStyle/>
-          <a:p>
+        <p:spPr bwMode="auto"/>
+        <p:txBody>
+          <a:bodyPr/>
+          <a:lstStyle/>
+          <a:p>
+            <a:pPr>
+              <a:defRPr/>
+            </a:pPr>
             <a:fld id="{F48EC29D-8AD1-4A1A-B084-27A3BA4F2378}" type="datetimeFigureOut">
-              <a:rPr lang="en-US" smtClean="0"/>
+              <a:rPr lang="en-US"/>
               <a:t>4/2/2026</a:t>
             </a:fld>
             <a:endParaRPr lang="en-US"/>
@@ -1737,7 +2990,7 @@
       </p:sp>
       <p:sp>
         <p:nvSpPr>
-          <p:cNvPr id="4" name="Footer Placeholder 3"/>
+          <p:cNvPr id="588627003" name="Footer Placeholder 3"/>
           <p:cNvSpPr>
             <a:spLocks noGrp="1"/>
           </p:cNvSpPr>
@@ -1745,18 +2998,21 @@
             <p:ph type="ftr" sz="quarter" idx="11"/>
           </p:nvPr>
         </p:nvSpPr>
-        <p:spPr/>
-        <p:txBody>
-          <a:bodyPr/>
-          <a:lstStyle/>
-          <a:p>
-            <a:endParaRPr lang="en-US"/>
-          </a:p>
-        </p:txBody>
-      </p:sp>
-      <p:sp>
-        <p:nvSpPr>
-          <p:cNvPr id="5" name="Slide Number Placeholder 4"/>
+        <p:spPr bwMode="auto"/>
+        <p:txBody>
+          <a:bodyPr/>
+          <a:lstStyle/>
+          <a:p>
+            <a:pPr>
+              <a:defRPr/>
+            </a:pPr>
+            <a:endParaRPr lang="en-US"/>
+          </a:p>
+        </p:txBody>
+      </p:sp>
+      <p:sp>
+        <p:nvSpPr>
+          <p:cNvPr id="1086355739" name="Slide Number Placeholder 4"/>
           <p:cNvSpPr>
             <a:spLocks noGrp="1"/>
           </p:cNvSpPr>
@@ -1764,13 +3020,16 @@
             <p:ph type="sldNum" sz="quarter" idx="12"/>
           </p:nvPr>
         </p:nvSpPr>
-        <p:spPr/>
-        <p:txBody>
-          <a:bodyPr/>
-          <a:lstStyle/>
-          <a:p>
+        <p:spPr bwMode="auto"/>
+        <p:txBody>
+          <a:bodyPr/>
+          <a:lstStyle/>
+          <a:p>
+            <a:pPr>
+              <a:defRPr/>
+            </a:pPr>
             <a:fld id="{8CBA7428-BDF6-41A1-A129-14396D2572BF}" type="slidenum">
-              <a:rPr lang="en-US" smtClean="0"/>
+              <a:rPr lang="en-US"/>
               <a:t>‹#›</a:t>
             </a:fld>
             <a:endParaRPr lang="en-US"/>
@@ -1778,11 +3037,6 @@
         </p:txBody>
       </p:sp>
     </p:spTree>
-    <p:extLst>
-      <p:ext uri="{BB962C8B-B14F-4D97-AF65-F5344CB8AC3E}">
-        <p14:creationId xmlns:p14="http://schemas.microsoft.com/office/powerpoint/2010/main" val="2461033851"/>
-      </p:ext>
-    </p:extLst>
   </p:cSld>
   <p:clrMapOvr>
     <a:masterClrMapping/>
@@ -1791,7 +3045,7 @@
 </file>
 
 <file path=ppt/slideLayouts/slideLayout7.xml><?xml version="1.0" encoding="utf-8"?>
-<p:sldLayout xmlns:a="http://schemas.openxmlformats.org/drawingml/2006/main" xmlns:r="http://schemas.openxmlformats.org/officeDocument/2006/relationships" xmlns:p="http://schemas.openxmlformats.org/presentationml/2006/main" type="blank" preserve="1">
+<p:sldLayout xmlns:a="http://schemas.openxmlformats.org/drawingml/2006/main" xmlns:r="http://schemas.openxmlformats.org/officeDocument/2006/relationships" xmlns:p="http://schemas.openxmlformats.org/presentationml/2006/main" xmlns:m="http://schemas.openxmlformats.org/officeDocument/2006/math" xmlns:w="http://schemas.openxmlformats.org/wordprocessingml/2006/main" matchingName="" preserve="1" showMasterPhAnim="0" showMasterSp="1" type="blank" userDrawn="1">
   <p:cSld name="Blank">
     <p:spTree>
       <p:nvGrpSpPr>
@@ -1799,7 +3053,7 @@
         <p:cNvGrpSpPr/>
         <p:nvPr/>
       </p:nvGrpSpPr>
-      <p:grpSpPr>
+      <p:grpSpPr bwMode="auto">
         <a:xfrm>
           <a:off x="0" y="0"/>
           <a:ext cx="0" cy="0"/>
@@ -1809,7 +3063,7 @@
       </p:grpSpPr>
       <p:sp>
         <p:nvSpPr>
-          <p:cNvPr id="2" name="Date Placeholder 1"/>
+          <p:cNvPr id="1046960691" name="Date Placeholder 1"/>
           <p:cNvSpPr>
             <a:spLocks noGrp="1"/>
           </p:cNvSpPr>
@@ -1817,13 +3071,16 @@
             <p:ph type="dt" sz="half" idx="10"/>
           </p:nvPr>
         </p:nvSpPr>
-        <p:spPr/>
-        <p:txBody>
-          <a:bodyPr/>
-          <a:lstStyle/>
-          <a:p>
+        <p:spPr bwMode="auto"/>
+        <p:txBody>
+          <a:bodyPr/>
+          <a:lstStyle/>
+          <a:p>
+            <a:pPr>
+              <a:defRPr/>
+            </a:pPr>
             <a:fld id="{F48EC29D-8AD1-4A1A-B084-27A3BA4F2378}" type="datetimeFigureOut">
-              <a:rPr lang="en-US" smtClean="0"/>
+              <a:rPr lang="en-US"/>
               <a:t>4/2/2026</a:t>
             </a:fld>
             <a:endParaRPr lang="en-US"/>
@@ -1832,7 +3089,7 @@
       </p:sp>
       <p:sp>
         <p:nvSpPr>
-          <p:cNvPr id="3" name="Footer Placeholder 2"/>
+          <p:cNvPr id="45481981" name="Footer Placeholder 2"/>
           <p:cNvSpPr>
             <a:spLocks noGrp="1"/>
           </p:cNvSpPr>
@@ -1840,18 +3097,21 @@
             <p:ph type="ftr" sz="quarter" idx="11"/>
           </p:nvPr>
         </p:nvSpPr>
-        <p:spPr/>
-        <p:txBody>
-          <a:bodyPr/>
-          <a:lstStyle/>
-          <a:p>
-            <a:endParaRPr lang="en-US"/>
-          </a:p>
-        </p:txBody>
-      </p:sp>
-      <p:sp>
-        <p:nvSpPr>
-          <p:cNvPr id="4" name="Slide Number Placeholder 3"/>
+        <p:spPr bwMode="auto"/>
+        <p:txBody>
+          <a:bodyPr/>
+          <a:lstStyle/>
+          <a:p>
+            <a:pPr>
+              <a:defRPr/>
+            </a:pPr>
+            <a:endParaRPr lang="en-US"/>
+          </a:p>
+        </p:txBody>
+      </p:sp>
+      <p:sp>
+        <p:nvSpPr>
+          <p:cNvPr id="2123910750" name="Slide Number Placeholder 3"/>
           <p:cNvSpPr>
             <a:spLocks noGrp="1"/>
           </p:cNvSpPr>
@@ -1859,13 +3119,16 @@
             <p:ph type="sldNum" sz="quarter" idx="12"/>
           </p:nvPr>
         </p:nvSpPr>
-        <p:spPr/>
-        <p:txBody>
-          <a:bodyPr/>
-          <a:lstStyle/>
-          <a:p>
+        <p:spPr bwMode="auto"/>
+        <p:txBody>
+          <a:bodyPr/>
+          <a:lstStyle/>
+          <a:p>
+            <a:pPr>
+              <a:defRPr/>
+            </a:pPr>
             <a:fld id="{8CBA7428-BDF6-41A1-A129-14396D2572BF}" type="slidenum">
-              <a:rPr lang="en-US" smtClean="0"/>
+              <a:rPr lang="en-US"/>
               <a:t>‹#›</a:t>
             </a:fld>
             <a:endParaRPr lang="en-US"/>
@@ -1873,11 +3136,6 @@
         </p:txBody>
       </p:sp>
     </p:spTree>
-    <p:extLst>
-      <p:ext uri="{BB962C8B-B14F-4D97-AF65-F5344CB8AC3E}">
-        <p14:creationId xmlns:p14="http://schemas.microsoft.com/office/powerpoint/2010/main" val="2295592093"/>
-      </p:ext>
-    </p:extLst>
   </p:cSld>
   <p:clrMapOvr>
     <a:masterClrMapping/>
@@ -1886,7 +3144,7 @@
 </file>
 
 <file path=ppt/slideLayouts/slideLayout8.xml><?xml version="1.0" encoding="utf-8"?>
-<p:sldLayout xmlns:a="http://schemas.openxmlformats.org/drawingml/2006/main" xmlns:r="http://schemas.openxmlformats.org/officeDocument/2006/relationships" xmlns:p="http://schemas.openxmlformats.org/presentationml/2006/main" type="objTx" preserve="1">
+<p:sldLayout xmlns:a="http://schemas.openxmlformats.org/drawingml/2006/main" xmlns:r="http://schemas.openxmlformats.org/officeDocument/2006/relationships" xmlns:p="http://schemas.openxmlformats.org/presentationml/2006/main" xmlns:m="http://schemas.openxmlformats.org/officeDocument/2006/math" xmlns:w="http://schemas.openxmlformats.org/wordprocessingml/2006/main" matchingName="" preserve="1" showMasterPhAnim="0" showMasterSp="1" type="objTx" userDrawn="1">
   <p:cSld name="Content with Caption">
     <p:spTree>
       <p:nvGrpSpPr>
@@ -1894,7 +3152,7 @@
         <p:cNvGrpSpPr/>
         <p:nvPr/>
       </p:nvGrpSpPr>
-      <p:grpSpPr>
+      <p:grpSpPr bwMode="auto">
         <a:xfrm>
           <a:off x="0" y="0"/>
           <a:ext cx="0" cy="0"/>
@@ -1904,7 +3162,7 @@
       </p:grpSpPr>
       <p:sp>
         <p:nvSpPr>
-          <p:cNvPr id="2" name="Title 1"/>
+          <p:cNvPr id="1517508282" name="Title 1"/>
           <p:cNvSpPr>
             <a:spLocks noGrp="1"/>
           </p:cNvSpPr>
@@ -1912,7 +3170,7 @@
             <p:ph type="title"/>
           </p:nvPr>
         </p:nvSpPr>
-        <p:spPr>
+        <p:spPr bwMode="auto">
           <a:xfrm>
             <a:off x="839788" y="457200"/>
             <a:ext cx="3932237" cy="1600200"/>
@@ -1926,8 +3184,11 @@
             </a:lvl1pPr>
           </a:lstStyle>
           <a:p>
-            <a:r>
-              <a:rPr lang="en-US" smtClean="0"/>
+            <a:pPr>
+              <a:defRPr/>
+            </a:pPr>
+            <a:r>
+              <a:rPr lang="en-US"/>
               <a:t>Click to edit Master title style</a:t>
             </a:r>
             <a:endParaRPr lang="en-US"/>
@@ -1936,7 +3197,7 @@
       </p:sp>
       <p:sp>
         <p:nvSpPr>
-          <p:cNvPr id="3" name="Content Placeholder 2"/>
+          <p:cNvPr id="960152583" name="Content Placeholder 2"/>
           <p:cNvSpPr>
             <a:spLocks noGrp="1"/>
           </p:cNvSpPr>
@@ -1944,7 +3205,7 @@
             <p:ph idx="1"/>
           </p:nvPr>
         </p:nvSpPr>
-        <p:spPr>
+        <p:spPr bwMode="auto">
           <a:xfrm>
             <a:off x="5183188" y="987425"/>
             <a:ext cx="6172200" cy="4873625"/>
@@ -1982,37 +3243,51 @@
             </a:lvl9pPr>
           </a:lstStyle>
           <a:p>
-            <a:pPr lvl="0"/>
-            <a:r>
-              <a:rPr lang="en-US" smtClean="0"/>
+            <a:pPr lvl="0">
+              <a:defRPr/>
+            </a:pPr>
+            <a:r>
+              <a:rPr lang="en-US"/>
               <a:t>Edit Master text styles</a:t>
             </a:r>
-          </a:p>
-          <a:p>
-            <a:pPr lvl="1"/>
-            <a:r>
-              <a:rPr lang="en-US" smtClean="0"/>
+            <a:endParaRPr/>
+          </a:p>
+          <a:p>
+            <a:pPr lvl="1">
+              <a:defRPr/>
+            </a:pPr>
+            <a:r>
+              <a:rPr lang="en-US"/>
               <a:t>Second level</a:t>
             </a:r>
-          </a:p>
-          <a:p>
-            <a:pPr lvl="2"/>
-            <a:r>
-              <a:rPr lang="en-US" smtClean="0"/>
+            <a:endParaRPr/>
+          </a:p>
+          <a:p>
+            <a:pPr lvl="2">
+              <a:defRPr/>
+            </a:pPr>
+            <a:r>
+              <a:rPr lang="en-US"/>
               <a:t>Third level</a:t>
             </a:r>
-          </a:p>
-          <a:p>
-            <a:pPr lvl="3"/>
-            <a:r>
-              <a:rPr lang="en-US" smtClean="0"/>
+            <a:endParaRPr/>
+          </a:p>
+          <a:p>
+            <a:pPr lvl="3">
+              <a:defRPr/>
+            </a:pPr>
+            <a:r>
+              <a:rPr lang="en-US"/>
               <a:t>Fourth level</a:t>
             </a:r>
-          </a:p>
-          <a:p>
-            <a:pPr lvl="4"/>
-            <a:r>
-              <a:rPr lang="en-US" smtClean="0"/>
+            <a:endParaRPr/>
+          </a:p>
+          <a:p>
+            <a:pPr lvl="4">
+              <a:defRPr/>
+            </a:pPr>
+            <a:r>
+              <a:rPr lang="en-US"/>
               <a:t>Fifth level</a:t>
             </a:r>
             <a:endParaRPr lang="en-US"/>
@@ -2021,7 +3296,7 @@
       </p:sp>
       <p:sp>
         <p:nvSpPr>
-          <p:cNvPr id="4" name="Text Placeholder 3"/>
+          <p:cNvPr id="1329876016" name="Text Placeholder 3"/>
           <p:cNvSpPr>
             <a:spLocks noGrp="1"/>
           </p:cNvSpPr>
@@ -2029,7 +3304,7 @@
             <p:ph type="body" sz="half" idx="2"/>
           </p:nvPr>
         </p:nvSpPr>
-        <p:spPr>
+        <p:spPr bwMode="auto">
           <a:xfrm>
             <a:off x="839788" y="2057400"/>
             <a:ext cx="3932237" cy="3811588"/>
@@ -2076,17 +3351,20 @@
             </a:lvl9pPr>
           </a:lstStyle>
           <a:p>
-            <a:pPr lvl="0"/>
-            <a:r>
-              <a:rPr lang="en-US" smtClean="0"/>
+            <a:pPr lvl="0">
+              <a:defRPr/>
+            </a:pPr>
+            <a:r>
+              <a:rPr lang="en-US"/>
               <a:t>Edit Master text styles</a:t>
             </a:r>
-          </a:p>
-        </p:txBody>
-      </p:sp>
-      <p:sp>
-        <p:nvSpPr>
-          <p:cNvPr id="5" name="Date Placeholder 4"/>
+            <a:endParaRPr/>
+          </a:p>
+        </p:txBody>
+      </p:sp>
+      <p:sp>
+        <p:nvSpPr>
+          <p:cNvPr id="2014217679" name="Date Placeholder 4"/>
           <p:cNvSpPr>
             <a:spLocks noGrp="1"/>
           </p:cNvSpPr>
@@ -2094,13 +3372,16 @@
             <p:ph type="dt" sz="half" idx="10"/>
           </p:nvPr>
         </p:nvSpPr>
-        <p:spPr/>
-        <p:txBody>
-          <a:bodyPr/>
-          <a:lstStyle/>
-          <a:p>
+        <p:spPr bwMode="auto"/>
+        <p:txBody>
+          <a:bodyPr/>
+          <a:lstStyle/>
+          <a:p>
+            <a:pPr>
+              <a:defRPr/>
+            </a:pPr>
             <a:fld id="{F48EC29D-8AD1-4A1A-B084-27A3BA4F2378}" type="datetimeFigureOut">
-              <a:rPr lang="en-US" smtClean="0"/>
+              <a:rPr lang="en-US"/>
               <a:t>4/2/2026</a:t>
             </a:fld>
             <a:endParaRPr lang="en-US"/>
@@ -2109,7 +3390,7 @@
       </p:sp>
       <p:sp>
         <p:nvSpPr>
-          <p:cNvPr id="6" name="Footer Placeholder 5"/>
+          <p:cNvPr id="773127516" name="Footer Placeholder 5"/>
           <p:cNvSpPr>
             <a:spLocks noGrp="1"/>
           </p:cNvSpPr>
@@ -2117,18 +3398,21 @@
             <p:ph type="ftr" sz="quarter" idx="11"/>
           </p:nvPr>
         </p:nvSpPr>
-        <p:spPr/>
-        <p:txBody>
-          <a:bodyPr/>
-          <a:lstStyle/>
-          <a:p>
-            <a:endParaRPr lang="en-US"/>
-          </a:p>
-        </p:txBody>
-      </p:sp>
-      <p:sp>
-        <p:nvSpPr>
-          <p:cNvPr id="7" name="Slide Number Placeholder 6"/>
+        <p:spPr bwMode="auto"/>
+        <p:txBody>
+          <a:bodyPr/>
+          <a:lstStyle/>
+          <a:p>
+            <a:pPr>
+              <a:defRPr/>
+            </a:pPr>
+            <a:endParaRPr lang="en-US"/>
+          </a:p>
+        </p:txBody>
+      </p:sp>
+      <p:sp>
+        <p:nvSpPr>
+          <p:cNvPr id="1418001499" name="Slide Number Placeholder 6"/>
           <p:cNvSpPr>
             <a:spLocks noGrp="1"/>
           </p:cNvSpPr>
@@ -2136,13 +3420,16 @@
             <p:ph type="sldNum" sz="quarter" idx="12"/>
           </p:nvPr>
         </p:nvSpPr>
-        <p:spPr/>
-        <p:txBody>
-          <a:bodyPr/>
-          <a:lstStyle/>
-          <a:p>
+        <p:spPr bwMode="auto"/>
+        <p:txBody>
+          <a:bodyPr/>
+          <a:lstStyle/>
+          <a:p>
+            <a:pPr>
+              <a:defRPr/>
+            </a:pPr>
             <a:fld id="{8CBA7428-BDF6-41A1-A129-14396D2572BF}" type="slidenum">
-              <a:rPr lang="en-US" smtClean="0"/>
+              <a:rPr lang="en-US"/>
               <a:t>‹#›</a:t>
             </a:fld>
             <a:endParaRPr lang="en-US"/>
@@ -2150,11 +3437,6 @@
         </p:txBody>
       </p:sp>
     </p:spTree>
-    <p:extLst>
-      <p:ext uri="{BB962C8B-B14F-4D97-AF65-F5344CB8AC3E}">
-        <p14:creationId xmlns:p14="http://schemas.microsoft.com/office/powerpoint/2010/main" val="1675636828"/>
-      </p:ext>
-    </p:extLst>
   </p:cSld>
   <p:clrMapOvr>
     <a:masterClrMapping/>
@@ -2163,7 +3445,7 @@
 </file>
 
 <file path=ppt/slideLayouts/slideLayout9.xml><?xml version="1.0" encoding="utf-8"?>
-<p:sldLayout xmlns:a="http://schemas.openxmlformats.org/drawingml/2006/main" xmlns:r="http://schemas.openxmlformats.org/officeDocument/2006/relationships" xmlns:p="http://schemas.openxmlformats.org/presentationml/2006/main" type="picTx" preserve="1">
+<p:sldLayout xmlns:a="http://schemas.openxmlformats.org/drawingml/2006/main" xmlns:r="http://schemas.openxmlformats.org/officeDocument/2006/relationships" xmlns:p="http://schemas.openxmlformats.org/presentationml/2006/main" xmlns:m="http://schemas.openxmlformats.org/officeDocument/2006/math" xmlns:w="http://schemas.openxmlformats.org/wordprocessingml/2006/main" matchingName="" preserve="1" showMasterPhAnim="0" showMasterSp="1" type="picTx" userDrawn="1">
   <p:cSld name="Picture with Caption">
     <p:spTree>
       <p:nvGrpSpPr>
@@ -2171,7 +3453,7 @@
         <p:cNvGrpSpPr/>
         <p:nvPr/>
       </p:nvGrpSpPr>
-      <p:grpSpPr>
+      <p:grpSpPr bwMode="auto">
         <a:xfrm>
           <a:off x="0" y="0"/>
           <a:ext cx="0" cy="0"/>
@@ -2181,7 +3463,7 @@
       </p:grpSpPr>
       <p:sp>
         <p:nvSpPr>
-          <p:cNvPr id="2" name="Title 1"/>
+          <p:cNvPr id="323086162" name="Title 1"/>
           <p:cNvSpPr>
             <a:spLocks noGrp="1"/>
           </p:cNvSpPr>
@@ -2189,7 +3471,7 @@
             <p:ph type="title"/>
           </p:nvPr>
         </p:nvSpPr>
-        <p:spPr>
+        <p:spPr bwMode="auto">
           <a:xfrm>
             <a:off x="839788" y="457200"/>
             <a:ext cx="3932237" cy="1600200"/>
@@ -2203,8 +3485,11 @@
             </a:lvl1pPr>
           </a:lstStyle>
           <a:p>
-            <a:r>
-              <a:rPr lang="en-US" smtClean="0"/>
+            <a:pPr>
+              <a:defRPr/>
+            </a:pPr>
+            <a:r>
+              <a:rPr lang="en-US"/>
               <a:t>Click to edit Master title style</a:t>
             </a:r>
             <a:endParaRPr lang="en-US"/>
@@ -2213,7 +3498,7 @@
       </p:sp>
       <p:sp>
         <p:nvSpPr>
-          <p:cNvPr id="3" name="Picture Placeholder 2"/>
+          <p:cNvPr id="1040182544" name="Picture Placeholder 2"/>
           <p:cNvSpPr>
             <a:spLocks noGrp="1"/>
           </p:cNvSpPr>
@@ -2221,7 +3506,7 @@
             <p:ph type="pic" idx="1"/>
           </p:nvPr>
         </p:nvSpPr>
-        <p:spPr>
+        <p:spPr bwMode="auto">
           <a:xfrm>
             <a:off x="5183188" y="987425"/>
             <a:ext cx="6172200" cy="4873625"/>
@@ -2268,13 +3553,16 @@
             </a:lvl9pPr>
           </a:lstStyle>
           <a:p>
-            <a:endParaRPr lang="en-US"/>
-          </a:p>
-        </p:txBody>
-      </p:sp>
-      <p:sp>
-        <p:nvSpPr>
-          <p:cNvPr id="4" name="Text Placeholder 3"/>
+            <a:pPr>
+              <a:defRPr/>
+            </a:pPr>
+            <a:endParaRPr lang="en-US"/>
+          </a:p>
+        </p:txBody>
+      </p:sp>
+      <p:sp>
+        <p:nvSpPr>
+          <p:cNvPr id="1707891462" name="Text Placeholder 3"/>
           <p:cNvSpPr>
             <a:spLocks noGrp="1"/>
           </p:cNvSpPr>
@@ -2282,7 +3570,7 @@
             <p:ph type="body" sz="half" idx="2"/>
           </p:nvPr>
         </p:nvSpPr>
-        <p:spPr>
+        <p:spPr bwMode="auto">
           <a:xfrm>
             <a:off x="839788" y="2057400"/>
             <a:ext cx="3932237" cy="3811588"/>
@@ -2329,17 +3617,20 @@
             </a:lvl9pPr>
           </a:lstStyle>
           <a:p>
-            <a:pPr lvl="0"/>
-            <a:r>
-              <a:rPr lang="en-US" smtClean="0"/>
+            <a:pPr lvl="0">
+              <a:defRPr/>
+            </a:pPr>
+            <a:r>
+              <a:rPr lang="en-US"/>
               <a:t>Edit Master text styles</a:t>
             </a:r>
-          </a:p>
-        </p:txBody>
-      </p:sp>
-      <p:sp>
-        <p:nvSpPr>
-          <p:cNvPr id="5" name="Date Placeholder 4"/>
+            <a:endParaRPr/>
+          </a:p>
+        </p:txBody>
+      </p:sp>
+      <p:sp>
+        <p:nvSpPr>
+          <p:cNvPr id="1818884608" name="Date Placeholder 4"/>
           <p:cNvSpPr>
             <a:spLocks noGrp="1"/>
           </p:cNvSpPr>
@@ -2347,13 +3638,16 @@
             <p:ph type="dt" sz="half" idx="10"/>
           </p:nvPr>
         </p:nvSpPr>
-        <p:spPr/>
-        <p:txBody>
-          <a:bodyPr/>
-          <a:lstStyle/>
-          <a:p>
+        <p:spPr bwMode="auto"/>
+        <p:txBody>
+          <a:bodyPr/>
+          <a:lstStyle/>
+          <a:p>
+            <a:pPr>
+              <a:defRPr/>
+            </a:pPr>
             <a:fld id="{F48EC29D-8AD1-4A1A-B084-27A3BA4F2378}" type="datetimeFigureOut">
-              <a:rPr lang="en-US" smtClean="0"/>
+              <a:rPr lang="en-US"/>
               <a:t>4/2/2026</a:t>
             </a:fld>
             <a:endParaRPr lang="en-US"/>
@@ -2362,7 +3656,7 @@
       </p:sp>
       <p:sp>
         <p:nvSpPr>
-          <p:cNvPr id="6" name="Footer Placeholder 5"/>
+          <p:cNvPr id="375397103" name="Footer Placeholder 5"/>
           <p:cNvSpPr>
             <a:spLocks noGrp="1"/>
           </p:cNvSpPr>
@@ -2370,18 +3664,21 @@
             <p:ph type="ftr" sz="quarter" idx="11"/>
           </p:nvPr>
         </p:nvSpPr>
-        <p:spPr/>
-        <p:txBody>
-          <a:bodyPr/>
-          <a:lstStyle/>
-          <a:p>
-            <a:endParaRPr lang="en-US"/>
-          </a:p>
-        </p:txBody>
-      </p:sp>
-      <p:sp>
-        <p:nvSpPr>
-          <p:cNvPr id="7" name="Slide Number Placeholder 6"/>
+        <p:spPr bwMode="auto"/>
+        <p:txBody>
+          <a:bodyPr/>
+          <a:lstStyle/>
+          <a:p>
+            <a:pPr>
+              <a:defRPr/>
+            </a:pPr>
+            <a:endParaRPr lang="en-US"/>
+          </a:p>
+        </p:txBody>
+      </p:sp>
+      <p:sp>
+        <p:nvSpPr>
+          <p:cNvPr id="1462298218" name="Slide Number Placeholder 6"/>
           <p:cNvSpPr>
             <a:spLocks noGrp="1"/>
           </p:cNvSpPr>
@@ -2389,13 +3686,16 @@
             <p:ph type="sldNum" sz="quarter" idx="12"/>
           </p:nvPr>
         </p:nvSpPr>
-        <p:spPr/>
-        <p:txBody>
-          <a:bodyPr/>
-          <a:lstStyle/>
-          <a:p>
+        <p:spPr bwMode="auto"/>
+        <p:txBody>
+          <a:bodyPr/>
+          <a:lstStyle/>
+          <a:p>
+            <a:pPr>
+              <a:defRPr/>
+            </a:pPr>
             <a:fld id="{8CBA7428-BDF6-41A1-A129-14396D2572BF}" type="slidenum">
-              <a:rPr lang="en-US" smtClean="0"/>
+              <a:rPr lang="en-US"/>
               <a:t>‹#›</a:t>
             </a:fld>
             <a:endParaRPr lang="en-US"/>
@@ -2403,11 +3703,6 @@
         </p:txBody>
       </p:sp>
     </p:spTree>
-    <p:extLst>
-      <p:ext uri="{BB962C8B-B14F-4D97-AF65-F5344CB8AC3E}">
-        <p14:creationId xmlns:p14="http://schemas.microsoft.com/office/powerpoint/2010/main" val="4119665983"/>
-      </p:ext>
-    </p:extLst>
   </p:cSld>
   <p:clrMapOvr>
     <a:masterClrMapping/>
@@ -2416,8 +3711,8 @@
 </file>
 
 <file path=ppt/slideMasters/slideMaster1.xml><?xml version="1.0" encoding="utf-8"?>
-<p:sldMaster xmlns:a="http://schemas.openxmlformats.org/drawingml/2006/main" xmlns:r="http://schemas.openxmlformats.org/officeDocument/2006/relationships" xmlns:p="http://schemas.openxmlformats.org/presentationml/2006/main">
-  <p:cSld>
+<p:sldMaster xmlns:a="http://schemas.openxmlformats.org/drawingml/2006/main" xmlns:r="http://schemas.openxmlformats.org/officeDocument/2006/relationships" xmlns:p="http://schemas.openxmlformats.org/presentationml/2006/main" xmlns:m="http://schemas.openxmlformats.org/officeDocument/2006/math" xmlns:w="http://schemas.openxmlformats.org/wordprocessingml/2006/main" preserve="0">
+  <p:cSld name="">
     <p:bg>
       <p:bgRef idx="1001">
         <a:schemeClr val="bg1"/>
@@ -2429,7 +3724,7 @@
         <p:cNvGrpSpPr/>
         <p:nvPr/>
       </p:nvGrpSpPr>
-      <p:grpSpPr>
+      <p:grpSpPr bwMode="auto">
         <a:xfrm>
           <a:off x="0" y="0"/>
           <a:ext cx="0" cy="0"/>
@@ -2439,7 +3734,7 @@
       </p:grpSpPr>
       <p:sp>
         <p:nvSpPr>
-          <p:cNvPr id="2" name="Title Placeholder 1"/>
+          <p:cNvPr id="1036856911" name="Title Placeholder 1"/>
           <p:cNvSpPr>
             <a:spLocks noGrp="1"/>
           </p:cNvSpPr>
@@ -2447,7 +3742,7 @@
             <p:ph type="title"/>
           </p:nvPr>
         </p:nvSpPr>
-        <p:spPr>
+        <p:spPr bwMode="auto">
           <a:xfrm>
             <a:off x="838200" y="365125"/>
             <a:ext cx="10515600" cy="1325563"/>
@@ -2462,8 +3757,11 @@
           </a:bodyPr>
           <a:lstStyle/>
           <a:p>
-            <a:r>
-              <a:rPr lang="en-US" smtClean="0"/>
+            <a:pPr>
+              <a:defRPr/>
+            </a:pPr>
+            <a:r>
+              <a:rPr lang="en-US"/>
               <a:t>Click to edit Master title style</a:t>
             </a:r>
             <a:endParaRPr lang="en-US"/>
@@ -2472,7 +3770,7 @@
       </p:sp>
       <p:sp>
         <p:nvSpPr>
-          <p:cNvPr id="3" name="Text Placeholder 2"/>
+          <p:cNvPr id="587720288" name="Text Placeholder 2"/>
           <p:cNvSpPr>
             <a:spLocks noGrp="1"/>
           </p:cNvSpPr>
@@ -2480,7 +3778,7 @@
             <p:ph type="body" idx="1"/>
           </p:nvPr>
         </p:nvSpPr>
-        <p:spPr>
+        <p:spPr bwMode="auto">
           <a:xfrm>
             <a:off x="838200" y="1825625"/>
             <a:ext cx="10515600" cy="4351338"/>
@@ -2495,37 +3793,51 @@
           </a:bodyPr>
           <a:lstStyle/>
           <a:p>
-            <a:pPr lvl="0"/>
-            <a:r>
-              <a:rPr lang="en-US" smtClean="0"/>
+            <a:pPr lvl="0">
+              <a:defRPr/>
+            </a:pPr>
+            <a:r>
+              <a:rPr lang="en-US"/>
               <a:t>Edit Master text styles</a:t>
             </a:r>
-          </a:p>
-          <a:p>
-            <a:pPr lvl="1"/>
-            <a:r>
-              <a:rPr lang="en-US" smtClean="0"/>
+            <a:endParaRPr/>
+          </a:p>
+          <a:p>
+            <a:pPr lvl="1">
+              <a:defRPr/>
+            </a:pPr>
+            <a:r>
+              <a:rPr lang="en-US"/>
               <a:t>Second level</a:t>
             </a:r>
-          </a:p>
-          <a:p>
-            <a:pPr lvl="2"/>
-            <a:r>
-              <a:rPr lang="en-US" smtClean="0"/>
+            <a:endParaRPr/>
+          </a:p>
+          <a:p>
+            <a:pPr lvl="2">
+              <a:defRPr/>
+            </a:pPr>
+            <a:r>
+              <a:rPr lang="en-US"/>
               <a:t>Third level</a:t>
             </a:r>
-          </a:p>
-          <a:p>
-            <a:pPr lvl="3"/>
-            <a:r>
-              <a:rPr lang="en-US" smtClean="0"/>
+            <a:endParaRPr/>
+          </a:p>
+          <a:p>
+            <a:pPr lvl="3">
+              <a:defRPr/>
+            </a:pPr>
+            <a:r>
+              <a:rPr lang="en-US"/>
               <a:t>Fourth level</a:t>
             </a:r>
-          </a:p>
-          <a:p>
-            <a:pPr lvl="4"/>
-            <a:r>
-              <a:rPr lang="en-US" smtClean="0"/>
+            <a:endParaRPr/>
+          </a:p>
+          <a:p>
+            <a:pPr lvl="4">
+              <a:defRPr/>
+            </a:pPr>
+            <a:r>
+              <a:rPr lang="en-US"/>
               <a:t>Fifth level</a:t>
             </a:r>
             <a:endParaRPr lang="en-US"/>
@@ -2534,7 +3846,7 @@
       </p:sp>
       <p:sp>
         <p:nvSpPr>
-          <p:cNvPr id="4" name="Date Placeholder 3"/>
+          <p:cNvPr id="611161968" name="Date Placeholder 3"/>
           <p:cNvSpPr>
             <a:spLocks noGrp="1"/>
           </p:cNvSpPr>
@@ -2542,7 +3854,7 @@
             <p:ph type="dt" sz="half" idx="2"/>
           </p:nvPr>
         </p:nvSpPr>
-        <p:spPr>
+        <p:spPr bwMode="auto">
           <a:xfrm>
             <a:off x="838200" y="6356350"/>
             <a:ext cx="2743200" cy="365125"/>
@@ -2565,8 +3877,11 @@
             </a:lvl1pPr>
           </a:lstStyle>
           <a:p>
+            <a:pPr>
+              <a:defRPr/>
+            </a:pPr>
             <a:fld id="{F48EC29D-8AD1-4A1A-B084-27A3BA4F2378}" type="datetimeFigureOut">
-              <a:rPr lang="en-US" smtClean="0"/>
+              <a:rPr lang="en-US"/>
               <a:t>4/2/2026</a:t>
             </a:fld>
             <a:endParaRPr lang="en-US"/>
@@ -2575,7 +3890,7 @@
       </p:sp>
       <p:sp>
         <p:nvSpPr>
-          <p:cNvPr id="5" name="Footer Placeholder 4"/>
+          <p:cNvPr id="1742622652" name="Footer Placeholder 4"/>
           <p:cNvSpPr>
             <a:spLocks noGrp="1"/>
           </p:cNvSpPr>
@@ -2583,7 +3898,7 @@
             <p:ph type="ftr" sz="quarter" idx="3"/>
           </p:nvPr>
         </p:nvSpPr>
-        <p:spPr>
+        <p:spPr bwMode="auto">
           <a:xfrm>
             <a:off x="4038600" y="6356350"/>
             <a:ext cx="4114800" cy="365125"/>
@@ -2606,13 +3921,16 @@
             </a:lvl1pPr>
           </a:lstStyle>
           <a:p>
-            <a:endParaRPr lang="en-US"/>
-          </a:p>
-        </p:txBody>
-      </p:sp>
-      <p:sp>
-        <p:nvSpPr>
-          <p:cNvPr id="6" name="Slide Number Placeholder 5"/>
+            <a:pPr>
+              <a:defRPr/>
+            </a:pPr>
+            <a:endParaRPr lang="en-US"/>
+          </a:p>
+        </p:txBody>
+      </p:sp>
+      <p:sp>
+        <p:nvSpPr>
+          <p:cNvPr id="469366872" name="Slide Number Placeholder 5"/>
           <p:cNvSpPr>
             <a:spLocks noGrp="1"/>
           </p:cNvSpPr>
@@ -2620,7 +3938,7 @@
             <p:ph type="sldNum" sz="quarter" idx="4"/>
           </p:nvPr>
         </p:nvSpPr>
-        <p:spPr>
+        <p:spPr bwMode="auto">
           <a:xfrm>
             <a:off x="8610600" y="6356350"/>
             <a:ext cx="2743200" cy="365125"/>
@@ -2643,8 +3961,11 @@
             </a:lvl1pPr>
           </a:lstStyle>
           <a:p>
+            <a:pPr>
+              <a:defRPr/>
+            </a:pPr>
             <a:fld id="{8CBA7428-BDF6-41A1-A129-14396D2572BF}" type="slidenum">
-              <a:rPr lang="en-US" smtClean="0"/>
+              <a:rPr lang="en-US"/>
               <a:t>‹#›</a:t>
             </a:fld>
             <a:endParaRPr lang="en-US"/>
@@ -2652,11 +3973,6 @@
         </p:txBody>
       </p:sp>
     </p:spTree>
-    <p:extLst>
-      <p:ext uri="{BB962C8B-B14F-4D97-AF65-F5344CB8AC3E}">
-        <p14:creationId xmlns:p14="http://schemas.microsoft.com/office/powerpoint/2010/main" val="1027335508"/>
-      </p:ext>
-    </p:extLst>
   </p:cSld>
   <p:clrMap bg1="lt1" tx1="dk1" bg2="lt2" tx2="dk2" accent1="accent1" accent2="accent2" accent3="accent3" accent4="accent4" accent5="accent5" accent6="accent6" hlink="hlink" folHlink="folHlink"/>
   <p:sldLayoutIdLst>
@@ -2674,15 +3990,15 @@
   </p:sldLayoutIdLst>
   <p:txStyles>
     <p:titleStyle>
-      <a:lvl1pPr algn="l" defTabSz="914400" rtl="0" eaLnBrk="1" latinLnBrk="0" hangingPunct="1">
+      <a:lvl1pPr algn="l" defTabSz="914400" rtl="0">
         <a:lnSpc>
           <a:spcPct val="90000"/>
         </a:lnSpc>
         <a:spcBef>
-          <a:spcPct val="0"/>
+          <a:spcPts val="0"/>
         </a:spcBef>
         <a:buNone/>
-        <a:defRPr sz="4400" kern="1200">
+        <a:defRPr sz="4400">
           <a:solidFill>
             <a:schemeClr val="tx1"/>
           </a:solidFill>
@@ -2693,16 +4009,16 @@
       </a:lvl1pPr>
     </p:titleStyle>
     <p:bodyStyle>
-      <a:lvl1pPr marL="228600" indent="-228600" algn="l" defTabSz="914400" rtl="0" eaLnBrk="1" latinLnBrk="0" hangingPunct="1">
+      <a:lvl1pPr marL="228600" indent="-228600" algn="l" defTabSz="914400" rtl="0">
         <a:lnSpc>
           <a:spcPct val="90000"/>
         </a:lnSpc>
         <a:spcBef>
           <a:spcPts val="1000"/>
         </a:spcBef>
-        <a:buFont typeface="Arial" panose="020B0604020202020204" pitchFamily="34" charset="0"/>
+        <a:buFont typeface="Arial"/>
         <a:buChar char="•"/>
-        <a:defRPr sz="2800" kern="1200">
+        <a:defRPr sz="2800">
           <a:solidFill>
             <a:schemeClr val="tx1"/>
           </a:solidFill>
@@ -2711,16 +4027,16 @@
           <a:cs typeface="+mn-cs"/>
         </a:defRPr>
       </a:lvl1pPr>
-      <a:lvl2pPr marL="685800" indent="-228600" algn="l" defTabSz="914400" rtl="0" eaLnBrk="1" latinLnBrk="0" hangingPunct="1">
+      <a:lvl2pPr marL="685800" indent="-228600" algn="l" defTabSz="914400" rtl="0">
         <a:lnSpc>
           <a:spcPct val="90000"/>
         </a:lnSpc>
         <a:spcBef>
           <a:spcPts val="500"/>
         </a:spcBef>
-        <a:buFont typeface="Arial" panose="020B0604020202020204" pitchFamily="34" charset="0"/>
+        <a:buFont typeface="Arial"/>
         <a:buChar char="•"/>
-        <a:defRPr sz="2400" kern="1200">
+        <a:defRPr sz="2400">
           <a:solidFill>
             <a:schemeClr val="tx1"/>
           </a:solidFill>
@@ -2729,16 +4045,16 @@
           <a:cs typeface="+mn-cs"/>
         </a:defRPr>
       </a:lvl2pPr>
-      <a:lvl3pPr marL="1143000" indent="-228600" algn="l" defTabSz="914400" rtl="0" eaLnBrk="1" latinLnBrk="0" hangingPunct="1">
+      <a:lvl3pPr marL="1143000" indent="-228600" algn="l" defTabSz="914400" rtl="0">
         <a:lnSpc>
           <a:spcPct val="90000"/>
         </a:lnSpc>
         <a:spcBef>
           <a:spcPts val="500"/>
         </a:spcBef>
-        <a:buFont typeface="Arial" panose="020B0604020202020204" pitchFamily="34" charset="0"/>
+        <a:buFont typeface="Arial"/>
         <a:buChar char="•"/>
-        <a:defRPr sz="2000" kern="1200">
+        <a:defRPr sz="2000">
           <a:solidFill>
             <a:schemeClr val="tx1"/>
           </a:solidFill>
@@ -2747,16 +4063,16 @@
           <a:cs typeface="+mn-cs"/>
         </a:defRPr>
       </a:lvl3pPr>
-      <a:lvl4pPr marL="1600200" indent="-228600" algn="l" defTabSz="914400" rtl="0" eaLnBrk="1" latinLnBrk="0" hangingPunct="1">
+      <a:lvl4pPr marL="1600200" indent="-228600" algn="l" defTabSz="914400" rtl="0">
         <a:lnSpc>
           <a:spcPct val="90000"/>
         </a:lnSpc>
         <a:spcBef>
           <a:spcPts val="500"/>
         </a:spcBef>
-        <a:buFont typeface="Arial" panose="020B0604020202020204" pitchFamily="34" charset="0"/>
+        <a:buFont typeface="Arial"/>
         <a:buChar char="•"/>
-        <a:defRPr sz="1800" kern="1200">
+        <a:defRPr sz="1800">
           <a:solidFill>
             <a:schemeClr val="tx1"/>
           </a:solidFill>
@@ -2765,16 +4081,16 @@
           <a:cs typeface="+mn-cs"/>
         </a:defRPr>
       </a:lvl4pPr>
-      <a:lvl5pPr marL="2057400" indent="-228600" algn="l" defTabSz="914400" rtl="0" eaLnBrk="1" latinLnBrk="0" hangingPunct="1">
+      <a:lvl5pPr marL="2057400" indent="-228600" algn="l" defTabSz="914400" rtl="0">
         <a:lnSpc>
           <a:spcPct val="90000"/>
         </a:lnSpc>
         <a:spcBef>
           <a:spcPts val="500"/>
         </a:spcBef>
-        <a:buFont typeface="Arial" panose="020B0604020202020204" pitchFamily="34" charset="0"/>
+        <a:buFont typeface="Arial"/>
         <a:buChar char="•"/>
-        <a:defRPr sz="1800" kern="1200">
+        <a:defRPr sz="1800">
           <a:solidFill>
             <a:schemeClr val="tx1"/>
           </a:solidFill>
@@ -2783,16 +4099,16 @@
           <a:cs typeface="+mn-cs"/>
         </a:defRPr>
       </a:lvl5pPr>
-      <a:lvl6pPr marL="2514600" indent="-228600" algn="l" defTabSz="914400" rtl="0" eaLnBrk="1" latinLnBrk="0" hangingPunct="1">
+      <a:lvl6pPr marL="2514600" indent="-228600" algn="l" defTabSz="914400" rtl="0">
         <a:lnSpc>
           <a:spcPct val="90000"/>
         </a:lnSpc>
         <a:spcBef>
           <a:spcPts val="500"/>
         </a:spcBef>
-        <a:buFont typeface="Arial" panose="020B0604020202020204" pitchFamily="34" charset="0"/>
+        <a:buFont typeface="Arial"/>
         <a:buChar char="•"/>
-        <a:defRPr sz="1800" kern="1200">
+        <a:defRPr sz="1800">
           <a:solidFill>
             <a:schemeClr val="tx1"/>
           </a:solidFill>
@@ -2801,16 +4117,16 @@
           <a:cs typeface="+mn-cs"/>
         </a:defRPr>
       </a:lvl6pPr>
-      <a:lvl7pPr marL="2971800" indent="-228600" algn="l" defTabSz="914400" rtl="0" eaLnBrk="1" latinLnBrk="0" hangingPunct="1">
+      <a:lvl7pPr marL="2971800" indent="-228600" algn="l" defTabSz="914400" rtl="0">
         <a:lnSpc>
           <a:spcPct val="90000"/>
         </a:lnSpc>
         <a:spcBef>
           <a:spcPts val="500"/>
         </a:spcBef>
-        <a:buFont typeface="Arial" panose="020B0604020202020204" pitchFamily="34" charset="0"/>
+        <a:buFont typeface="Arial"/>
         <a:buChar char="•"/>
-        <a:defRPr sz="1800" kern="1200">
+        <a:defRPr sz="1800">
           <a:solidFill>
             <a:schemeClr val="tx1"/>
           </a:solidFill>
@@ -2819,16 +4135,16 @@
           <a:cs typeface="+mn-cs"/>
         </a:defRPr>
       </a:lvl7pPr>
-      <a:lvl8pPr marL="3429000" indent="-228600" algn="l" defTabSz="914400" rtl="0" eaLnBrk="1" latinLnBrk="0" hangingPunct="1">
+      <a:lvl8pPr marL="3429000" indent="-228600" algn="l" defTabSz="914400" rtl="0">
         <a:lnSpc>
           <a:spcPct val="90000"/>
         </a:lnSpc>
         <a:spcBef>
           <a:spcPts val="500"/>
         </a:spcBef>
-        <a:buFont typeface="Arial" panose="020B0604020202020204" pitchFamily="34" charset="0"/>
+        <a:buFont typeface="Arial"/>
         <a:buChar char="•"/>
-        <a:defRPr sz="1800" kern="1200">
+        <a:defRPr sz="1800">
           <a:solidFill>
             <a:schemeClr val="tx1"/>
           </a:solidFill>
@@ -2837,16 +4153,16 @@
           <a:cs typeface="+mn-cs"/>
         </a:defRPr>
       </a:lvl8pPr>
-      <a:lvl9pPr marL="3886200" indent="-228600" algn="l" defTabSz="914400" rtl="0" eaLnBrk="1" latinLnBrk="0" hangingPunct="1">
+      <a:lvl9pPr marL="3886200" indent="-228600" algn="l" defTabSz="914400" rtl="0">
         <a:lnSpc>
           <a:spcPct val="90000"/>
         </a:lnSpc>
         <a:spcBef>
           <a:spcPts val="500"/>
         </a:spcBef>
-        <a:buFont typeface="Arial" panose="020B0604020202020204" pitchFamily="34" charset="0"/>
+        <a:buFont typeface="Arial"/>
         <a:buChar char="•"/>
-        <a:defRPr sz="1800" kern="1200">
+        <a:defRPr sz="1800">
           <a:solidFill>
             <a:schemeClr val="tx1"/>
           </a:solidFill>
@@ -2860,8 +4176,8 @@
       <a:defPPr>
         <a:defRPr lang="en-US"/>
       </a:defPPr>
-      <a:lvl1pPr marL="0" algn="l" defTabSz="914400" rtl="0" eaLnBrk="1" latinLnBrk="0" hangingPunct="1">
-        <a:defRPr sz="1800" kern="1200">
+      <a:lvl1pPr marL="0" algn="l" defTabSz="914400" rtl="0">
+        <a:defRPr sz="1800">
           <a:solidFill>
             <a:schemeClr val="tx1"/>
           </a:solidFill>
@@ -2870,8 +4186,8 @@
           <a:cs typeface="+mn-cs"/>
         </a:defRPr>
       </a:lvl1pPr>
-      <a:lvl2pPr marL="457200" algn="l" defTabSz="914400" rtl="0" eaLnBrk="1" latinLnBrk="0" hangingPunct="1">
-        <a:defRPr sz="1800" kern="1200">
+      <a:lvl2pPr marL="457200" algn="l" defTabSz="914400" rtl="0">
+        <a:defRPr sz="1800">
           <a:solidFill>
             <a:schemeClr val="tx1"/>
           </a:solidFill>
@@ -2880,8 +4196,8 @@
           <a:cs typeface="+mn-cs"/>
         </a:defRPr>
       </a:lvl2pPr>
-      <a:lvl3pPr marL="914400" algn="l" defTabSz="914400" rtl="0" eaLnBrk="1" latinLnBrk="0" hangingPunct="1">
-        <a:defRPr sz="1800" kern="1200">
+      <a:lvl3pPr marL="914400" algn="l" defTabSz="914400" rtl="0">
+        <a:defRPr sz="1800">
           <a:solidFill>
             <a:schemeClr val="tx1"/>
           </a:solidFill>
@@ -2890,8 +4206,8 @@
           <a:cs typeface="+mn-cs"/>
         </a:defRPr>
       </a:lvl3pPr>
-      <a:lvl4pPr marL="1371600" algn="l" defTabSz="914400" rtl="0" eaLnBrk="1" latinLnBrk="0" hangingPunct="1">
-        <a:defRPr sz="1800" kern="1200">
+      <a:lvl4pPr marL="1371600" algn="l" defTabSz="914400" rtl="0">
+        <a:defRPr sz="1800">
           <a:solidFill>
             <a:schemeClr val="tx1"/>
           </a:solidFill>
@@ -2900,8 +4216,8 @@
           <a:cs typeface="+mn-cs"/>
         </a:defRPr>
       </a:lvl4pPr>
-      <a:lvl5pPr marL="1828800" algn="l" defTabSz="914400" rtl="0" eaLnBrk="1" latinLnBrk="0" hangingPunct="1">
-        <a:defRPr sz="1800" kern="1200">
+      <a:lvl5pPr marL="1828800" algn="l" defTabSz="914400" rtl="0">
+        <a:defRPr sz="1800">
           <a:solidFill>
             <a:schemeClr val="tx1"/>
           </a:solidFill>
@@ -2910,8 +4226,8 @@
           <a:cs typeface="+mn-cs"/>
         </a:defRPr>
       </a:lvl5pPr>
-      <a:lvl6pPr marL="2286000" algn="l" defTabSz="914400" rtl="0" eaLnBrk="1" latinLnBrk="0" hangingPunct="1">
-        <a:defRPr sz="1800" kern="1200">
+      <a:lvl6pPr marL="2286000" algn="l" defTabSz="914400" rtl="0">
+        <a:defRPr sz="1800">
           <a:solidFill>
             <a:schemeClr val="tx1"/>
           </a:solidFill>
@@ -2920,8 +4236,8 @@
           <a:cs typeface="+mn-cs"/>
         </a:defRPr>
       </a:lvl6pPr>
-      <a:lvl7pPr marL="2743200" algn="l" defTabSz="914400" rtl="0" eaLnBrk="1" latinLnBrk="0" hangingPunct="1">
-        <a:defRPr sz="1800" kern="1200">
+      <a:lvl7pPr marL="2743200" algn="l" defTabSz="914400" rtl="0">
+        <a:defRPr sz="1800">
           <a:solidFill>
             <a:schemeClr val="tx1"/>
           </a:solidFill>
@@ -2930,8 +4246,8 @@
           <a:cs typeface="+mn-cs"/>
         </a:defRPr>
       </a:lvl7pPr>
-      <a:lvl8pPr marL="3200400" algn="l" defTabSz="914400" rtl="0" eaLnBrk="1" latinLnBrk="0" hangingPunct="1">
-        <a:defRPr sz="1800" kern="1200">
+      <a:lvl8pPr marL="3200400" algn="l" defTabSz="914400" rtl="0">
+        <a:defRPr sz="1800">
           <a:solidFill>
             <a:schemeClr val="tx1"/>
           </a:solidFill>
@@ -2940,8 +4256,8 @@
           <a:cs typeface="+mn-cs"/>
         </a:defRPr>
       </a:lvl8pPr>
-      <a:lvl9pPr marL="3657600" algn="l" defTabSz="914400" rtl="0" eaLnBrk="1" latinLnBrk="0" hangingPunct="1">
-        <a:defRPr sz="1800" kern="1200">
+      <a:lvl9pPr marL="3657600" algn="l" defTabSz="914400" rtl="0">
+        <a:defRPr sz="1800">
           <a:solidFill>
             <a:schemeClr val="tx1"/>
           </a:solidFill>
@@ -2956,15 +4272,15 @@
 </file>
 
 <file path=ppt/slides/slide1.xml><?xml version="1.0" encoding="utf-8"?>
-<p:sld xmlns:a="http://schemas.openxmlformats.org/drawingml/2006/main" xmlns:r="http://schemas.openxmlformats.org/officeDocument/2006/relationships" xmlns:p="http://schemas.openxmlformats.org/presentationml/2006/main">
-  <p:cSld>
+<p:sld xmlns:a="http://schemas.openxmlformats.org/drawingml/2006/main" xmlns:r="http://schemas.openxmlformats.org/officeDocument/2006/relationships" xmlns:p="http://schemas.openxmlformats.org/presentationml/2006/main" xmlns:m="http://schemas.openxmlformats.org/officeDocument/2006/math" xmlns:w="http://schemas.openxmlformats.org/wordprocessingml/2006/main" xmlns:mc="http://schemas.openxmlformats.org/markup-compatibility/2006" showMasterPhAnim="0" showMasterSp="1" show="1">
+  <p:cSld name="">
     <p:spTree>
       <p:nvGrpSpPr>
         <p:cNvPr id="1" name=""/>
         <p:cNvGrpSpPr/>
         <p:nvPr/>
       </p:nvGrpSpPr>
-      <p:grpSpPr>
+      <p:grpSpPr bwMode="auto">
         <a:xfrm>
           <a:off x="0" y="0"/>
           <a:ext cx="0" cy="0"/>
@@ -2974,7 +4290,7 @@
       </p:grpSpPr>
       <p:sp>
         <p:nvSpPr>
-          <p:cNvPr id="2" name="Title 1"/>
+          <p:cNvPr id="209007284" name="Title 1"/>
           <p:cNvSpPr>
             <a:spLocks noGrp="1"/>
           </p:cNvSpPr>
@@ -2982,67 +4298,54 @@
             <p:ph type="ctrTitle"/>
           </p:nvPr>
         </p:nvSpPr>
-        <p:spPr/>
-        <p:txBody>
-          <a:bodyPr/>
-          <a:lstStyle/>
-          <a:p>
-            <a:r>
-              <a:rPr lang="en-US" dirty="0" smtClean="0">
-                <a:latin typeface="Arial" panose="020B0604020202020204" pitchFamily="34" charset="0"/>
-                <a:cs typeface="Arial" panose="020B0604020202020204" pitchFamily="34" charset="0"/>
+        <p:spPr bwMode="auto"/>
+        <p:txBody>
+          <a:bodyPr/>
+          <a:lstStyle/>
+          <a:p>
+            <a:pPr>
+              <a:defRPr/>
+            </a:pPr>
+            <a:r>
+              <a:rPr lang="en-US">
+                <a:latin typeface="Arial"/>
+                <a:cs typeface="Arial"/>
               </a:rPr>
               <a:t>Passive Components</a:t>
             </a:r>
-            <a:endParaRPr lang="en-US" dirty="0">
-              <a:latin typeface="Arial" panose="020B0604020202020204" pitchFamily="34" charset="0"/>
-              <a:cs typeface="Arial" panose="020B0604020202020204" pitchFamily="34" charset="0"/>
+            <a:endParaRPr lang="en-US">
+              <a:latin typeface="Arial"/>
+              <a:cs typeface="Arial"/>
             </a:endParaRPr>
           </a:p>
         </p:txBody>
       </p:sp>
-      <p:sp>
-        <p:nvSpPr>
-          <p:cNvPr id="3" name="Subtitle 2"/>
-          <p:cNvSpPr>
-            <a:spLocks noGrp="1"/>
-          </p:cNvSpPr>
-          <p:nvPr>
-            <p:ph type="subTitle" idx="1"/>
-          </p:nvPr>
-        </p:nvSpPr>
-        <p:spPr/>
-        <p:txBody>
-          <a:bodyPr/>
-          <a:lstStyle/>
-          <a:p>
-            <a:endParaRPr lang="en-US"/>
-          </a:p>
-        </p:txBody>
-      </p:sp>
     </p:spTree>
-    <p:extLst>
-      <p:ext uri="{BB962C8B-B14F-4D97-AF65-F5344CB8AC3E}">
-        <p14:creationId xmlns:p14="http://schemas.microsoft.com/office/powerpoint/2010/main" val="3277977178"/>
-      </p:ext>
-    </p:extLst>
   </p:cSld>
   <p:clrMapOvr>
     <a:masterClrMapping/>
   </p:clrMapOvr>
+  <mc:AlternateContent xmlns:mc="http://schemas.openxmlformats.org/markup-compatibility/2006">
+    <mc:Choice xmlns:p159="http://schemas.microsoft.com/office/powerpoint/2015/09/main" xmlns:p14="http://schemas.microsoft.com/office/powerpoint/2010/main" Requires="p159">
+      <p:transition p14:dur="500" advClick="1"/>
+    </mc:Choice>
+    <mc:Fallback>
+      <p:transition advClick="1"/>
+    </mc:Fallback>
+  </mc:AlternateContent>
 </p:sld>
 </file>
 
 <file path=ppt/slides/slide2.xml><?xml version="1.0" encoding="utf-8"?>
-<p:sld xmlns:a="http://schemas.openxmlformats.org/drawingml/2006/main" xmlns:r="http://schemas.openxmlformats.org/officeDocument/2006/relationships" xmlns:p="http://schemas.openxmlformats.org/presentationml/2006/main">
-  <p:cSld>
+<p:sld xmlns:a="http://schemas.openxmlformats.org/drawingml/2006/main" xmlns:r="http://schemas.openxmlformats.org/officeDocument/2006/relationships" xmlns:p="http://schemas.openxmlformats.org/presentationml/2006/main" xmlns:m="http://schemas.openxmlformats.org/officeDocument/2006/math" xmlns:w="http://schemas.openxmlformats.org/wordprocessingml/2006/main" xmlns:mc="http://schemas.openxmlformats.org/markup-compatibility/2006" showMasterPhAnim="0" showMasterSp="1" show="1">
+  <p:cSld name="">
     <p:spTree>
       <p:nvGrpSpPr>
         <p:cNvPr id="1" name=""/>
         <p:cNvGrpSpPr/>
         <p:nvPr/>
       </p:nvGrpSpPr>
-      <p:grpSpPr>
+      <p:grpSpPr bwMode="auto">
         <a:xfrm>
           <a:off x="0" y="0"/>
           <a:ext cx="0" cy="0"/>
@@ -3052,26 +4355,7 @@
       </p:grpSpPr>
       <p:sp>
         <p:nvSpPr>
-          <p:cNvPr id="2" name="Title 1"/>
-          <p:cNvSpPr>
-            <a:spLocks noGrp="1"/>
-          </p:cNvSpPr>
-          <p:nvPr>
-            <p:ph type="title"/>
-          </p:nvPr>
-        </p:nvSpPr>
-        <p:spPr/>
-        <p:txBody>
-          <a:bodyPr/>
-          <a:lstStyle/>
-          <a:p>
-            <a:endParaRPr lang="en-US"/>
-          </a:p>
-        </p:txBody>
-      </p:sp>
-      <p:sp>
-        <p:nvSpPr>
-          <p:cNvPr id="3" name="Content Placeholder 2"/>
+          <p:cNvPr id="493910034" name="Content Placeholder 2"/>
           <p:cNvSpPr>
             <a:spLocks noGrp="1"/>
           </p:cNvSpPr>
@@ -3079,25 +4363,28 @@
             <p:ph idx="1"/>
           </p:nvPr>
         </p:nvSpPr>
-        <p:spPr/>
-        <p:txBody>
-          <a:bodyPr/>
-          <a:lstStyle/>
-          <a:p>
-            <a:r>
-              <a:rPr lang="en-US" dirty="0" smtClean="0"/>
+        <p:spPr bwMode="auto"/>
+        <p:txBody>
+          <a:bodyPr/>
+          <a:lstStyle/>
+          <a:p>
+            <a:pPr>
+              <a:defRPr/>
+            </a:pPr>
+            <a:r>
+              <a:rPr lang="en-US"/>
               <a:t>In an optical network, </a:t>
             </a:r>
             <a:r>
-              <a:rPr lang="en-US" b="1" dirty="0" smtClean="0"/>
+              <a:rPr lang="en-US" b="1"/>
               <a:t>Passive Components</a:t>
             </a:r>
             <a:r>
-              <a:rPr lang="en-US" dirty="0" smtClean="0"/>
+              <a:rPr lang="en-US"/>
               <a:t> are devices that </a:t>
             </a:r>
             <a:r>
-              <a:rPr lang="en-US" dirty="0" smtClean="0">
+              <a:rPr lang="en-US">
                 <a:solidFill>
                   <a:srgbClr val="FF0000"/>
                 </a:solidFill>
@@ -3105,24 +4392,28 @@
               <a:t>do not require electrical power to operate on the optical signal</a:t>
             </a:r>
             <a:r>
-              <a:rPr lang="en-US" dirty="0" smtClean="0"/>
+              <a:rPr lang="en-US"/>
               <a:t>. </a:t>
             </a:r>
-          </a:p>
-          <a:p>
-            <a:r>
-              <a:rPr lang="en-US" dirty="0" smtClean="0"/>
+            <a:endParaRPr/>
+          </a:p>
+          <a:p>
+            <a:pPr>
+              <a:defRPr/>
+            </a:pPr>
+            <a:r>
+              <a:rPr lang="en-US"/>
               <a:t>They function using the physical properties of light (</a:t>
             </a:r>
             <a:r>
-              <a:rPr lang="en-US" dirty="0" smtClean="0">
+              <a:rPr lang="en-US">
                 <a:solidFill>
                   <a:srgbClr val="FF0000"/>
                 </a:solidFill>
               </a:rPr>
               <a:t>reflection, refraction, interference, and absorption) to direct, filter, or modify the signal.</a:t>
             </a:r>
-            <a:endParaRPr lang="en-US" dirty="0">
+            <a:endParaRPr lang="en-US">
               <a:solidFill>
                 <a:srgbClr val="FF0000"/>
               </a:solidFill>
@@ -3131,28 +4422,31 @@
         </p:txBody>
       </p:sp>
     </p:spTree>
-    <p:extLst>
-      <p:ext uri="{BB962C8B-B14F-4D97-AF65-F5344CB8AC3E}">
-        <p14:creationId xmlns:p14="http://schemas.microsoft.com/office/powerpoint/2010/main" val="2688713050"/>
-      </p:ext>
-    </p:extLst>
   </p:cSld>
   <p:clrMapOvr>
     <a:masterClrMapping/>
   </p:clrMapOvr>
+  <mc:AlternateContent xmlns:mc="http://schemas.openxmlformats.org/markup-compatibility/2006">
+    <mc:Choice xmlns:p159="http://schemas.microsoft.com/office/powerpoint/2015/09/main" xmlns:p14="http://schemas.microsoft.com/office/powerpoint/2010/main" Requires="p159">
+      <p:transition p14:dur="500" advClick="1"/>
+    </mc:Choice>
+    <mc:Fallback>
+      <p:transition advClick="1"/>
+    </mc:Fallback>
+  </mc:AlternateContent>
 </p:sld>
 </file>
 
 <file path=ppt/slides/slide3.xml><?xml version="1.0" encoding="utf-8"?>
-<p:sld xmlns:a="http://schemas.openxmlformats.org/drawingml/2006/main" xmlns:r="http://schemas.openxmlformats.org/officeDocument/2006/relationships" xmlns:p="http://schemas.openxmlformats.org/presentationml/2006/main">
-  <p:cSld>
+<p:sld xmlns:a="http://schemas.openxmlformats.org/drawingml/2006/main" xmlns:r="http://schemas.openxmlformats.org/officeDocument/2006/relationships" xmlns:p="http://schemas.openxmlformats.org/presentationml/2006/main" xmlns:m="http://schemas.openxmlformats.org/officeDocument/2006/math" xmlns:w="http://schemas.openxmlformats.org/wordprocessingml/2006/main" xmlns:mc="http://schemas.openxmlformats.org/markup-compatibility/2006" showMasterPhAnim="0" showMasterSp="1" show="1">
+  <p:cSld name="">
     <p:spTree>
       <p:nvGrpSpPr>
         <p:cNvPr id="1" name=""/>
         <p:cNvGrpSpPr/>
         <p:nvPr/>
       </p:nvGrpSpPr>
-      <p:grpSpPr>
+      <p:grpSpPr bwMode="auto">
         <a:xfrm>
           <a:off x="0" y="0"/>
           <a:ext cx="0" cy="0"/>
@@ -3162,7 +4456,7 @@
       </p:grpSpPr>
       <p:sp>
         <p:nvSpPr>
-          <p:cNvPr id="2" name="Title 1"/>
+          <p:cNvPr id="174994294" name="Title 1"/>
           <p:cNvSpPr>
             <a:spLocks noGrp="1"/>
           </p:cNvSpPr>
@@ -3170,22 +4464,25 @@
             <p:ph type="title"/>
           </p:nvPr>
         </p:nvSpPr>
-        <p:spPr/>
-        <p:txBody>
-          <a:bodyPr/>
-          <a:lstStyle/>
-          <a:p>
-            <a:r>
-              <a:rPr lang="en-US" dirty="0" smtClean="0"/>
+        <p:spPr bwMode="auto"/>
+        <p:txBody>
+          <a:bodyPr/>
+          <a:lstStyle/>
+          <a:p>
+            <a:pPr>
+              <a:defRPr/>
+            </a:pPr>
+            <a:r>
+              <a:rPr lang="en-US"/>
               <a:t>Explanation of Passive Components</a:t>
             </a:r>
-            <a:endParaRPr lang="en-US" dirty="0"/>
-          </a:p>
-        </p:txBody>
-      </p:sp>
-      <p:sp>
-        <p:nvSpPr>
-          <p:cNvPr id="3" name="Content Placeholder 2"/>
+            <a:endParaRPr lang="en-US"/>
+          </a:p>
+        </p:txBody>
+      </p:sp>
+      <p:sp>
+        <p:nvSpPr>
+          <p:cNvPr id="1351587884" name="Content Placeholder 2"/>
           <p:cNvSpPr>
             <a:spLocks noGrp="1"/>
           </p:cNvSpPr>
@@ -3193,109 +4490,128 @@
             <p:ph idx="1"/>
           </p:nvPr>
         </p:nvSpPr>
-        <p:spPr/>
-        <p:txBody>
-          <a:bodyPr/>
-          <a:lstStyle/>
-          <a:p>
-            <a:r>
-              <a:rPr lang="en-US" b="1" dirty="0" smtClean="0"/>
+        <p:spPr bwMode="auto"/>
+        <p:txBody>
+          <a:bodyPr/>
+          <a:lstStyle/>
+          <a:p>
+            <a:pPr>
+              <a:defRPr/>
+            </a:pPr>
+            <a:r>
+              <a:rPr lang="en-US" b="1"/>
               <a:t>1. </a:t>
             </a:r>
             <a:r>
-              <a:rPr lang="en-US" sz="3600" b="1" dirty="0" smtClean="0"/>
+              <a:rPr lang="en-US" sz="3600" b="1"/>
               <a:t>Mux and </a:t>
             </a:r>
             <a:r>
-              <a:rPr lang="en-US" sz="3600" b="1" dirty="0" err="1" smtClean="0"/>
+              <a:rPr lang="en-US" sz="3600" b="1"/>
               <a:t>Demux</a:t>
             </a:r>
             <a:r>
-              <a:rPr lang="en-US" sz="3600" b="1" dirty="0" smtClean="0"/>
+              <a:rPr lang="en-US" sz="3600" b="1"/>
               <a:t> (Multiplexer and </a:t>
             </a:r>
             <a:r>
-              <a:rPr lang="en-US" sz="3600" b="1" dirty="0" err="1" smtClean="0"/>
+              <a:rPr lang="en-US" sz="3600" b="1"/>
               <a:t>Demultiplexer</a:t>
             </a:r>
             <a:r>
-              <a:rPr lang="en-US" sz="3600" b="1" dirty="0" smtClean="0"/>
+              <a:rPr lang="en-US" sz="3600" b="1"/>
               <a:t>)</a:t>
             </a:r>
-          </a:p>
-          <a:p>
-            <a:pPr lvl="1"/>
-            <a:r>
-              <a:rPr lang="en-US" sz="3200" b="1" dirty="0" smtClean="0"/>
+            <a:endParaRPr/>
+          </a:p>
+          <a:p>
+            <a:pPr lvl="1">
+              <a:defRPr/>
+            </a:pPr>
+            <a:r>
+              <a:rPr lang="en-US" sz="3200" b="1"/>
               <a:t>Explanation:</a:t>
             </a:r>
             <a:r>
-              <a:rPr lang="en-US" sz="3200" dirty="0" smtClean="0"/>
+              <a:rPr lang="en-US" sz="3200"/>
               <a:t> A </a:t>
             </a:r>
             <a:r>
-              <a:rPr lang="en-US" sz="3200" b="1" dirty="0" smtClean="0"/>
+              <a:rPr lang="en-US" sz="3200" b="1"/>
               <a:t>Mux</a:t>
             </a:r>
             <a:r>
-              <a:rPr lang="en-US" sz="3200" dirty="0" smtClean="0"/>
+              <a:rPr lang="en-US" sz="3200"/>
               <a:t> combines multiple light signals of different wavelengths into a single fiber. </a:t>
             </a:r>
-          </a:p>
-          <a:p>
-            <a:pPr lvl="1"/>
-            <a:r>
-              <a:rPr lang="en-US" sz="3200" dirty="0" smtClean="0"/>
+            <a:endParaRPr/>
+          </a:p>
+          <a:p>
+            <a:pPr lvl="1">
+              <a:defRPr/>
+            </a:pPr>
+            <a:r>
+              <a:rPr lang="en-US" sz="3200"/>
               <a:t>A </a:t>
             </a:r>
             <a:r>
-              <a:rPr lang="en-US" sz="3200" b="1" dirty="0" err="1" smtClean="0"/>
+              <a:rPr lang="en-US" sz="3200" b="1"/>
               <a:t>Demux</a:t>
             </a:r>
             <a:r>
-              <a:rPr lang="en-US" sz="3200" dirty="0" smtClean="0"/>
+              <a:rPr lang="en-US" sz="3200"/>
               <a:t> does the opposite, splitting the combined signal back into individual wavelengths at the receiving end.</a:t>
             </a:r>
-          </a:p>
-          <a:p>
-            <a:pPr lvl="1"/>
-            <a:r>
-              <a:rPr lang="en-US" sz="3200" b="1" dirty="0" smtClean="0"/>
+            <a:endParaRPr/>
+          </a:p>
+          <a:p>
+            <a:pPr lvl="1">
+              <a:defRPr/>
+            </a:pPr>
+            <a:r>
+              <a:rPr lang="en-US" sz="3200" b="1"/>
               <a:t>Example:</a:t>
             </a:r>
             <a:r>
-              <a:rPr lang="en-US" sz="3200" dirty="0" smtClean="0"/>
+              <a:rPr lang="en-US" sz="3200"/>
               <a:t> Like a highway on-ramp where cars from different streets merge into one large highway, and an off-ramp where they split off to their specific destinations.</a:t>
             </a:r>
-          </a:p>
-          <a:p>
-            <a:endParaRPr lang="en-US" sz="3600" dirty="0"/>
+            <a:endParaRPr/>
+          </a:p>
+          <a:p>
+            <a:pPr>
+              <a:defRPr/>
+            </a:pPr>
+            <a:endParaRPr lang="en-US" sz="3600"/>
           </a:p>
         </p:txBody>
       </p:sp>
     </p:spTree>
-    <p:extLst>
-      <p:ext uri="{BB962C8B-B14F-4D97-AF65-F5344CB8AC3E}">
-        <p14:creationId xmlns:p14="http://schemas.microsoft.com/office/powerpoint/2010/main" val="99163929"/>
-      </p:ext>
-    </p:extLst>
   </p:cSld>
   <p:clrMapOvr>
     <a:masterClrMapping/>
   </p:clrMapOvr>
+  <mc:AlternateContent xmlns:mc="http://schemas.openxmlformats.org/markup-compatibility/2006">
+    <mc:Choice xmlns:p159="http://schemas.microsoft.com/office/powerpoint/2015/09/main" xmlns:p14="http://schemas.microsoft.com/office/powerpoint/2010/main" Requires="p159">
+      <p:transition p14:dur="500" advClick="1"/>
+    </mc:Choice>
+    <mc:Fallback>
+      <p:transition advClick="1"/>
+    </mc:Fallback>
+  </mc:AlternateContent>
 </p:sld>
 </file>
 
 <file path=ppt/slides/slide4.xml><?xml version="1.0" encoding="utf-8"?>
-<p:sld xmlns:a="http://schemas.openxmlformats.org/drawingml/2006/main" xmlns:r="http://schemas.openxmlformats.org/officeDocument/2006/relationships" xmlns:p="http://schemas.openxmlformats.org/presentationml/2006/main">
-  <p:cSld>
+<p:sld xmlns:a="http://schemas.openxmlformats.org/drawingml/2006/main" xmlns:r="http://schemas.openxmlformats.org/officeDocument/2006/relationships" xmlns:p="http://schemas.openxmlformats.org/presentationml/2006/main" xmlns:m="http://schemas.openxmlformats.org/officeDocument/2006/math" xmlns:w="http://schemas.openxmlformats.org/wordprocessingml/2006/main" xmlns:mc="http://schemas.openxmlformats.org/markup-compatibility/2006" showMasterPhAnim="0" showMasterSp="1" show="1">
+  <p:cSld name="">
     <p:spTree>
       <p:nvGrpSpPr>
         <p:cNvPr id="1" name=""/>
         <p:cNvGrpSpPr/>
         <p:nvPr/>
       </p:nvGrpSpPr>
-      <p:grpSpPr>
+      <p:grpSpPr bwMode="auto">
         <a:xfrm>
           <a:off x="0" y="0"/>
           <a:ext cx="0" cy="0"/>
@@ -3305,7 +4621,7 @@
       </p:grpSpPr>
       <p:sp>
         <p:nvSpPr>
-          <p:cNvPr id="2" name="Title 1"/>
+          <p:cNvPr id="209912535" name="Title 1"/>
           <p:cNvSpPr>
             <a:spLocks noGrp="1"/>
           </p:cNvSpPr>
@@ -3313,22 +4629,25 @@
             <p:ph type="title"/>
           </p:nvPr>
         </p:nvSpPr>
-        <p:spPr/>
-        <p:txBody>
-          <a:bodyPr/>
-          <a:lstStyle/>
-          <a:p>
-            <a:r>
-              <a:rPr lang="en-US" dirty="0" smtClean="0"/>
+        <p:spPr bwMode="auto"/>
+        <p:txBody>
+          <a:bodyPr/>
+          <a:lstStyle/>
+          <a:p>
+            <a:pPr>
+              <a:defRPr/>
+            </a:pPr>
+            <a:r>
+              <a:rPr lang="en-US"/>
               <a:t>Explanation of Passive Components</a:t>
             </a:r>
-            <a:endParaRPr lang="en-US" dirty="0"/>
-          </a:p>
-        </p:txBody>
-      </p:sp>
-      <p:sp>
-        <p:nvSpPr>
-          <p:cNvPr id="3" name="Content Placeholder 2"/>
+            <a:endParaRPr lang="en-US"/>
+          </a:p>
+        </p:txBody>
+      </p:sp>
+      <p:sp>
+        <p:nvSpPr>
+          <p:cNvPr id="586056642" name="Content Placeholder 2"/>
           <p:cNvSpPr>
             <a:spLocks noGrp="1"/>
           </p:cNvSpPr>
@@ -3336,30 +4655,36 @@
             <p:ph idx="1"/>
           </p:nvPr>
         </p:nvSpPr>
-        <p:spPr/>
+        <p:spPr bwMode="auto"/>
         <p:txBody>
           <a:bodyPr>
             <a:normAutofit fontScale="77500" lnSpcReduction="20000"/>
           </a:bodyPr>
           <a:lstStyle/>
           <a:p>
-            <a:r>
-              <a:rPr lang="en-US" sz="4000" b="1" dirty="0" smtClean="0"/>
+            <a:pPr>
+              <a:defRPr/>
+            </a:pPr>
+            <a:r>
+              <a:rPr lang="en-US" sz="4000" b="1"/>
               <a:t>2. Optical Switches</a:t>
             </a:r>
-          </a:p>
-          <a:p>
-            <a:pPr lvl="1"/>
-            <a:r>
-              <a:rPr lang="en-US" sz="3400" b="1" dirty="0" smtClean="0"/>
+            <a:endParaRPr/>
+          </a:p>
+          <a:p>
+            <a:pPr lvl="1">
+              <a:defRPr/>
+            </a:pPr>
+            <a:r>
+              <a:rPr lang="en-US" sz="3400" b="1"/>
               <a:t>Explanation:</a:t>
             </a:r>
             <a:r>
-              <a:rPr lang="en-US" sz="3400" dirty="0" smtClean="0"/>
+              <a:rPr lang="en-US" sz="3400"/>
               <a:t> These route </a:t>
             </a:r>
             <a:r>
-              <a:rPr lang="en-US" sz="3400" dirty="0" smtClean="0">
+              <a:rPr lang="en-US" sz="3400">
                 <a:solidFill>
                   <a:srgbClr val="FF0000"/>
                 </a:solidFill>
@@ -3367,39 +4692,49 @@
               <a:t>an optical signal from one input fiber to one of several output fibers without converting the light to electricity</a:t>
             </a:r>
             <a:r>
-              <a:rPr lang="en-US" sz="3400" dirty="0" smtClean="0"/>
+              <a:rPr lang="en-US" sz="3400"/>
               <a:t>.</a:t>
             </a:r>
-          </a:p>
-          <a:p>
-            <a:pPr lvl="1"/>
-            <a:r>
-              <a:rPr lang="en-US" sz="3400" b="1" dirty="0" smtClean="0"/>
+            <a:endParaRPr/>
+          </a:p>
+          <a:p>
+            <a:pPr lvl="1">
+              <a:defRPr/>
+            </a:pPr>
+            <a:r>
+              <a:rPr lang="en-US" sz="3400" b="1"/>
               <a:t>Example:</a:t>
             </a:r>
             <a:r>
-              <a:rPr lang="en-US" sz="3400" dirty="0" smtClean="0"/>
+              <a:rPr lang="en-US" sz="3400"/>
               <a:t> A railroad switch that moves the tracks to guide a train onto a different path.</a:t>
             </a:r>
-          </a:p>
-          <a:p>
-            <a:r>
-              <a:rPr lang="en-US" sz="4000" b="1" dirty="0" smtClean="0"/>
+            <a:endParaRPr/>
+          </a:p>
+          <a:p>
+            <a:pPr>
+              <a:defRPr/>
+            </a:pPr>
+            <a:r>
+              <a:rPr lang="en-US" sz="4000" b="1"/>
               <a:t>3. Wavelength Converter</a:t>
             </a:r>
-          </a:p>
-          <a:p>
-            <a:pPr lvl="1"/>
-            <a:r>
-              <a:rPr lang="en-US" sz="3400" b="1" dirty="0" smtClean="0"/>
+            <a:endParaRPr/>
+          </a:p>
+          <a:p>
+            <a:pPr lvl="1">
+              <a:defRPr/>
+            </a:pPr>
+            <a:r>
+              <a:rPr lang="en-US" sz="3400" b="1"/>
               <a:t>Explanation:</a:t>
             </a:r>
             <a:r>
-              <a:rPr lang="en-US" sz="3400" dirty="0" smtClean="0"/>
+              <a:rPr lang="en-US" sz="3400"/>
               <a:t> A device that </a:t>
             </a:r>
             <a:r>
-              <a:rPr lang="en-US" sz="3400" dirty="0" smtClean="0">
+              <a:rPr lang="en-US" sz="3400">
                 <a:solidFill>
                   <a:srgbClr val="FF0000"/>
                 </a:solidFill>
@@ -3407,57 +4742,67 @@
               <a:t>changes the wavelength of an incoming signal to a different wavelength for the outgoing signal to avoid "wavelength contention"</a:t>
             </a:r>
             <a:r>
-              <a:rPr lang="en-US" sz="3400" dirty="0" smtClean="0"/>
+              <a:rPr lang="en-US" sz="3400"/>
               <a:t> (</a:t>
             </a:r>
             <a:r>
-              <a:rPr lang="en-US" sz="3400" dirty="0" smtClean="0">
+              <a:rPr lang="en-US" sz="3400">
                 <a:solidFill>
                   <a:schemeClr val="accent6"/>
                 </a:solidFill>
               </a:rPr>
               <a:t>two signals trying to use the same "lane").</a:t>
             </a:r>
-          </a:p>
-          <a:p>
-            <a:pPr lvl="1"/>
-            <a:r>
-              <a:rPr lang="en-US" sz="3400" b="1" dirty="0" smtClean="0"/>
+            <a:endParaRPr/>
+          </a:p>
+          <a:p>
+            <a:pPr lvl="1">
+              <a:defRPr/>
+            </a:pPr>
+            <a:r>
+              <a:rPr lang="en-US" sz="3400" b="1"/>
               <a:t>Example:</a:t>
             </a:r>
             <a:r>
-              <a:rPr lang="en-US" sz="3400" dirty="0" smtClean="0"/>
+              <a:rPr lang="en-US" sz="3400"/>
               <a:t> Painting a car a different color so it can enter a lane reserved for that specific color.</a:t>
             </a:r>
-          </a:p>
-          <a:p>
-            <a:endParaRPr lang="en-US" sz="3600" dirty="0"/>
+            <a:endParaRPr/>
+          </a:p>
+          <a:p>
+            <a:pPr>
+              <a:defRPr/>
+            </a:pPr>
+            <a:endParaRPr lang="en-US" sz="3600"/>
           </a:p>
         </p:txBody>
       </p:sp>
     </p:spTree>
-    <p:extLst>
-      <p:ext uri="{BB962C8B-B14F-4D97-AF65-F5344CB8AC3E}">
-        <p14:creationId xmlns:p14="http://schemas.microsoft.com/office/powerpoint/2010/main" val="1520828441"/>
-      </p:ext>
-    </p:extLst>
   </p:cSld>
   <p:clrMapOvr>
     <a:masterClrMapping/>
   </p:clrMapOvr>
+  <mc:AlternateContent xmlns:mc="http://schemas.openxmlformats.org/markup-compatibility/2006">
+    <mc:Choice xmlns:p159="http://schemas.microsoft.com/office/powerpoint/2015/09/main" xmlns:p14="http://schemas.microsoft.com/office/powerpoint/2010/main" Requires="p159">
+      <p:transition p14:dur="500" advClick="1"/>
+    </mc:Choice>
+    <mc:Fallback>
+      <p:transition advClick="1"/>
+    </mc:Fallback>
+  </mc:AlternateContent>
 </p:sld>
 </file>
 
 <file path=ppt/slides/slide5.xml><?xml version="1.0" encoding="utf-8"?>
-<p:sld xmlns:a="http://schemas.openxmlformats.org/drawingml/2006/main" xmlns:r="http://schemas.openxmlformats.org/officeDocument/2006/relationships" xmlns:p="http://schemas.openxmlformats.org/presentationml/2006/main">
-  <p:cSld>
+<p:sld xmlns:a="http://schemas.openxmlformats.org/drawingml/2006/main" xmlns:r="http://schemas.openxmlformats.org/officeDocument/2006/relationships" xmlns:p="http://schemas.openxmlformats.org/presentationml/2006/main" xmlns:m="http://schemas.openxmlformats.org/officeDocument/2006/math" xmlns:w="http://schemas.openxmlformats.org/wordprocessingml/2006/main" xmlns:mc="http://schemas.openxmlformats.org/markup-compatibility/2006" showMasterPhAnim="0" showMasterSp="1" show="1">
+  <p:cSld name="">
     <p:spTree>
       <p:nvGrpSpPr>
         <p:cNvPr id="1" name=""/>
         <p:cNvGrpSpPr/>
         <p:nvPr/>
       </p:nvGrpSpPr>
-      <p:grpSpPr>
+      <p:grpSpPr bwMode="auto">
         <a:xfrm>
           <a:off x="0" y="0"/>
           <a:ext cx="0" cy="0"/>
@@ -3467,7 +4812,7 @@
       </p:grpSpPr>
       <p:sp>
         <p:nvSpPr>
-          <p:cNvPr id="2" name="Title 1"/>
+          <p:cNvPr id="1988482974" name="Title 1"/>
           <p:cNvSpPr>
             <a:spLocks noGrp="1"/>
           </p:cNvSpPr>
@@ -3475,22 +4820,25 @@
             <p:ph type="title"/>
           </p:nvPr>
         </p:nvSpPr>
-        <p:spPr/>
-        <p:txBody>
-          <a:bodyPr/>
-          <a:lstStyle/>
-          <a:p>
-            <a:r>
-              <a:rPr lang="en-US" dirty="0" smtClean="0"/>
+        <p:spPr bwMode="auto"/>
+        <p:txBody>
+          <a:bodyPr/>
+          <a:lstStyle/>
+          <a:p>
+            <a:pPr>
+              <a:defRPr/>
+            </a:pPr>
+            <a:r>
+              <a:rPr lang="en-US"/>
               <a:t>Explanation of Passive Components</a:t>
             </a:r>
-            <a:endParaRPr lang="en-US" dirty="0"/>
-          </a:p>
-        </p:txBody>
-      </p:sp>
-      <p:sp>
-        <p:nvSpPr>
-          <p:cNvPr id="3" name="Content Placeholder 2"/>
+            <a:endParaRPr lang="en-US"/>
+          </a:p>
+        </p:txBody>
+      </p:sp>
+      <p:sp>
+        <p:nvSpPr>
+          <p:cNvPr id="1753370840" name="Content Placeholder 2"/>
           <p:cNvSpPr>
             <a:spLocks noGrp="1"/>
           </p:cNvSpPr>
@@ -3498,30 +4846,36 @@
             <p:ph idx="1"/>
           </p:nvPr>
         </p:nvSpPr>
-        <p:spPr/>
+        <p:spPr bwMode="auto"/>
         <p:txBody>
           <a:bodyPr>
             <a:normAutofit fontScale="92500" lnSpcReduction="10000"/>
           </a:bodyPr>
           <a:lstStyle/>
           <a:p>
-            <a:r>
-              <a:rPr lang="en-US" b="1" dirty="0" smtClean="0"/>
+            <a:pPr>
+              <a:defRPr/>
+            </a:pPr>
+            <a:r>
+              <a:rPr lang="en-US" b="1"/>
               <a:t>4. Couplers</a:t>
             </a:r>
-          </a:p>
-          <a:p>
-            <a:pPr lvl="1"/>
-            <a:r>
-              <a:rPr lang="en-US" b="1" dirty="0" smtClean="0"/>
+            <a:endParaRPr/>
+          </a:p>
+          <a:p>
+            <a:pPr lvl="1">
+              <a:defRPr/>
+            </a:pPr>
+            <a:r>
+              <a:rPr lang="en-US" b="1"/>
               <a:t>Explanation:</a:t>
             </a:r>
             <a:r>
-              <a:rPr lang="en-US" dirty="0" smtClean="0"/>
+              <a:rPr lang="en-US"/>
               <a:t> These </a:t>
             </a:r>
             <a:r>
-              <a:rPr lang="en-US" dirty="0" smtClean="0">
+              <a:rPr lang="en-US">
                 <a:solidFill>
                   <a:srgbClr val="FF0000"/>
                 </a:solidFill>
@@ -3529,11 +4883,11 @@
               <a:t>split a single optical signal into two or more fibers</a:t>
             </a:r>
             <a:r>
-              <a:rPr lang="en-US" dirty="0" smtClean="0"/>
+              <a:rPr lang="en-US"/>
               <a:t>, </a:t>
             </a:r>
             <a:r>
-              <a:rPr lang="en-US" dirty="0" smtClean="0">
+              <a:rPr lang="en-US">
                 <a:solidFill>
                   <a:schemeClr val="accent6"/>
                 </a:solidFill>
@@ -3541,65 +4895,81 @@
               <a:t>or combine multiple signals into one</a:t>
             </a:r>
             <a:r>
-              <a:rPr lang="en-US" dirty="0" smtClean="0"/>
+              <a:rPr lang="en-US"/>
               <a:t>. </a:t>
             </a:r>
-          </a:p>
-          <a:p>
-            <a:pPr lvl="1"/>
-            <a:r>
-              <a:rPr lang="en-US" dirty="0" smtClean="0"/>
+            <a:endParaRPr/>
+          </a:p>
+          <a:p>
+            <a:pPr lvl="1">
+              <a:defRPr/>
+            </a:pPr>
+            <a:r>
+              <a:rPr lang="en-US"/>
               <a:t>A common type is a </a:t>
             </a:r>
             <a:r>
-              <a:rPr lang="en-US" b="1" dirty="0" smtClean="0"/>
+              <a:rPr lang="en-US" b="1"/>
               <a:t>3dB coupler</a:t>
             </a:r>
             <a:r>
-              <a:rPr lang="en-US" dirty="0" smtClean="0"/>
+              <a:rPr lang="en-US"/>
               <a:t>, which splits power exactly 50/50.</a:t>
             </a:r>
-          </a:p>
-          <a:p>
-            <a:pPr lvl="1"/>
-            <a:r>
-              <a:rPr lang="en-US" b="1" dirty="0" smtClean="0"/>
+            <a:endParaRPr/>
+          </a:p>
+          <a:p>
+            <a:pPr lvl="1">
+              <a:defRPr/>
+            </a:pPr>
+            <a:r>
+              <a:rPr lang="en-US" b="1"/>
               <a:t>Example:</a:t>
             </a:r>
             <a:r>
-              <a:rPr lang="en-US" dirty="0" smtClean="0"/>
+              <a:rPr lang="en-US"/>
               <a:t> A Y-shaped water pipe that splits one stream into two.</a:t>
             </a:r>
-          </a:p>
-          <a:p>
-            <a:r>
-              <a:rPr lang="en-US" b="1" dirty="0" smtClean="0"/>
+            <a:endParaRPr/>
+          </a:p>
+          <a:p>
+            <a:pPr>
+              <a:defRPr/>
+            </a:pPr>
+            <a:r>
+              <a:rPr lang="en-US" b="1"/>
               <a:t>5. Circulators and Isolators</a:t>
             </a:r>
-          </a:p>
-          <a:p>
-            <a:pPr lvl="1"/>
-            <a:r>
-              <a:rPr lang="en-US" b="1" dirty="0" smtClean="0"/>
+            <a:endParaRPr/>
+          </a:p>
+          <a:p>
+            <a:pPr lvl="1">
+              <a:defRPr/>
+            </a:pPr>
+            <a:r>
+              <a:rPr lang="en-US" b="1"/>
               <a:t>Explanation:</a:t>
             </a:r>
             <a:r>
-              <a:rPr lang="en-US" dirty="0" smtClean="0"/>
+              <a:rPr lang="en-US"/>
               <a:t> </a:t>
             </a:r>
-          </a:p>
-          <a:p>
-            <a:pPr lvl="1"/>
-            <a:r>
-              <a:rPr lang="en-US" b="1" dirty="0" smtClean="0"/>
+            <a:endParaRPr/>
+          </a:p>
+          <a:p>
+            <a:pPr lvl="1">
+              <a:defRPr/>
+            </a:pPr>
+            <a:r>
+              <a:rPr lang="en-US" b="1"/>
               <a:t>Isolator:</a:t>
             </a:r>
             <a:r>
-              <a:rPr lang="en-US" dirty="0" smtClean="0"/>
+              <a:rPr lang="en-US"/>
               <a:t> </a:t>
             </a:r>
             <a:r>
-              <a:rPr lang="en-US" dirty="0" smtClean="0">
+              <a:rPr lang="en-US">
                 <a:solidFill>
                   <a:schemeClr val="accent6"/>
                 </a:solidFill>
@@ -3607,7 +4977,7 @@
               <a:t>Allows light to travel in only </a:t>
             </a:r>
             <a:r>
-              <a:rPr lang="en-US" b="1" dirty="0" smtClean="0">
+              <a:rPr lang="en-US" b="1">
                 <a:solidFill>
                   <a:schemeClr val="accent6"/>
                 </a:solidFill>
@@ -3615,64 +4985,77 @@
               <a:t>one direction</a:t>
             </a:r>
             <a:r>
-              <a:rPr lang="en-US" dirty="0" smtClean="0">
+              <a:rPr lang="en-US">
                 <a:solidFill>
                   <a:schemeClr val="accent6"/>
                 </a:solidFill>
               </a:rPr>
               <a:t>, preventing reflections from damaging the laser.</a:t>
             </a:r>
-          </a:p>
-          <a:p>
-            <a:pPr lvl="1"/>
-            <a:r>
-              <a:rPr lang="en-US" b="1" dirty="0" smtClean="0"/>
+            <a:endParaRPr/>
+          </a:p>
+          <a:p>
+            <a:pPr lvl="1">
+              <a:defRPr/>
+            </a:pPr>
+            <a:r>
+              <a:rPr lang="en-US" b="1"/>
               <a:t>Circulator:</a:t>
             </a:r>
             <a:r>
-              <a:rPr lang="en-US" dirty="0" smtClean="0"/>
+              <a:rPr lang="en-US"/>
               <a:t> A multi-port device where light entering Port 1 exits Port 2, and light entering Port 2 exits Port 3.</a:t>
             </a:r>
-          </a:p>
-          <a:p>
-            <a:pPr lvl="1"/>
-            <a:r>
-              <a:rPr lang="en-US" b="1" dirty="0" smtClean="0"/>
+            <a:endParaRPr/>
+          </a:p>
+          <a:p>
+            <a:pPr lvl="1">
+              <a:defRPr/>
+            </a:pPr>
+            <a:r>
+              <a:rPr lang="en-US" b="1"/>
               <a:t>Example:</a:t>
             </a:r>
             <a:r>
-              <a:rPr lang="en-US" dirty="0" smtClean="0"/>
+              <a:rPr lang="en-US"/>
               <a:t> An Isolator is like a one-way street. A Circulator is like a traffic roundabout.</a:t>
             </a:r>
-          </a:p>
-          <a:p>
-            <a:endParaRPr lang="en-US" sz="3600" dirty="0"/>
+            <a:endParaRPr/>
+          </a:p>
+          <a:p>
+            <a:pPr>
+              <a:defRPr/>
+            </a:pPr>
+            <a:endParaRPr lang="en-US" sz="3600"/>
           </a:p>
         </p:txBody>
       </p:sp>
     </p:spTree>
-    <p:extLst>
-      <p:ext uri="{BB962C8B-B14F-4D97-AF65-F5344CB8AC3E}">
-        <p14:creationId xmlns:p14="http://schemas.microsoft.com/office/powerpoint/2010/main" val="71806542"/>
-      </p:ext>
-    </p:extLst>
   </p:cSld>
   <p:clrMapOvr>
     <a:masterClrMapping/>
   </p:clrMapOvr>
+  <mc:AlternateContent xmlns:mc="http://schemas.openxmlformats.org/markup-compatibility/2006">
+    <mc:Choice xmlns:p159="http://schemas.microsoft.com/office/powerpoint/2015/09/main" xmlns:p14="http://schemas.microsoft.com/office/powerpoint/2010/main" Requires="p159">
+      <p:transition p14:dur="500" advClick="1"/>
+    </mc:Choice>
+    <mc:Fallback>
+      <p:transition advClick="1"/>
+    </mc:Fallback>
+  </mc:AlternateContent>
 </p:sld>
 </file>
 
 <file path=ppt/slides/slide6.xml><?xml version="1.0" encoding="utf-8"?>
-<p:sld xmlns:a="http://schemas.openxmlformats.org/drawingml/2006/main" xmlns:r="http://schemas.openxmlformats.org/officeDocument/2006/relationships" xmlns:p="http://schemas.openxmlformats.org/presentationml/2006/main">
-  <p:cSld>
+<p:sld xmlns:a="http://schemas.openxmlformats.org/drawingml/2006/main" xmlns:r="http://schemas.openxmlformats.org/officeDocument/2006/relationships" xmlns:p="http://schemas.openxmlformats.org/presentationml/2006/main" xmlns:m="http://schemas.openxmlformats.org/officeDocument/2006/math" xmlns:w="http://schemas.openxmlformats.org/wordprocessingml/2006/main" xmlns:mc="http://schemas.openxmlformats.org/markup-compatibility/2006" showMasterPhAnim="0" showMasterSp="1" show="1">
+  <p:cSld name="">
     <p:spTree>
       <p:nvGrpSpPr>
         <p:cNvPr id="1" name=""/>
         <p:cNvGrpSpPr/>
         <p:nvPr/>
       </p:nvGrpSpPr>
-      <p:grpSpPr>
+      <p:grpSpPr bwMode="auto">
         <a:xfrm>
           <a:off x="0" y="0"/>
           <a:ext cx="0" cy="0"/>
@@ -3682,7 +5065,7 @@
       </p:grpSpPr>
       <p:sp>
         <p:nvSpPr>
-          <p:cNvPr id="2" name="Title 1"/>
+          <p:cNvPr id="728396350" name="Title 1"/>
           <p:cNvSpPr>
             <a:spLocks noGrp="1"/>
           </p:cNvSpPr>
@@ -3690,22 +5073,25 @@
             <p:ph type="title"/>
           </p:nvPr>
         </p:nvSpPr>
-        <p:spPr/>
-        <p:txBody>
-          <a:bodyPr/>
-          <a:lstStyle/>
-          <a:p>
-            <a:r>
-              <a:rPr lang="en-US" dirty="0" smtClean="0"/>
+        <p:spPr bwMode="auto"/>
+        <p:txBody>
+          <a:bodyPr/>
+          <a:lstStyle/>
+          <a:p>
+            <a:pPr>
+              <a:defRPr/>
+            </a:pPr>
+            <a:r>
+              <a:rPr lang="en-US"/>
               <a:t>Explanation of Passive Components</a:t>
             </a:r>
-            <a:endParaRPr lang="en-US" dirty="0"/>
-          </a:p>
-        </p:txBody>
-      </p:sp>
-      <p:sp>
-        <p:nvSpPr>
-          <p:cNvPr id="3" name="Content Placeholder 2"/>
+            <a:endParaRPr lang="en-US"/>
+          </a:p>
+        </p:txBody>
+      </p:sp>
+      <p:sp>
+        <p:nvSpPr>
+          <p:cNvPr id="681184285" name="Content Placeholder 2"/>
           <p:cNvSpPr>
             <a:spLocks noGrp="1"/>
           </p:cNvSpPr>
@@ -3713,30 +5099,36 @@
             <p:ph idx="1"/>
           </p:nvPr>
         </p:nvSpPr>
-        <p:spPr/>
+        <p:spPr bwMode="auto"/>
         <p:txBody>
           <a:bodyPr>
             <a:normAutofit/>
           </a:bodyPr>
           <a:lstStyle/>
           <a:p>
-            <a:r>
-              <a:rPr lang="en-US" b="1" dirty="0" smtClean="0"/>
+            <a:pPr>
+              <a:defRPr/>
+            </a:pPr>
+            <a:r>
+              <a:rPr lang="en-US" b="1"/>
               <a:t>6. Attenuator</a:t>
             </a:r>
-          </a:p>
-          <a:p>
-            <a:pPr lvl="1"/>
-            <a:r>
-              <a:rPr lang="en-US" b="1" dirty="0" smtClean="0"/>
+            <a:endParaRPr/>
+          </a:p>
+          <a:p>
+            <a:pPr lvl="1">
+              <a:defRPr/>
+            </a:pPr>
+            <a:r>
+              <a:rPr lang="en-US" b="1"/>
               <a:t>Explanation:</a:t>
             </a:r>
             <a:r>
-              <a:rPr lang="en-US" dirty="0" smtClean="0"/>
+              <a:rPr lang="en-US"/>
               <a:t> A device used </a:t>
             </a:r>
             <a:r>
-              <a:rPr lang="en-US" dirty="0" smtClean="0">
+              <a:rPr lang="en-US">
                 <a:solidFill>
                   <a:schemeClr val="accent6"/>
                 </a:solidFill>
@@ -3744,7 +5136,7 @@
               <a:t>to </a:t>
             </a:r>
             <a:r>
-              <a:rPr lang="en-US" b="1" dirty="0" smtClean="0">
+              <a:rPr lang="en-US" b="1">
                 <a:solidFill>
                   <a:schemeClr val="accent6"/>
                 </a:solidFill>
@@ -3752,7 +5144,7 @@
               <a:t>reduce the power level</a:t>
             </a:r>
             <a:r>
-              <a:rPr lang="en-US" dirty="0" smtClean="0">
+              <a:rPr lang="en-US">
                 <a:solidFill>
                   <a:schemeClr val="accent6"/>
                 </a:solidFill>
@@ -3760,22 +5152,25 @@
               <a:t> of an optical signal if it is too strong for the receiver </a:t>
             </a:r>
             <a:r>
-              <a:rPr lang="en-US" dirty="0" smtClean="0"/>
+              <a:rPr lang="en-US"/>
               <a:t>(which could cause distortion or damage).</a:t>
             </a:r>
-          </a:p>
-          <a:p>
-            <a:pPr lvl="1"/>
-            <a:r>
-              <a:rPr lang="en-US" b="1" dirty="0" smtClean="0"/>
+            <a:endParaRPr/>
+          </a:p>
+          <a:p>
+            <a:pPr lvl="1">
+              <a:defRPr/>
+            </a:pPr>
+            <a:r>
+              <a:rPr lang="en-US" b="1"/>
               <a:t>Example:</a:t>
             </a:r>
             <a:r>
-              <a:rPr lang="en-US" dirty="0" smtClean="0"/>
+              <a:rPr lang="en-US"/>
               <a:t> </a:t>
             </a:r>
             <a:r>
-              <a:rPr lang="en-US" dirty="0" smtClean="0">
+              <a:rPr lang="en-US">
                 <a:solidFill>
                   <a:schemeClr val="accent6"/>
                 </a:solidFill>
@@ -3783,28 +5178,35 @@
               <a:t>Wearing sunglasses to reduce the intensity of bright sunlight </a:t>
             </a:r>
             <a:r>
-              <a:rPr lang="en-US" dirty="0" smtClean="0"/>
+              <a:rPr lang="en-US"/>
               <a:t>so you can see clearly.</a:t>
             </a:r>
-          </a:p>
-          <a:p>
-            <a:r>
-              <a:rPr lang="en-US" b="1" dirty="0" smtClean="0"/>
+            <a:endParaRPr/>
+          </a:p>
+          <a:p>
+            <a:pPr>
+              <a:defRPr/>
+            </a:pPr>
+            <a:r>
+              <a:rPr lang="en-US" b="1"/>
               <a:t>7. Optical Filters</a:t>
             </a:r>
-          </a:p>
-          <a:p>
-            <a:pPr lvl="1"/>
-            <a:r>
-              <a:rPr lang="en-US" b="1" dirty="0" smtClean="0"/>
+            <a:endParaRPr/>
+          </a:p>
+          <a:p>
+            <a:pPr lvl="1">
+              <a:defRPr/>
+            </a:pPr>
+            <a:r>
+              <a:rPr lang="en-US" b="1"/>
               <a:t>Explanation:</a:t>
             </a:r>
             <a:r>
-              <a:rPr lang="en-US" dirty="0" smtClean="0"/>
+              <a:rPr lang="en-US"/>
               <a:t> These </a:t>
             </a:r>
             <a:r>
-              <a:rPr lang="en-US" dirty="0" smtClean="0">
+              <a:rPr lang="en-US">
                 <a:solidFill>
                   <a:schemeClr val="accent6"/>
                 </a:solidFill>
@@ -3812,42 +5214,53 @@
               <a:t>allow only a specific range of wavelengths to pass through while blocking or reflecting others</a:t>
             </a:r>
             <a:r>
-              <a:rPr lang="en-US" dirty="0" smtClean="0"/>
+              <a:rPr lang="en-US"/>
               <a:t>.</a:t>
             </a:r>
-          </a:p>
-          <a:p>
-            <a:pPr lvl="1"/>
-            <a:r>
-              <a:rPr lang="en-US" b="1" dirty="0" smtClean="0"/>
+            <a:endParaRPr/>
+          </a:p>
+          <a:p>
+            <a:pPr lvl="1">
+              <a:defRPr/>
+            </a:pPr>
+            <a:r>
+              <a:rPr lang="en-US" b="1"/>
               <a:t>Example:</a:t>
             </a:r>
             <a:r>
-              <a:rPr lang="en-US" dirty="0" smtClean="0"/>
+              <a:rPr lang="en-US"/>
               <a:t> A coffee filter that lets the liquid through but stops the grounds.</a:t>
             </a:r>
+            <a:endParaRPr/>
           </a:p>
           <a:p>
             <a:pPr marL="457200" lvl="1" indent="0">
               <a:buNone/>
-            </a:pPr>
-            <a:endParaRPr lang="en-US" dirty="0" smtClean="0"/>
-          </a:p>
-          <a:p>
-            <a:endParaRPr lang="en-US" sz="3600" dirty="0"/>
+              <a:defRPr/>
+            </a:pPr>
+            <a:endParaRPr lang="en-US"/>
+          </a:p>
+          <a:p>
+            <a:pPr>
+              <a:defRPr/>
+            </a:pPr>
+            <a:endParaRPr lang="en-US" sz="3600"/>
           </a:p>
         </p:txBody>
       </p:sp>
     </p:spTree>
-    <p:extLst>
-      <p:ext uri="{BB962C8B-B14F-4D97-AF65-F5344CB8AC3E}">
-        <p14:creationId xmlns:p14="http://schemas.microsoft.com/office/powerpoint/2010/main" val="2662253568"/>
-      </p:ext>
-    </p:extLst>
   </p:cSld>
   <p:clrMapOvr>
     <a:masterClrMapping/>
   </p:clrMapOvr>
+  <mc:AlternateContent xmlns:mc="http://schemas.openxmlformats.org/markup-compatibility/2006">
+    <mc:Choice xmlns:p159="http://schemas.microsoft.com/office/powerpoint/2015/09/main" xmlns:p14="http://schemas.microsoft.com/office/powerpoint/2010/main" Requires="p159">
+      <p:transition p14:dur="500" advClick="1"/>
+    </mc:Choice>
+    <mc:Fallback>
+      <p:transition advClick="1"/>
+    </mc:Fallback>
+  </mc:AlternateContent>
   <p:timing>
     <p:tnLst>
       <p:par>
@@ -3859,15 +5272,15 @@
 </file>
 
 <file path=ppt/slides/slide7.xml><?xml version="1.0" encoding="utf-8"?>
-<p:sld xmlns:a="http://schemas.openxmlformats.org/drawingml/2006/main" xmlns:r="http://schemas.openxmlformats.org/officeDocument/2006/relationships" xmlns:p="http://schemas.openxmlformats.org/presentationml/2006/main">
-  <p:cSld>
+<p:sld xmlns:a="http://schemas.openxmlformats.org/drawingml/2006/main" xmlns:r="http://schemas.openxmlformats.org/officeDocument/2006/relationships" xmlns:p="http://schemas.openxmlformats.org/presentationml/2006/main" xmlns:m="http://schemas.openxmlformats.org/officeDocument/2006/math" xmlns:w="http://schemas.openxmlformats.org/wordprocessingml/2006/main" xmlns:mc="http://schemas.openxmlformats.org/markup-compatibility/2006" showMasterPhAnim="0" showMasterSp="1" show="1">
+  <p:cSld name="">
     <p:spTree>
       <p:nvGrpSpPr>
         <p:cNvPr id="1" name=""/>
         <p:cNvGrpSpPr/>
         <p:nvPr/>
       </p:nvGrpSpPr>
-      <p:grpSpPr>
+      <p:grpSpPr bwMode="auto">
         <a:xfrm>
           <a:off x="0" y="0"/>
           <a:ext cx="0" cy="0"/>
@@ -3877,7 +5290,7 @@
       </p:grpSpPr>
       <p:sp>
         <p:nvSpPr>
-          <p:cNvPr id="3" name="Content Placeholder 2"/>
+          <p:cNvPr id="1960266531" name="Content Placeholder 2"/>
           <p:cNvSpPr>
             <a:spLocks noGrp="1"/>
           </p:cNvSpPr>
@@ -3885,7 +5298,7 @@
             <p:ph idx="1"/>
           </p:nvPr>
         </p:nvSpPr>
-        <p:spPr>
+        <p:spPr bwMode="auto">
           <a:xfrm>
             <a:off x="688731" y="295764"/>
             <a:ext cx="10515600" cy="4351338"/>
@@ -3895,76 +5308,86 @@
           <a:bodyPr/>
           <a:lstStyle/>
           <a:p>
-            <a:r>
-              <a:rPr lang="en-US" b="1" dirty="0" smtClean="0"/>
+            <a:pPr>
+              <a:defRPr/>
+            </a:pPr>
+            <a:r>
+              <a:rPr lang="en-US" b="1"/>
               <a:t>Exercise 1: The Attenuator Problem</a:t>
             </a:r>
-          </a:p>
-          <a:p>
-            <a:pPr lvl="1"/>
-            <a:r>
-              <a:rPr lang="en-US" dirty="0" smtClean="0"/>
+            <a:endParaRPr/>
+          </a:p>
+          <a:p>
+            <a:pPr lvl="1">
+              <a:defRPr/>
+            </a:pPr>
+            <a:r>
+              <a:rPr lang="en-US"/>
               <a:t>An optical transmitter sends a signal at </a:t>
             </a:r>
             <a:r>
-              <a:rPr lang="en-US" b="1" dirty="0" smtClean="0"/>
+              <a:rPr lang="en-US" b="1"/>
               <a:t>+3 </a:t>
             </a:r>
             <a:r>
-              <a:rPr lang="en-US" b="1" dirty="0" err="1" smtClean="0"/>
+              <a:rPr lang="en-US" b="1"/>
               <a:t>dBm</a:t>
             </a:r>
             <a:r>
-              <a:rPr lang="en-US" dirty="0" smtClean="0"/>
+              <a:rPr lang="en-US"/>
               <a:t>. The receiver has a maximum input power limit (saturation point) of </a:t>
             </a:r>
             <a:r>
-              <a:rPr lang="en-US" b="1" dirty="0" smtClean="0"/>
+              <a:rPr lang="en-US" b="1"/>
               <a:t>-5 </a:t>
             </a:r>
             <a:r>
-              <a:rPr lang="en-US" b="1" dirty="0" err="1" smtClean="0"/>
+              <a:rPr lang="en-US" b="1"/>
               <a:t>dBm</a:t>
             </a:r>
             <a:r>
-              <a:rPr lang="en-US" dirty="0" smtClean="0"/>
+              <a:rPr lang="en-US"/>
               <a:t>. What is the minimum value of an </a:t>
             </a:r>
             <a:r>
-              <a:rPr lang="en-US" b="1" dirty="0" smtClean="0"/>
+              <a:rPr lang="en-US" b="1"/>
               <a:t>Optical Attenuator</a:t>
             </a:r>
             <a:r>
-              <a:rPr lang="en-US" dirty="0" smtClean="0"/>
+              <a:rPr lang="en-US"/>
               <a:t> needed to protect the receiver if the fiber loss is negligible?</a:t>
             </a:r>
-          </a:p>
-          <a:p>
-            <a:pPr lvl="1"/>
-            <a:endParaRPr lang="en-US" dirty="0" smtClean="0"/>
-          </a:p>
-          <a:p>
-            <a:endParaRPr lang="en-US" dirty="0"/>
+            <a:endParaRPr/>
+          </a:p>
+          <a:p>
+            <a:pPr lvl="1">
+              <a:defRPr/>
+            </a:pPr>
+            <a:endParaRPr lang="en-US"/>
+          </a:p>
+          <a:p>
+            <a:pPr>
+              <a:defRPr/>
+            </a:pPr>
+            <a:endParaRPr lang="en-US"/>
           </a:p>
         </p:txBody>
       </p:sp>
       <p:pic>
         <p:nvPicPr>
-          <p:cNvPr id="5" name="Picture 4"/>
+          <p:cNvPr id="2050052785" name="Picture 4"/>
           <p:cNvPicPr>
             <a:picLocks noChangeAspect="1"/>
           </p:cNvPicPr>
           <p:nvPr/>
         </p:nvPicPr>
-        <p:blipFill>
-          <a:blip r:embed="rId2"/>
-          <a:stretch>
-            <a:fillRect/>
-          </a:stretch>
+        <p:blipFill rotWithShape="1">
+          <a:blip r:embed="rId3"/>
+          <a:stretch/>
         </p:blipFill>
-        <p:spPr>
+        <p:spPr bwMode="auto">
           <a:xfrm>
-            <a:off x="1387967" y="1857235"/>
+            <a:off x="1387966" y="2203598"/>
             <a:ext cx="6954220" cy="2000529"/>
           </a:xfrm>
           <a:prstGeom prst="rect">
@@ -3974,9 +5397,9 @@
       </p:pic>
       <p:sp>
         <p:nvSpPr>
-          <p:cNvPr id="6" name="Rectangle 2"/>
-          <p:cNvSpPr>
-            <a:spLocks noGrp="1" noChangeArrowheads="1"/>
+          <p:cNvPr id="980014163" name="Rectangle 2"/>
+          <p:cNvSpPr>
+            <a:spLocks noChangeArrowheads="1" noGrp="1"/>
           </p:cNvSpPr>
           <p:nvPr>
             <p:ph type="title"/>
@@ -3984,7 +5407,7 @@
         </p:nvSpPr>
         <p:spPr bwMode="auto">
           <a:xfrm>
-            <a:off x="1299552" y="4279550"/>
+            <a:off x="1299551" y="4504686"/>
             <a:ext cx="10415031" cy="600164"/>
           </a:xfrm>
           <a:prstGeom prst="rect">
@@ -3995,426 +5418,360 @@
             <a:noFill/>
           </a:ln>
           <a:effectLst/>
-          <a:extLst>
-            <a:ext uri="{909E8E84-426E-40DD-AFC4-6F175D3DCCD1}">
-              <a14:hiddenFill xmlns:a14="http://schemas.microsoft.com/office/drawing/2010/main">
-                <a:solidFill>
-                  <a:schemeClr val="accent1"/>
-                </a:solidFill>
-              </a14:hiddenFill>
-            </a:ext>
-            <a:ext uri="{91240B29-F687-4F45-9708-019B960494DF}">
-              <a14:hiddenLine xmlns:a14="http://schemas.microsoft.com/office/drawing/2010/main" w="9525">
-                <a:solidFill>
-                  <a:schemeClr val="tx1"/>
-                </a:solidFill>
-                <a:miter lim="800000"/>
-                <a:headEnd/>
-                <a:tailEnd/>
-              </a14:hiddenLine>
-            </a:ext>
-            <a:ext uri="{AF507438-7753-43E0-B8FC-AC1667EBCBE1}">
-              <a14:hiddenEffects xmlns:a14="http://schemas.microsoft.com/office/drawing/2010/main">
-                <a:effectLst>
-                  <a:outerShdw dist="35921" dir="2700000" algn="ctr" rotWithShape="0">
-                    <a:schemeClr val="bg2"/>
-                  </a:outerShdw>
-                </a:effectLst>
-              </a14:hiddenEffects>
-            </a:ext>
-          </a:extLst>
         </p:spPr>
         <p:txBody>
           <a:bodyPr vert="horz" wrap="none" lIns="91440" tIns="0" rIns="91440" bIns="45720" numCol="1" anchor="ctr" anchorCtr="0" compatLnSpc="1">
-            <a:prstTxWarp prst="textNoShape">
-              <a:avLst/>
-            </a:prstTxWarp>
+            <a:prstTxWarp prst="textNoShape"/>
             <a:spAutoFit/>
           </a:bodyPr>
           <a:lstStyle/>
           <a:p>
-            <a:pPr marL="0" marR="0" lvl="0" indent="0" algn="l" defTabSz="914400" rtl="0" eaLnBrk="0" fontAlgn="base" latinLnBrk="0" hangingPunct="0">
+            <a:pPr marL="0" marR="0" lvl="0" indent="0" algn="l" defTabSz="914400" rtl="0">
               <a:lnSpc>
                 <a:spcPct val="100000"/>
               </a:lnSpc>
               <a:spcBef>
-                <a:spcPct val="0"/>
+                <a:spcPts val="0"/>
               </a:spcBef>
               <a:spcAft>
-                <a:spcPct val="0"/>
+                <a:spcPts val="0"/>
               </a:spcAft>
               <a:buClrTx/>
               <a:buSzTx/>
               <a:buFontTx/>
               <a:buNone/>
-              <a:tabLst/>
-            </a:pPr>
-            <a:r>
-              <a:rPr kumimoji="0" lang="en-US" altLang="en-US" sz="1800" b="1" i="0" u="none" strike="noStrike" cap="none" normalizeH="0" baseline="0" dirty="0" err="1" smtClean="0">
+              <a:defRPr/>
+            </a:pPr>
+            <a:r>
+              <a:rPr lang="en-US" sz="1800" b="1" i="0" u="none" strike="noStrike" cap="none">
                 <a:ln>
                   <a:noFill/>
                 </a:ln>
                 <a:solidFill>
                   <a:schemeClr val="tx1"/>
                 </a:solidFill>
-                <a:effectLst/>
                 <a:latin typeface="Google Sans Text"/>
               </a:rPr>
               <a:t>dBm</a:t>
             </a:r>
             <a:r>
-              <a:rPr kumimoji="0" lang="bn-IN" altLang="en-US" sz="1800" b="0" i="0" u="none" strike="noStrike" cap="none" normalizeH="0" baseline="0" dirty="0" smtClean="0">
+              <a:rPr lang="bn-IN" sz="1800" b="0" i="0" u="none" strike="noStrike" cap="none">
                 <a:ln>
                   <a:noFill/>
                 </a:ln>
                 <a:solidFill>
                   <a:schemeClr val="tx1"/>
                 </a:solidFill>
-                <a:effectLst/>
                 <a:latin typeface="Google Sans Text"/>
                 <a:cs typeface="Vrinda"/>
               </a:rPr>
               <a:t> ইউনিটে </a:t>
             </a:r>
             <a:r>
-              <a:rPr kumimoji="0" lang="bn-IN" altLang="en-US" sz="1800" b="1" i="0" u="none" strike="noStrike" cap="none" normalizeH="0" baseline="0" dirty="0" smtClean="0">
+              <a:rPr lang="bn-IN" sz="1800" b="1" i="0" u="none" strike="noStrike" cap="none">
                 <a:ln>
                   <a:noFill/>
                 </a:ln>
                 <a:solidFill>
                   <a:schemeClr val="tx1"/>
                 </a:solidFill>
-                <a:effectLst/>
                 <a:latin typeface="Google Sans Text"/>
                 <a:cs typeface="Vrinda"/>
               </a:rPr>
               <a:t>প্লাস </a:t>
             </a:r>
             <a:r>
-              <a:rPr kumimoji="0" lang="en-US" altLang="en-US" sz="1800" b="1" i="0" u="none" strike="noStrike" cap="none" normalizeH="0" baseline="0" dirty="0" smtClean="0">
+              <a:rPr lang="en-US" sz="1800" b="1" i="0" u="none" strike="noStrike" cap="none">
                 <a:ln>
                   <a:noFill/>
                 </a:ln>
                 <a:solidFill>
                   <a:schemeClr val="tx1"/>
                 </a:solidFill>
-                <a:effectLst/>
                 <a:latin typeface="Google Sans Text"/>
                 <a:cs typeface="Vrinda"/>
               </a:rPr>
               <a:t>(+)</a:t>
             </a:r>
             <a:r>
-              <a:rPr kumimoji="0" lang="bn-IN" altLang="en-US" sz="1800" b="0" i="0" u="none" strike="noStrike" cap="none" normalizeH="0" baseline="0" dirty="0" smtClean="0">
+              <a:rPr lang="bn-IN" sz="1800" b="0" i="0" u="none" strike="noStrike" cap="none">
                 <a:ln>
                   <a:noFill/>
                 </a:ln>
                 <a:solidFill>
                   <a:schemeClr val="tx1"/>
                 </a:solidFill>
-                <a:effectLst/>
                 <a:latin typeface="Google Sans Text"/>
                 <a:cs typeface="Vrinda"/>
               </a:rPr>
               <a:t> বা </a:t>
             </a:r>
             <a:r>
-              <a:rPr kumimoji="0" lang="bn-IN" altLang="en-US" sz="1800" b="1" i="0" u="none" strike="noStrike" cap="none" normalizeH="0" baseline="0" dirty="0" smtClean="0">
+              <a:rPr lang="bn-IN" sz="1800" b="1" i="0" u="none" strike="noStrike" cap="none">
                 <a:ln>
                   <a:noFill/>
                 </a:ln>
                 <a:solidFill>
                   <a:schemeClr val="tx1"/>
                 </a:solidFill>
-                <a:effectLst/>
                 <a:latin typeface="Google Sans Text"/>
                 <a:cs typeface="Vrinda"/>
               </a:rPr>
               <a:t>মাইনাস </a:t>
             </a:r>
             <a:r>
-              <a:rPr kumimoji="0" lang="en-US" altLang="en-US" sz="1800" b="1" i="0" u="none" strike="noStrike" cap="none" normalizeH="0" baseline="0" dirty="0" smtClean="0">
+              <a:rPr lang="en-US" sz="1800" b="1" i="0" u="none" strike="noStrike" cap="none">
                 <a:ln>
                   <a:noFill/>
                 </a:ln>
                 <a:solidFill>
                   <a:schemeClr val="tx1"/>
                 </a:solidFill>
-                <a:effectLst/>
                 <a:latin typeface="Google Sans Text"/>
                 <a:cs typeface="Vrinda"/>
               </a:rPr>
               <a:t>(-)</a:t>
             </a:r>
             <a:r>
-              <a:rPr kumimoji="0" lang="bn-IN" altLang="en-US" sz="1800" b="0" i="0" u="none" strike="noStrike" cap="none" normalizeH="0" baseline="0" dirty="0" smtClean="0">
+              <a:rPr lang="bn-IN" sz="1800" b="0" i="0" u="none" strike="noStrike" cap="none">
                 <a:ln>
                   <a:noFill/>
                 </a:ln>
                 <a:solidFill>
                   <a:schemeClr val="tx1"/>
                 </a:solidFill>
-                <a:effectLst/>
                 <a:latin typeface="Google Sans Text"/>
                 <a:cs typeface="Vrinda"/>
               </a:rPr>
               <a:t> চিহ্ন দিয়ে বোঝানো হয় যে সিগন্যালের শক্তি </a:t>
             </a:r>
             <a:r>
-              <a:rPr kumimoji="0" lang="bn-IN" altLang="en-US" sz="1800" b="1" i="0" u="none" strike="noStrike" cap="none" normalizeH="0" baseline="0" dirty="0" smtClean="0">
+              <a:rPr lang="bn-IN" sz="1800" b="1" i="0" u="none" strike="noStrike" cap="none">
                 <a:ln>
                   <a:noFill/>
                 </a:ln>
                 <a:solidFill>
                   <a:schemeClr val="tx1"/>
                 </a:solidFill>
-                <a:effectLst/>
                 <a:latin typeface="Google Sans Text"/>
                 <a:cs typeface="Vrinda"/>
               </a:rPr>
               <a:t>১ মিলিওয়াট </a:t>
             </a:r>
             <a:r>
-              <a:rPr kumimoji="0" lang="en-US" altLang="en-US" sz="1800" b="1" i="0" u="none" strike="noStrike" cap="none" normalizeH="0" baseline="0" dirty="0" smtClean="0">
+              <a:rPr lang="en-US" sz="1800" b="1" i="0" u="none" strike="noStrike" cap="none">
                 <a:ln>
                   <a:noFill/>
                 </a:ln>
                 <a:solidFill>
                   <a:schemeClr val="tx1"/>
                 </a:solidFill>
-                <a:effectLst/>
                 <a:latin typeface="Google Sans Text"/>
                 <a:cs typeface="Vrinda"/>
               </a:rPr>
               <a:t>(1 </a:t>
             </a:r>
             <a:r>
-              <a:rPr kumimoji="0" lang="en-US" altLang="en-US" sz="1800" b="1" i="0" u="none" strike="noStrike" cap="none" normalizeH="0" baseline="0" dirty="0" err="1" smtClean="0">
+              <a:rPr lang="en-US" sz="1800" b="1" i="0" u="none" strike="noStrike" cap="none">
                 <a:ln>
                   <a:noFill/>
                 </a:ln>
                 <a:solidFill>
                   <a:schemeClr val="tx1"/>
                 </a:solidFill>
-                <a:effectLst/>
                 <a:latin typeface="Google Sans Text"/>
                 <a:cs typeface="Vrinda"/>
               </a:rPr>
               <a:t>mW</a:t>
             </a:r>
             <a:r>
-              <a:rPr kumimoji="0" lang="en-US" altLang="en-US" sz="1800" b="1" i="0" u="none" strike="noStrike" cap="none" normalizeH="0" baseline="0" dirty="0" smtClean="0">
+              <a:rPr lang="en-US" sz="1800" b="1" i="0" u="none" strike="noStrike" cap="none">
                 <a:ln>
                   <a:noFill/>
                 </a:ln>
                 <a:solidFill>
                   <a:schemeClr val="tx1"/>
                 </a:solidFill>
-                <a:effectLst/>
                 <a:latin typeface="Google Sans Text"/>
                 <a:cs typeface="Vrinda"/>
               </a:rPr>
               <a:t>)</a:t>
             </a:r>
             <a:r>
-              <a:rPr kumimoji="0" lang="bn-IN" altLang="en-US" sz="1800" b="0" i="0" u="none" strike="noStrike" cap="none" normalizeH="0" baseline="0" dirty="0" smtClean="0">
+              <a:rPr lang="bn-IN" sz="1800" b="0" i="0" u="none" strike="noStrike" cap="none">
                 <a:ln>
                   <a:noFill/>
                 </a:ln>
                 <a:solidFill>
                   <a:schemeClr val="tx1"/>
                 </a:solidFill>
-                <a:effectLst/>
                 <a:latin typeface="Google Sans Text"/>
                 <a:cs typeface="Vrinda"/>
               </a:rPr>
               <a:t> </a:t>
             </a:r>
-            <a:r>
-              <a:rPr kumimoji="0" lang="en-US" altLang="en-US" sz="1800" b="0" i="0" u="none" strike="noStrike" cap="none" normalizeH="0" baseline="0" dirty="0" smtClean="0">
+            <a:br>
+              <a:rPr lang="en-US" sz="1800" b="0" i="0" u="none" strike="noStrike" cap="none">
                 <a:ln>
                   <a:noFill/>
                 </a:ln>
                 <a:solidFill>
                   <a:schemeClr val="tx1"/>
                 </a:solidFill>
-                <a:effectLst/>
                 <a:latin typeface="Google Sans Text"/>
                 <a:cs typeface="Vrinda"/>
               </a:rPr>
-              <a:t/>
-            </a:r>
-            <a:br>
-              <a:rPr kumimoji="0" lang="en-US" altLang="en-US" sz="1800" b="0" i="0" u="none" strike="noStrike" cap="none" normalizeH="0" baseline="0" dirty="0" smtClean="0">
+            </a:br>
+            <a:r>
+              <a:rPr lang="bn-IN" sz="1800" b="0" i="0" u="none" strike="noStrike" cap="none">
                 <a:ln>
                   <a:noFill/>
                 </a:ln>
                 <a:solidFill>
                   <a:schemeClr val="tx1"/>
                 </a:solidFill>
-                <a:effectLst/>
                 <a:latin typeface="Google Sans Text"/>
                 <a:cs typeface="Vrinda"/>
               </a:rPr>
-            </a:br>
-            <a:r>
-              <a:rPr kumimoji="0" lang="bn-IN" altLang="en-US" sz="1800" b="0" i="0" u="none" strike="noStrike" cap="none" normalizeH="0" baseline="0" dirty="0" smtClean="0">
+              <a:t>থেকে বেশি নাকি কম </a:t>
+            </a:r>
+            <a:r>
+              <a:rPr lang="hi-IN" sz="1800" b="0" i="0" u="none" strike="noStrike" cap="none">
                 <a:ln>
                   <a:noFill/>
                 </a:ln>
                 <a:solidFill>
                   <a:schemeClr val="tx1"/>
                 </a:solidFill>
-                <a:effectLst/>
                 <a:latin typeface="Google Sans Text"/>
-                <a:cs typeface="Vrinda"/>
+                <a:cs typeface="Mangal"/>
               </a:rPr>
-              <a:t>থেকে বেশি নাকি কম </a:t>
-            </a:r>
-            <a:r>
-              <a:rPr kumimoji="0" lang="hi-IN" altLang="en-US" sz="1800" b="0" i="0" u="none" strike="noStrike" cap="none" normalizeH="0" baseline="0" dirty="0" smtClean="0">
+              <a:t>।</a:t>
+            </a:r>
+            <a:r>
+              <a:rPr lang="en-US" sz="1800" b="0" i="0" u="none" strike="noStrike" cap="none">
                 <a:ln>
                   <a:noFill/>
                 </a:ln>
                 <a:solidFill>
                   <a:schemeClr val="tx1"/>
                 </a:solidFill>
-                <a:effectLst/>
                 <a:latin typeface="Google Sans Text"/>
                 <a:cs typeface="Mangal"/>
               </a:rPr>
-              <a:t>।</a:t>
-            </a:r>
-            <a:r>
-              <a:rPr kumimoji="0" lang="en-US" altLang="en-US" sz="1800" b="0" i="0" u="none" strike="noStrike" cap="none" normalizeH="0" baseline="0" dirty="0" smtClean="0">
+              <a:t> </a:t>
+            </a:r>
+            <a:r>
+              <a:rPr lang="bn-IN" sz="1800" b="0" i="0" u="none" strike="noStrike" cap="none">
                 <a:ln>
                   <a:noFill/>
                 </a:ln>
                 <a:solidFill>
                   <a:schemeClr val="tx1"/>
                 </a:solidFill>
-                <a:effectLst/>
                 <a:latin typeface="Google Sans Text"/>
-                <a:cs typeface="Mangal"/>
+                <a:cs typeface="Vrinda"/>
               </a:rPr>
-              <a:t> </a:t>
-            </a:r>
-            <a:r>
-              <a:rPr kumimoji="0" lang="bn-IN" altLang="en-US" sz="1800" b="0" i="0" u="none" strike="noStrike" cap="none" normalizeH="0" baseline="0" dirty="0" smtClean="0">
+              <a:t>যেহেতু </a:t>
+            </a:r>
+            <a:r>
+              <a:rPr lang="en-US" sz="1800" b="0" i="0" u="none" strike="noStrike" cap="none">
                 <a:ln>
                   <a:noFill/>
                 </a:ln>
                 <a:solidFill>
                   <a:schemeClr val="tx1"/>
                 </a:solidFill>
-                <a:effectLst/>
                 <a:latin typeface="Google Sans Text"/>
-                <a:cs typeface="Vrinda"/>
               </a:rPr>
-              <a:t>যেহেতু </a:t>
-            </a:r>
-            <a:r>
-              <a:rPr kumimoji="0" lang="en-US" altLang="en-US" sz="1800" b="0" i="0" u="none" strike="noStrike" cap="none" normalizeH="0" baseline="0" dirty="0" smtClean="0">
+              <a:t>0 </a:t>
+            </a:r>
+            <a:r>
+              <a:rPr lang="en-US" sz="1800" b="0" i="0" u="none" strike="noStrike" cap="none">
                 <a:ln>
                   <a:noFill/>
                 </a:ln>
                 <a:solidFill>
                   <a:schemeClr val="tx1"/>
                 </a:solidFill>
-                <a:effectLst/>
                 <a:latin typeface="Google Sans Text"/>
               </a:rPr>
-              <a:t>0 </a:t>
-            </a:r>
-            <a:r>
-              <a:rPr kumimoji="0" lang="en-US" altLang="en-US" sz="1800" b="0" i="0" u="none" strike="noStrike" cap="none" normalizeH="0" baseline="0" dirty="0" err="1" smtClean="0">
+              <a:t>dBm</a:t>
+            </a:r>
+            <a:r>
+              <a:rPr lang="en-US" sz="1800" b="0" i="0" u="none" strike="noStrike" cap="none">
                 <a:ln>
                   <a:noFill/>
                 </a:ln>
                 <a:solidFill>
                   <a:schemeClr val="tx1"/>
                 </a:solidFill>
-                <a:effectLst/>
                 <a:latin typeface="Google Sans Text"/>
               </a:rPr>
-              <a:t>dBm</a:t>
-            </a:r>
-            <a:r>
-              <a:rPr kumimoji="0" lang="en-US" altLang="en-US" sz="1800" b="0" i="0" u="none" strike="noStrike" cap="none" normalizeH="0" baseline="0" dirty="0" smtClean="0">
+              <a:t> = 1  </a:t>
+            </a:r>
+            <a:r>
+              <a:rPr lang="en-US" sz="1800" b="0" i="0" u="none" strike="noStrike" cap="none">
                 <a:ln>
                   <a:noFill/>
                 </a:ln>
                 <a:solidFill>
                   <a:schemeClr val="tx1"/>
                 </a:solidFill>
-                <a:effectLst/>
                 <a:latin typeface="Google Sans Text"/>
               </a:rPr>
-              <a:t> = 1  </a:t>
-            </a:r>
-            <a:r>
-              <a:rPr kumimoji="0" lang="en-US" altLang="en-US" sz="1800" b="0" i="0" u="none" strike="noStrike" cap="none" normalizeH="0" baseline="0" dirty="0" err="1" smtClean="0">
+              <a:t>mW</a:t>
+            </a:r>
+            <a:r>
+              <a:rPr lang="en-US" sz="1800" b="0" i="0" u="none" strike="noStrike" cap="none">
                 <a:ln>
                   <a:noFill/>
                 </a:ln>
                 <a:solidFill>
                   <a:schemeClr val="tx1"/>
                 </a:solidFill>
-                <a:effectLst/>
                 <a:latin typeface="Google Sans Text"/>
               </a:rPr>
-              <a:t>mW</a:t>
-            </a:r>
-            <a:r>
-              <a:rPr kumimoji="0" lang="en-US" altLang="en-US" sz="1800" b="0" i="0" u="none" strike="noStrike" cap="none" normalizeH="0" baseline="0" dirty="0" smtClean="0">
+              <a:t>, </a:t>
+            </a:r>
+            <a:r>
+              <a:rPr lang="bn-IN" sz="1800" b="0" i="0" u="none" strike="noStrike" cap="none">
                 <a:ln>
                   <a:noFill/>
                 </a:ln>
                 <a:solidFill>
                   <a:schemeClr val="tx1"/>
                 </a:solidFill>
-                <a:effectLst/>
-                <a:latin typeface="Google Sans Text"/>
-              </a:rPr>
-              <a:t>, </a:t>
-            </a:r>
-            <a:r>
-              <a:rPr kumimoji="0" lang="bn-IN" altLang="en-US" sz="1800" b="0" i="0" u="none" strike="noStrike" cap="none" normalizeH="0" baseline="0" dirty="0" smtClean="0">
-                <a:ln>
-                  <a:noFill/>
-                </a:ln>
-                <a:solidFill>
-                  <a:schemeClr val="tx1"/>
-                </a:solidFill>
-                <a:effectLst/>
                 <a:latin typeface="Google Sans Text"/>
                 <a:cs typeface="Vrinda"/>
               </a:rPr>
               <a:t>তাই এর ওপর ভিত্তি করে হিসাবটি করা হয়</a:t>
             </a:r>
-            <a:endParaRPr kumimoji="0" lang="en-US" altLang="en-US" sz="1800" b="0" i="0" u="none" strike="noStrike" cap="none" normalizeH="0" baseline="0" dirty="0" smtClean="0">
+            <a:endParaRPr lang="en-US" sz="1800" b="0" i="0" u="none" strike="noStrike" cap="none">
               <a:ln>
                 <a:noFill/>
               </a:ln>
               <a:solidFill>
                 <a:schemeClr val="tx1"/>
               </a:solidFill>
-              <a:effectLst/>
-              <a:latin typeface="Arial" panose="020B0604020202020204" pitchFamily="34" charset="0"/>
+              <a:latin typeface="Arial"/>
             </a:endParaRPr>
           </a:p>
         </p:txBody>
       </p:sp>
     </p:spTree>
-    <p:extLst>
-      <p:ext uri="{BB962C8B-B14F-4D97-AF65-F5344CB8AC3E}">
-        <p14:creationId xmlns:p14="http://schemas.microsoft.com/office/powerpoint/2010/main" val="3979882767"/>
-      </p:ext>
-    </p:extLst>
   </p:cSld>
   <p:clrMapOvr>
     <a:masterClrMapping/>
   </p:clrMapOvr>
+  <mc:AlternateContent xmlns:mc="http://schemas.openxmlformats.org/markup-compatibility/2006">
+    <mc:Choice xmlns:p159="http://schemas.microsoft.com/office/powerpoint/2015/09/main" xmlns:p14="http://schemas.microsoft.com/office/powerpoint/2010/main" Requires="p159">
+      <p:transition p14:dur="500" advClick="1"/>
+    </mc:Choice>
+    <mc:Fallback>
+      <p:transition advClick="1"/>
+    </mc:Fallback>
+  </mc:AlternateContent>
   <p:timing>
     <p:tnLst>
       <p:par>
@@ -4426,15 +5783,15 @@
 </file>
 
 <file path=ppt/slides/slide8.xml><?xml version="1.0" encoding="utf-8"?>
-<p:sld xmlns:a="http://schemas.openxmlformats.org/drawingml/2006/main" xmlns:r="http://schemas.openxmlformats.org/officeDocument/2006/relationships" xmlns:p="http://schemas.openxmlformats.org/presentationml/2006/main">
-  <p:cSld>
+<p:sld xmlns:a="http://schemas.openxmlformats.org/drawingml/2006/main" xmlns:r="http://schemas.openxmlformats.org/officeDocument/2006/relationships" xmlns:p="http://schemas.openxmlformats.org/presentationml/2006/main" xmlns:m="http://schemas.openxmlformats.org/officeDocument/2006/math" xmlns:w="http://schemas.openxmlformats.org/wordprocessingml/2006/main" xmlns:mc="http://schemas.openxmlformats.org/markup-compatibility/2006" showMasterPhAnim="0" showMasterSp="1" show="1">
+  <p:cSld name="">
     <p:spTree>
       <p:nvGrpSpPr>
         <p:cNvPr id="1" name=""/>
         <p:cNvGrpSpPr/>
         <p:nvPr/>
       </p:nvGrpSpPr>
-      <p:grpSpPr>
+      <p:grpSpPr bwMode="auto">
         <a:xfrm>
           <a:off x="0" y="0"/>
           <a:ext cx="0" cy="0"/>
@@ -4444,7 +5801,7 @@
       </p:grpSpPr>
       <p:sp>
         <p:nvSpPr>
-          <p:cNvPr id="2" name="Title 1"/>
+          <p:cNvPr id="509518812" name="Title 1"/>
           <p:cNvSpPr>
             <a:spLocks noGrp="1"/>
           </p:cNvSpPr>
@@ -4452,18 +5809,21 @@
             <p:ph type="title"/>
           </p:nvPr>
         </p:nvSpPr>
-        <p:spPr/>
-        <p:txBody>
-          <a:bodyPr/>
-          <a:lstStyle/>
-          <a:p>
-            <a:endParaRPr lang="en-US"/>
-          </a:p>
-        </p:txBody>
-      </p:sp>
-      <p:sp>
-        <p:nvSpPr>
-          <p:cNvPr id="3" name="Content Placeholder 2"/>
+        <p:spPr bwMode="auto"/>
+        <p:txBody>
+          <a:bodyPr/>
+          <a:lstStyle/>
+          <a:p>
+            <a:pPr>
+              <a:defRPr/>
+            </a:pPr>
+            <a:endParaRPr lang="en-US"/>
+          </a:p>
+        </p:txBody>
+      </p:sp>
+      <p:sp>
+        <p:nvSpPr>
+          <p:cNvPr id="777662501" name="Content Placeholder 2"/>
           <p:cNvSpPr>
             <a:spLocks noGrp="1"/>
           </p:cNvSpPr>
@@ -4471,30 +5831,31 @@
             <p:ph idx="1"/>
           </p:nvPr>
         </p:nvSpPr>
-        <p:spPr/>
-        <p:txBody>
-          <a:bodyPr/>
-          <a:lstStyle/>
-          <a:p>
+        <p:spPr bwMode="auto"/>
+        <p:txBody>
+          <a:bodyPr/>
+          <a:lstStyle/>
+          <a:p>
+            <a:pPr>
+              <a:defRPr/>
+            </a:pPr>
             <a:endParaRPr lang="en-US"/>
           </a:p>
         </p:txBody>
       </p:sp>
       <p:pic>
         <p:nvPicPr>
-          <p:cNvPr id="5" name="Picture 4"/>
+          <p:cNvPr id="1128500778" name="Picture 4"/>
           <p:cNvPicPr>
             <a:picLocks noChangeAspect="1"/>
           </p:cNvPicPr>
           <p:nvPr/>
         </p:nvPicPr>
-        <p:blipFill>
-          <a:blip r:embed="rId2"/>
-          <a:stretch>
-            <a:fillRect/>
-          </a:stretch>
+        <p:blipFill rotWithShape="1">
+          <a:blip r:embed="rId3"/>
+          <a:stretch/>
         </p:blipFill>
-        <p:spPr>
+        <p:spPr bwMode="auto">
           <a:xfrm>
             <a:off x="838200" y="685801"/>
             <a:ext cx="9122030" cy="4379542"/>
@@ -4506,19 +5867,17 @@
       </p:pic>
       <p:pic>
         <p:nvPicPr>
-          <p:cNvPr id="6" name="Picture 5"/>
+          <p:cNvPr id="2120945745" name="Picture 5"/>
           <p:cNvPicPr>
             <a:picLocks noChangeAspect="1"/>
           </p:cNvPicPr>
           <p:nvPr/>
         </p:nvPicPr>
-        <p:blipFill>
-          <a:blip r:embed="rId3"/>
-          <a:stretch>
-            <a:fillRect/>
-          </a:stretch>
+        <p:blipFill rotWithShape="1">
+          <a:blip r:embed="rId4"/>
+          <a:stretch/>
         </p:blipFill>
-        <p:spPr>
+        <p:spPr bwMode="auto">
           <a:xfrm>
             <a:off x="3867030" y="5506514"/>
             <a:ext cx="1714739" cy="504895"/>
@@ -4529,28 +5888,31 @@
         </p:spPr>
       </p:pic>
     </p:spTree>
-    <p:extLst>
-      <p:ext uri="{BB962C8B-B14F-4D97-AF65-F5344CB8AC3E}">
-        <p14:creationId xmlns:p14="http://schemas.microsoft.com/office/powerpoint/2010/main" val="1118976591"/>
-      </p:ext>
-    </p:extLst>
   </p:cSld>
   <p:clrMapOvr>
     <a:masterClrMapping/>
   </p:clrMapOvr>
+  <mc:AlternateContent xmlns:mc="http://schemas.openxmlformats.org/markup-compatibility/2006">
+    <mc:Choice xmlns:p159="http://schemas.microsoft.com/office/powerpoint/2015/09/main" xmlns:p14="http://schemas.microsoft.com/office/powerpoint/2010/main" Requires="p159">
+      <p:transition p14:dur="500" advClick="1"/>
+    </mc:Choice>
+    <mc:Fallback>
+      <p:transition advClick="1"/>
+    </mc:Fallback>
+  </mc:AlternateContent>
 </p:sld>
 </file>
 
 <file path=ppt/slides/slide9.xml><?xml version="1.0" encoding="utf-8"?>
-<p:sld xmlns:a="http://schemas.openxmlformats.org/drawingml/2006/main" xmlns:r="http://schemas.openxmlformats.org/officeDocument/2006/relationships" xmlns:p="http://schemas.openxmlformats.org/presentationml/2006/main">
-  <p:cSld>
+<p:sld xmlns:a="http://schemas.openxmlformats.org/drawingml/2006/main" xmlns:r="http://schemas.openxmlformats.org/officeDocument/2006/relationships" xmlns:p="http://schemas.openxmlformats.org/presentationml/2006/main" xmlns:m="http://schemas.openxmlformats.org/officeDocument/2006/math" xmlns:w="http://schemas.openxmlformats.org/wordprocessingml/2006/main" xmlns:mc="http://schemas.openxmlformats.org/markup-compatibility/2006" showMasterPhAnim="0" showMasterSp="1" show="1">
+  <p:cSld name="">
     <p:spTree>
       <p:nvGrpSpPr>
         <p:cNvPr id="1" name=""/>
         <p:cNvGrpSpPr/>
         <p:nvPr/>
       </p:nvGrpSpPr>
-      <p:grpSpPr>
+      <p:grpSpPr bwMode="auto">
         <a:xfrm>
           <a:off x="0" y="0"/>
           <a:ext cx="0" cy="0"/>
@@ -4560,7 +5922,7 @@
       </p:grpSpPr>
       <p:sp>
         <p:nvSpPr>
-          <p:cNvPr id="2" name="Title 1"/>
+          <p:cNvPr id="976739160" name="Title 1"/>
           <p:cNvSpPr>
             <a:spLocks noGrp="1"/>
           </p:cNvSpPr>
@@ -4568,18 +5930,21 @@
             <p:ph type="title"/>
           </p:nvPr>
         </p:nvSpPr>
-        <p:spPr/>
-        <p:txBody>
-          <a:bodyPr/>
-          <a:lstStyle/>
-          <a:p>
-            <a:endParaRPr lang="en-US"/>
-          </a:p>
-        </p:txBody>
-      </p:sp>
-      <p:sp>
-        <p:nvSpPr>
-          <p:cNvPr id="3" name="Content Placeholder 2"/>
+        <p:spPr bwMode="auto"/>
+        <p:txBody>
+          <a:bodyPr/>
+          <a:lstStyle/>
+          <a:p>
+            <a:pPr>
+              <a:defRPr/>
+            </a:pPr>
+            <a:endParaRPr lang="en-US"/>
+          </a:p>
+        </p:txBody>
+      </p:sp>
+      <p:sp>
+        <p:nvSpPr>
+          <p:cNvPr id="462325541" name="Content Placeholder 2"/>
           <p:cNvSpPr>
             <a:spLocks noGrp="1"/>
           </p:cNvSpPr>
@@ -4587,93 +5952,107 @@
             <p:ph idx="1"/>
           </p:nvPr>
         </p:nvSpPr>
-        <p:spPr/>
-        <p:txBody>
-          <a:bodyPr/>
-          <a:lstStyle/>
-          <a:p>
-            <a:r>
-              <a:rPr lang="en-US" sz="2400" b="1" dirty="0" smtClean="0"/>
+        <p:spPr bwMode="auto"/>
+        <p:txBody>
+          <a:bodyPr/>
+          <a:lstStyle/>
+          <a:p>
+            <a:pPr>
+              <a:defRPr/>
+            </a:pPr>
+            <a:r>
+              <a:rPr lang="en-US" sz="2400" b="1"/>
               <a:t>Exercise 2: Coupler Power Calculation</a:t>
             </a:r>
-          </a:p>
-          <a:p>
-            <a:pPr lvl="1"/>
-            <a:r>
-              <a:rPr lang="en-US" sz="2000" dirty="0" smtClean="0"/>
+            <a:endParaRPr/>
+          </a:p>
+          <a:p>
+            <a:pPr lvl="1">
+              <a:defRPr/>
+            </a:pPr>
+            <a:r>
+              <a:rPr lang="en-US" sz="2000"/>
               <a:t>A laser sends a signal with </a:t>
             </a:r>
             <a:r>
-              <a:rPr lang="en-US" sz="2000" b="1" dirty="0" smtClean="0"/>
+              <a:rPr lang="en-US" sz="2000" b="1"/>
               <a:t>10 </a:t>
             </a:r>
             <a:r>
-              <a:rPr lang="en-US" sz="2000" b="1" dirty="0" err="1" smtClean="0"/>
+              <a:rPr lang="en-US" sz="2000" b="1"/>
               <a:t>mW</a:t>
             </a:r>
             <a:r>
-              <a:rPr lang="en-US" sz="2000" dirty="0" smtClean="0"/>
+              <a:rPr lang="en-US" sz="2000"/>
               <a:t> of power into a </a:t>
             </a:r>
             <a:r>
-              <a:rPr lang="en-US" sz="2000" b="1" dirty="0" smtClean="0"/>
+              <a:rPr lang="en-US" sz="2000" b="1"/>
               <a:t>1:4 symmetric coupler</a:t>
             </a:r>
             <a:r>
-              <a:rPr lang="en-US" sz="2000" dirty="0" smtClean="0"/>
+              <a:rPr lang="en-US" sz="2000"/>
               <a:t> (a coupler that splits the signal equally into 4 output fibers).</a:t>
             </a:r>
-          </a:p>
-          <a:p>
-            <a:pPr lvl="1"/>
-            <a:r>
-              <a:rPr lang="en-US" sz="2000" dirty="0" smtClean="0"/>
+            <a:endParaRPr/>
+          </a:p>
+          <a:p>
+            <a:pPr lvl="1">
+              <a:defRPr/>
+            </a:pPr>
+            <a:r>
+              <a:rPr lang="en-US" sz="2000"/>
               <a:t>Calculate the power in </a:t>
             </a:r>
             <a:r>
-              <a:rPr lang="en-US" sz="2000" b="1" dirty="0" err="1" smtClean="0"/>
+              <a:rPr lang="en-US" sz="2000" b="1"/>
               <a:t>mW</a:t>
             </a:r>
             <a:r>
-              <a:rPr lang="en-US" sz="2000" dirty="0" smtClean="0"/>
+              <a:rPr lang="en-US" sz="2000"/>
               <a:t> at each output port (assume no internal excess loss).</a:t>
             </a:r>
-          </a:p>
-          <a:p>
-            <a:pPr lvl="1"/>
-            <a:r>
-              <a:rPr lang="en-US" sz="2000" dirty="0" smtClean="0"/>
+            <a:endParaRPr/>
+          </a:p>
+          <a:p>
+            <a:pPr lvl="1">
+              <a:defRPr/>
+            </a:pPr>
+            <a:r>
+              <a:rPr lang="en-US" sz="2000"/>
               <a:t>Express the output power of one port in </a:t>
             </a:r>
             <a:r>
-              <a:rPr lang="en-US" sz="2000" b="1" dirty="0" err="1" smtClean="0"/>
+              <a:rPr lang="en-US" sz="2000" b="1"/>
               <a:t>dBm</a:t>
             </a:r>
             <a:r>
-              <a:rPr lang="en-US" sz="2000" dirty="0" smtClean="0"/>
+              <a:rPr lang="en-US" sz="2000"/>
               <a:t>.</a:t>
             </a:r>
-          </a:p>
-          <a:p>
-            <a:endParaRPr lang="en-US" dirty="0"/>
+            <a:endParaRPr/>
+          </a:p>
+          <a:p>
+            <a:pPr>
+              <a:defRPr/>
+            </a:pPr>
+            <a:endParaRPr lang="en-US"/>
           </a:p>
         </p:txBody>
       </p:sp>
       <p:pic>
         <p:nvPicPr>
-          <p:cNvPr id="4" name="Picture 3"/>
+          <p:cNvPr id="1987865999" name="Picture 3"/>
           <p:cNvPicPr>
             <a:picLocks noChangeAspect="1"/>
           </p:cNvPicPr>
           <p:nvPr/>
         </p:nvPicPr>
-        <p:blipFill>
-          <a:blip r:embed="rId2"/>
-          <a:stretch>
-            <a:fillRect/>
-          </a:stretch>
+        <p:blipFill rotWithShape="1">
+          <a:blip r:embed="rId3"/>
+          <a:stretch/>
         </p:blipFill>
-        <p:spPr>
+        <p:spPr bwMode="auto">
           <a:xfrm>
             <a:off x="1732820" y="3843012"/>
             <a:ext cx="5191850" cy="2333951"/>
@@ -4684,20 +6063,23 @@
         </p:spPr>
       </p:pic>
     </p:spTree>
-    <p:extLst>
-      <p:ext uri="{BB962C8B-B14F-4D97-AF65-F5344CB8AC3E}">
-        <p14:creationId xmlns:p14="http://schemas.microsoft.com/office/powerpoint/2010/main" val="2050368422"/>
-      </p:ext>
-    </p:extLst>
   </p:cSld>
   <p:clrMapOvr>
     <a:masterClrMapping/>
   </p:clrMapOvr>
+  <mc:AlternateContent xmlns:mc="http://schemas.openxmlformats.org/markup-compatibility/2006">
+    <mc:Choice xmlns:p159="http://schemas.microsoft.com/office/powerpoint/2015/09/main" xmlns:p14="http://schemas.microsoft.com/office/powerpoint/2010/main" Requires="p159">
+      <p:transition p14:dur="500" advClick="1"/>
+    </mc:Choice>
+    <mc:Fallback>
+      <p:transition advClick="1"/>
+    </mc:Fallback>
+  </mc:AlternateContent>
 </p:sld>
 </file>
 
 <file path=ppt/theme/theme1.xml><?xml version="1.0" encoding="utf-8"?>
-<a:theme xmlns:a="http://schemas.openxmlformats.org/drawingml/2006/main" name="Office Theme">
+<a:theme xmlns:a="http://schemas.openxmlformats.org/drawingml/2006/main" xmlns:r="http://schemas.openxmlformats.org/officeDocument/2006/relationships" xmlns:p="http://schemas.openxmlformats.org/presentationml/2006/main" name="Office Theme">
   <a:themeElements>
     <a:clrScheme name="Office">
       <a:dk1>
@@ -4739,74 +6121,14 @@
     </a:clrScheme>
     <a:fontScheme name="Office">
       <a:majorFont>
-        <a:latin typeface="Calibri Light" panose="020F0302020204030204"/>
-        <a:ea typeface=""/>
-        <a:cs typeface=""/>
-        <a:font script="Jpan" typeface="游ゴシック Light"/>
-        <a:font script="Hang" typeface="맑은 고딕"/>
-        <a:font script="Hans" typeface="等线 Light"/>
-        <a:font script="Hant" typeface="新細明體"/>
-        <a:font script="Arab" typeface="Times New Roman"/>
-        <a:font script="Hebr" typeface="Times New Roman"/>
-        <a:font script="Thai" typeface="Angsana New"/>
-        <a:font script="Ethi" typeface="Nyala"/>
-        <a:font script="Beng" typeface="Vrinda"/>
-        <a:font script="Gujr" typeface="Shruti"/>
-        <a:font script="Khmr" typeface="MoolBoran"/>
-        <a:font script="Knda" typeface="Tunga"/>
-        <a:font script="Guru" typeface="Raavi"/>
-        <a:font script="Cans" typeface="Euphemia"/>
-        <a:font script="Cher" typeface="Plantagenet Cherokee"/>
-        <a:font script="Yiii" typeface="Microsoft Yi Baiti"/>
-        <a:font script="Tibt" typeface="Microsoft Himalaya"/>
-        <a:font script="Thaa" typeface="MV Boli"/>
-        <a:font script="Deva" typeface="Mangal"/>
-        <a:font script="Telu" typeface="Gautami"/>
-        <a:font script="Taml" typeface="Latha"/>
-        <a:font script="Syrc" typeface="Estrangelo Edessa"/>
-        <a:font script="Orya" typeface="Kalinga"/>
-        <a:font script="Mlym" typeface="Kartika"/>
-        <a:font script="Laoo" typeface="DokChampa"/>
-        <a:font script="Sinh" typeface="Iskoola Pota"/>
-        <a:font script="Mong" typeface="Mongolian Baiti"/>
-        <a:font script="Viet" typeface="Times New Roman"/>
-        <a:font script="Uigh" typeface="Microsoft Uighur"/>
-        <a:font script="Geor" typeface="Sylfaen"/>
+        <a:latin typeface="Calibri Light"/>
+        <a:ea typeface="Arial"/>
+        <a:cs typeface="Arial"/>
       </a:majorFont>
       <a:minorFont>
-        <a:latin typeface="Calibri" panose="020F0502020204030204"/>
-        <a:ea typeface=""/>
-        <a:cs typeface=""/>
-        <a:font script="Jpan" typeface="游ゴシック"/>
-        <a:font script="Hang" typeface="맑은 고딕"/>
-        <a:font script="Hans" typeface="等线"/>
-        <a:font script="Hant" typeface="新細明體"/>
-        <a:font script="Arab" typeface="Arial"/>
-        <a:font script="Hebr" typeface="Arial"/>
-        <a:font script="Thai" typeface="Cordia New"/>
-        <a:font script="Ethi" typeface="Nyala"/>
-        <a:font script="Beng" typeface="Vrinda"/>
-        <a:font script="Gujr" typeface="Shruti"/>
-        <a:font script="Khmr" typeface="DaunPenh"/>
-        <a:font script="Knda" typeface="Tunga"/>
-        <a:font script="Guru" typeface="Raavi"/>
-        <a:font script="Cans" typeface="Euphemia"/>
-        <a:font script="Cher" typeface="Plantagenet Cherokee"/>
-        <a:font script="Yiii" typeface="Microsoft Yi Baiti"/>
-        <a:font script="Tibt" typeface="Microsoft Himalaya"/>
-        <a:font script="Thaa" typeface="MV Boli"/>
-        <a:font script="Deva" typeface="Mangal"/>
-        <a:font script="Telu" typeface="Gautami"/>
-        <a:font script="Taml" typeface="Latha"/>
-        <a:font script="Syrc" typeface="Estrangelo Edessa"/>
-        <a:font script="Orya" typeface="Kalinga"/>
-        <a:font script="Mlym" typeface="Kartika"/>
-        <a:font script="Laoo" typeface="DokChampa"/>
-        <a:font script="Sinh" typeface="Iskoola Pota"/>
-        <a:font script="Mong" typeface="Mongolian Baiti"/>
-        <a:font script="Viet" typeface="Arial"/>
-        <a:font script="Uigh" typeface="Microsoft Uighur"/>
-        <a:font script="Geor" typeface="Sylfaen"/>
+        <a:latin typeface="Calibri"/>
+        <a:ea typeface="Arial"/>
+        <a:cs typeface="Arial"/>
       </a:minorFont>
     </a:fontScheme>
     <a:fmtScheme name="Office">
@@ -4814,7 +6136,7 @@
         <a:solidFill>
           <a:schemeClr val="phClr"/>
         </a:solidFill>
-        <a:gradFill rotWithShape="1">
+        <a:gradFill>
           <a:gsLst>
             <a:gs pos="0">
               <a:schemeClr val="phClr">
@@ -4840,7 +6162,7 @@
           </a:gsLst>
           <a:lin ang="5400000" scaled="0"/>
         </a:gradFill>
-        <a:gradFill rotWithShape="1">
+        <a:gradFill>
           <a:gsLst>
             <a:gs pos="0">
               <a:schemeClr val="phClr">
@@ -4917,7 +6239,7 @@
             <a:satMod val="170000"/>
           </a:schemeClr>
         </a:solidFill>
-        <a:gradFill rotWithShape="1">
+        <a:gradFill>
           <a:gsLst>
             <a:gs pos="0">
               <a:schemeClr val="phClr">
@@ -4948,11 +6270,200 @@
     </a:fmtScheme>
   </a:themeElements>
   <a:objectDefaults/>
-  <a:extraClrSchemeLst/>
-  <a:extLst>
-    <a:ext uri="{05A4C25C-085E-4340-85A3-A5531E510DB2}">
-      <thm15:themeFamily xmlns:thm15="http://schemas.microsoft.com/office/thememl/2012/main" name="Office Theme" id="{62F939B6-93AF-4DB8-9C6B-D6C7DFDC589F}" vid="{4A3C46E8-61CC-4603-A589-7422A47A8E4A}"/>
-    </a:ext>
-  </a:extLst>
+</a:theme>
+</file>
+
+<file path=ppt/theme/theme2.xml><?xml version="1.0" encoding="utf-8"?>
+<a:theme xmlns:a="http://schemas.openxmlformats.org/drawingml/2006/main" xmlns:r="http://schemas.openxmlformats.org/officeDocument/2006/relationships" xmlns:p="http://schemas.openxmlformats.org/presentationml/2006/main" name="Office Theme">
+  <a:themeElements>
+    <a:clrScheme name="Office">
+      <a:dk1>
+        <a:sysClr val="windowText" lastClr="000000"/>
+      </a:dk1>
+      <a:lt1>
+        <a:sysClr val="window" lastClr="FFFFFF"/>
+      </a:lt1>
+      <a:dk2>
+        <a:srgbClr val="44546A"/>
+      </a:dk2>
+      <a:lt2>
+        <a:srgbClr val="E7E6E6"/>
+      </a:lt2>
+      <a:accent1>
+        <a:srgbClr val="5B9BD5"/>
+      </a:accent1>
+      <a:accent2>
+        <a:srgbClr val="ED7D31"/>
+      </a:accent2>
+      <a:accent3>
+        <a:srgbClr val="A5A5A5"/>
+      </a:accent3>
+      <a:accent4>
+        <a:srgbClr val="FFC000"/>
+      </a:accent4>
+      <a:accent5>
+        <a:srgbClr val="4472C4"/>
+      </a:accent5>
+      <a:accent6>
+        <a:srgbClr val="70AD47"/>
+      </a:accent6>
+      <a:hlink>
+        <a:srgbClr val="0563C1"/>
+      </a:hlink>
+      <a:folHlink>
+        <a:srgbClr val="954F72"/>
+      </a:folHlink>
+    </a:clrScheme>
+    <a:fontScheme name="">
+      <a:majorFont>
+        <a:latin typeface="Calibri Light"/>
+        <a:ea typeface="Arial"/>
+        <a:cs typeface="Arial"/>
+      </a:majorFont>
+      <a:minorFont>
+        <a:latin typeface="Calibri"/>
+        <a:ea typeface="Arial"/>
+        <a:cs typeface="Arial"/>
+      </a:minorFont>
+    </a:fontScheme>
+    <a:fmtScheme name="Office">
+      <a:fillStyleLst>
+        <a:solidFill>
+          <a:schemeClr val="phClr"/>
+        </a:solidFill>
+        <a:gradFill>
+          <a:gsLst>
+            <a:gs pos="0">
+              <a:schemeClr val="phClr">
+                <a:lumMod val="110000"/>
+                <a:satMod val="105000"/>
+                <a:tint val="67000"/>
+              </a:schemeClr>
+            </a:gs>
+            <a:gs pos="50000">
+              <a:schemeClr val="phClr">
+                <a:lumMod val="105000"/>
+                <a:satMod val="103000"/>
+                <a:tint val="73000"/>
+              </a:schemeClr>
+            </a:gs>
+            <a:gs pos="100000">
+              <a:schemeClr val="phClr">
+                <a:lumMod val="105000"/>
+                <a:satMod val="109000"/>
+                <a:tint val="81000"/>
+              </a:schemeClr>
+            </a:gs>
+          </a:gsLst>
+          <a:lin ang="5400000" scaled="0"/>
+        </a:gradFill>
+        <a:gradFill>
+          <a:gsLst>
+            <a:gs pos="0">
+              <a:schemeClr val="phClr">
+                <a:satMod val="103000"/>
+                <a:lumMod val="102000"/>
+                <a:tint val="94000"/>
+              </a:schemeClr>
+            </a:gs>
+            <a:gs pos="50000">
+              <a:schemeClr val="phClr">
+                <a:satMod val="110000"/>
+                <a:lumMod val="100000"/>
+                <a:shade val="100000"/>
+              </a:schemeClr>
+            </a:gs>
+            <a:gs pos="100000">
+              <a:schemeClr val="phClr">
+                <a:lumMod val="99000"/>
+                <a:satMod val="120000"/>
+                <a:shade val="78000"/>
+              </a:schemeClr>
+            </a:gs>
+          </a:gsLst>
+          <a:lin ang="5400000" scaled="0"/>
+        </a:gradFill>
+      </a:fillStyleLst>
+      <a:lnStyleLst>
+        <a:ln w="6350" cap="flat" cmpd="sng" algn="ctr">
+          <a:solidFill>
+            <a:schemeClr val="phClr"/>
+          </a:solidFill>
+          <a:prstDash val="solid"/>
+          <a:miter lim="800000"/>
+        </a:ln>
+        <a:ln w="12700" cap="flat" cmpd="sng" algn="ctr">
+          <a:solidFill>
+            <a:schemeClr val="phClr"/>
+          </a:solidFill>
+          <a:prstDash val="solid"/>
+          <a:miter lim="800000"/>
+        </a:ln>
+        <a:ln w="19050" cap="flat" cmpd="sng" algn="ctr">
+          <a:solidFill>
+            <a:schemeClr val="phClr"/>
+          </a:solidFill>
+          <a:prstDash val="solid"/>
+          <a:miter lim="800000"/>
+        </a:ln>
+      </a:lnStyleLst>
+      <a:effectStyleLst>
+        <a:effectStyle>
+          <a:effectLst/>
+        </a:effectStyle>
+        <a:effectStyle>
+          <a:effectLst/>
+        </a:effectStyle>
+        <a:effectStyle>
+          <a:effectLst>
+            <a:outerShdw blurRad="57150" dist="19050" dir="5400000" algn="ctr" rotWithShape="0">
+              <a:srgbClr val="000000">
+                <a:alpha val="63000"/>
+              </a:srgbClr>
+            </a:outerShdw>
+          </a:effectLst>
+        </a:effectStyle>
+      </a:effectStyleLst>
+      <a:bgFillStyleLst>
+        <a:solidFill>
+          <a:schemeClr val="phClr"/>
+        </a:solidFill>
+        <a:solidFill>
+          <a:schemeClr val="phClr">
+            <a:tint val="95000"/>
+            <a:satMod val="170000"/>
+          </a:schemeClr>
+        </a:solidFill>
+        <a:gradFill>
+          <a:gsLst>
+            <a:gs pos="0">
+              <a:schemeClr val="phClr">
+                <a:tint val="93000"/>
+                <a:satMod val="150000"/>
+                <a:shade val="98000"/>
+                <a:lumMod val="102000"/>
+              </a:schemeClr>
+            </a:gs>
+            <a:gs pos="50000">
+              <a:schemeClr val="phClr">
+                <a:tint val="98000"/>
+                <a:satMod val="130000"/>
+                <a:shade val="90000"/>
+                <a:lumMod val="103000"/>
+              </a:schemeClr>
+            </a:gs>
+            <a:gs pos="100000">
+              <a:schemeClr val="phClr">
+                <a:shade val="63000"/>
+                <a:satMod val="120000"/>
+              </a:schemeClr>
+            </a:gs>
+          </a:gsLst>
+          <a:lin ang="5400000" scaled="0"/>
+        </a:gradFill>
+      </a:bgFillStyleLst>
+    </a:fmtScheme>
+  </a:themeElements>
+  <a:objectDefaults/>
 </a:theme>
 </file>